--- a/presentations/Артамонов_ВКР_телеметрия.pptx
+++ b/presentations/Артамонов_ВКР_телеметрия.pptx
@@ -4,11 +4,14 @@
   <p:sldMasterIdLst>
     <p:sldMasterId id="2147483648" r:id="rId1"/>
   </p:sldMasterIdLst>
+  <p:notesMasterIdLst>
+    <p:notesMasterId r:id="rId12"/>
+  </p:notesMasterIdLst>
   <p:sldIdLst>
     <p:sldId id="256" r:id="rId2"/>
     <p:sldId id="257" r:id="rId3"/>
-    <p:sldId id="258" r:id="rId4"/>
-    <p:sldId id="259" r:id="rId5"/>
+    <p:sldId id="266" r:id="rId4"/>
+    <p:sldId id="258" r:id="rId5"/>
     <p:sldId id="260" r:id="rId6"/>
     <p:sldId id="261" r:id="rId7"/>
     <p:sldId id="262" r:id="rId8"/>
@@ -16,9 +19,6 @@
     <p:sldId id="264" r:id="rId10"/>
     <p:sldId id="265" r:id="rId11"/>
   </p:sldIdLst>
-  <p:notesMasterIdLst>
-    <p:notesMasterId r:id="rId12"/>
-  </p:notesMasterIdLst>
   <p:sldSz cx="12192000" cy="6858000"/>
   <p:notesSz cx="6858000" cy="12192000"/>
   <p:defaultTextStyle>
@@ -113,6 +113,11 @@
       </a:defRPr>
     </a:lvl9pPr>
   </p:defaultTextStyle>
+  <p:extLst>
+    <p:ext uri="{EFAFB233-063F-42B5-8137-9DF3F51BA10A}">
+      <p15:sldGuideLst xmlns:p15="http://schemas.microsoft.com/office/powerpoint/2012/main"/>
+    </p:ext>
+  </p:extLst>
 </p:presentation>
 </file>
 
@@ -138,234 +143,10 @@
           <a:chExt cx="0" cy="0"/>
         </a:xfrm>
       </p:grpSpPr>
-      <p:sp>
-        <p:nvSpPr>
-          <p:cNvPr id="2" name="Header Placeholder 1"/>
-          <p:cNvSpPr>
-            <a:spLocks noGrp="1"/>
-          </p:cNvSpPr>
-          <p:nvPr>
-            <p:ph type="hdr" sz="quarter"/>
-          </p:nvPr>
-        </p:nvSpPr>
-        <p:spPr>
-          <a:xfrm>
-            <a:off x="0" y="0"/>
-            <a:ext cx="2971800" cy="458788"/>
-          </a:xfrm>
-          <a:prstGeom prst="rect">
-            <a:avLst/>
-          </a:prstGeom>
-        </p:spPr>
-        <p:txBody>
-          <a:bodyPr vert="horz" lIns="91440" tIns="45720" rIns="91440" bIns="45720" rtlCol="0"/>
-          <a:lstStyle>
-            <a:lvl1pPr algn="l">
-              <a:defRPr sz="1200"/>
-            </a:lvl1pPr>
-          </a:lstStyle>
-          <a:p>
-            <a:endParaRPr lang="en-US"/>
-          </a:p>
-        </p:txBody>
-      </p:sp>
-      <p:sp>
-        <p:nvSpPr>
-          <p:cNvPr id="3" name="Date Placeholder 2"/>
-          <p:cNvSpPr>
-            <a:spLocks noGrp="1"/>
-          </p:cNvSpPr>
-          <p:nvPr>
-            <p:ph type="dt" idx="1"/>
-          </p:nvPr>
-        </p:nvSpPr>
-        <p:spPr>
-          <a:xfrm>
-            <a:off x="3884613" y="0"/>
-            <a:ext cx="2971800" cy="458788"/>
-          </a:xfrm>
-          <a:prstGeom prst="rect">
-            <a:avLst/>
-          </a:prstGeom>
-        </p:spPr>
-        <p:txBody>
-          <a:bodyPr vert="horz" lIns="91440" tIns="45720" rIns="91440" bIns="45720" rtlCol="0"/>
-          <a:lstStyle>
-            <a:lvl1pPr algn="r">
-              <a:defRPr sz="1200"/>
-            </a:lvl1pPr>
-          </a:lstStyle>
-          <a:p>
-            <a:fld id="{5282F153-3F37-0F45-9E97-73ACFA13230C}" type="datetimeFigureOut">
-              <a:rPr lang="en-US"/>
-              <a:t>7/23/19</a:t>
-            </a:fld>
-            <a:endParaRPr lang="en-US"/>
-          </a:p>
-        </p:txBody>
-      </p:sp>
-      <p:sp>
-        <p:nvSpPr>
-          <p:cNvPr id="4" name="Slide Image Placeholder 3"/>
-          <p:cNvSpPr>
-            <a:spLocks noGrp="1" noRot="1" noChangeAspect="1"/>
-          </p:cNvSpPr>
-          <p:nvPr>
-            <p:ph type="sldImg" idx="2"/>
-          </p:nvPr>
-        </p:nvSpPr>
-        <p:spPr>
-          <a:xfrm>
-            <a:off x="685800" y="1143000"/>
-            <a:ext cx="5486400" cy="3086100"/>
-          </a:xfrm>
-          <a:prstGeom prst="rect">
-            <a:avLst/>
-          </a:prstGeom>
-          <a:noFill/>
-          <a:ln w="12700">
-            <a:solidFill>
-              <a:prstClr val="black"/>
-            </a:solidFill>
-          </a:ln>
-        </p:spPr>
-        <p:txBody>
-          <a:bodyPr vert="horz" lIns="91440" tIns="45720" rIns="91440" bIns="45720" rtlCol="0" anchor="ctr"/>
-          <a:lstStyle/>
-          <a:p>
-            <a:endParaRPr lang="en-US"/>
-          </a:p>
-        </p:txBody>
-      </p:sp>
-      <p:sp>
-        <p:nvSpPr>
-          <p:cNvPr id="5" name="Notes Placeholder 4"/>
-          <p:cNvSpPr>
-            <a:spLocks noGrp="1"/>
-          </p:cNvSpPr>
-          <p:nvPr>
-            <p:ph type="body" sz="quarter" idx="3"/>
-          </p:nvPr>
-        </p:nvSpPr>
-        <p:spPr>
-          <a:xfrm>
-            <a:off x="685800" y="4400550"/>
-            <a:ext cx="5486400" cy="3600450"/>
-          </a:xfrm>
-          <a:prstGeom prst="rect">
-            <a:avLst/>
-          </a:prstGeom>
-        </p:spPr>
-        <p:txBody>
-          <a:bodyPr vert="horz" lIns="91440" tIns="45720" rIns="91440" bIns="45720" rtlCol="0"/>
-          <a:lstStyle/>
-          <a:p>
-            <a:pPr lvl="0"/>
-            <a:r>
-              <a:rPr lang="en-US"/>
-              <a:t>Click to edit Master text styles</a:t>
-            </a:r>
-          </a:p>
-          <a:p>
-            <a:pPr lvl="1"/>
-            <a:r>
-              <a:rPr lang="en-US"/>
-              <a:t>Second level</a:t>
-            </a:r>
-          </a:p>
-          <a:p>
-            <a:pPr lvl="2"/>
-            <a:r>
-              <a:rPr lang="en-US"/>
-              <a:t>Third level</a:t>
-            </a:r>
-          </a:p>
-          <a:p>
-            <a:pPr lvl="3"/>
-            <a:r>
-              <a:rPr lang="en-US"/>
-              <a:t>Fourth level</a:t>
-            </a:r>
-          </a:p>
-          <a:p>
-            <a:pPr lvl="4"/>
-            <a:r>
-              <a:rPr lang="en-US"/>
-              <a:t>Fifth level</a:t>
-            </a:r>
-          </a:p>
-        </p:txBody>
-      </p:sp>
-      <p:sp>
-        <p:nvSpPr>
-          <p:cNvPr id="6" name="Footer Placeholder 5"/>
-          <p:cNvSpPr>
-            <a:spLocks noGrp="1"/>
-          </p:cNvSpPr>
-          <p:nvPr>
-            <p:ph type="ftr" sz="quarter" idx="4"/>
-          </p:nvPr>
-        </p:nvSpPr>
-        <p:spPr>
-          <a:xfrm>
-            <a:off x="0" y="8685213"/>
-            <a:ext cx="2971800" cy="458787"/>
-          </a:xfrm>
-          <a:prstGeom prst="rect">
-            <a:avLst/>
-          </a:prstGeom>
-        </p:spPr>
-        <p:txBody>
-          <a:bodyPr vert="horz" lIns="91440" tIns="45720" rIns="91440" bIns="45720" rtlCol="0" anchor="b"/>
-          <a:lstStyle>
-            <a:lvl1pPr algn="l">
-              <a:defRPr sz="1200"/>
-            </a:lvl1pPr>
-          </a:lstStyle>
-          <a:p>
-            <a:endParaRPr lang="en-US"/>
-          </a:p>
-        </p:txBody>
-      </p:sp>
-      <p:sp>
-        <p:nvSpPr>
-          <p:cNvPr id="7" name="Slide Number Placeholder 6"/>
-          <p:cNvSpPr>
-            <a:spLocks noGrp="1"/>
-          </p:cNvSpPr>
-          <p:nvPr>
-            <p:ph type="sldNum" sz="quarter" idx="5"/>
-          </p:nvPr>
-        </p:nvSpPr>
-        <p:spPr>
-          <a:xfrm>
-            <a:off x="3884613" y="8685213"/>
-            <a:ext cx="2971800" cy="458787"/>
-          </a:xfrm>
-          <a:prstGeom prst="rect">
-            <a:avLst/>
-          </a:prstGeom>
-        </p:spPr>
-        <p:txBody>
-          <a:bodyPr vert="horz" lIns="91440" tIns="45720" rIns="91440" bIns="45720" rtlCol="0" anchor="b"/>
-          <a:lstStyle>
-            <a:lvl1pPr algn="r">
-              <a:defRPr sz="1200"/>
-            </a:lvl1pPr>
-          </a:lstStyle>
-          <a:p>
-            <a:fld id="{CE5E9CC1-C706-0F49-92D6-E571CC5EEA8F}" type="slidenum">
-              <a:rPr lang="en-US"/>
-              <a:t>‹#›</a:t>
-            </a:fld>
-            <a:endParaRPr lang="en-US"/>
-          </a:p>
-        </p:txBody>
-      </p:sp>
     </p:spTree>
     <p:extLst>
       <p:ext uri="{BB962C8B-B14F-4D97-AF65-F5344CB8AC3E}">
-        <p14:creationId xmlns:p14="http://schemas.microsoft.com/office/powerpoint/2010/main" val="1024086991"/>
+        <p14:creationId xmlns:p14="http://schemas.microsoft.com/office/powerpoint/2010/main" val="897662382"/>
       </p:ext>
     </p:extLst>
   </p:cSld>
@@ -513,7 +294,6 @@
               <a:rPr lang="en-US" dirty="0"/>
               <a:t>Здравствуйте. Я делал клиентскую часть проекта — плагин для движка Godot. Его задача — дать разработчику игры простой инструмент: скопировал папку аддона, включил плагин, и игра начинает собирать телеметрию и получать адаптацию из облака. При этом разработчик не пишет ни строчки ML-кода. Расскажу про сферу инди-разработки, почему Godot, как устроен плагин, его интерфейс и контракт с сервером.</a:t>
             </a:r>
-            <a:endParaRPr lang="en-US" dirty="0"/>
           </a:p>
         </p:txBody>
       </p:sp>
@@ -535,94 +315,6 @@
             <a:fld id="{F7021451-1387-4CA6-816F-3879F97B5CBC}" type="slidenum">
               <a:rPr lang="en-US"/>
               <a:t>1</a:t>
-            </a:fld>
-            <a:endParaRPr lang="en-US"/>
-          </a:p>
-        </p:txBody>
-      </p:sp>
-    </p:spTree>
-    <p:extLst>
-      <p:ext uri="{BB962C8B-B14F-4D97-AF65-F5344CB8AC3E}">
-        <p14:creationId xmlns:p14="http://schemas.microsoft.com/office/powerpoint/2010/main" val="1024086991"/>
-      </p:ext>
-    </p:extLst>
-  </p:cSld>
-  <p:clrMapOvr>
-    <a:masterClrMapping/>
-  </p:clrMapOvr>
-</p:notes>
-</file>
-
-<file path=ppt/notesSlides/notesSlide10.xml><?xml version="1.0" encoding="utf-8"?>
-<p:notes xmlns:a="http://schemas.openxmlformats.org/drawingml/2006/main" xmlns:r="http://schemas.openxmlformats.org/officeDocument/2006/relationships" xmlns:p="http://schemas.openxmlformats.org/presentationml/2006/main">
-  <p:cSld>
-    <p:spTree>
-      <p:nvGrpSpPr>
-        <p:cNvPr id="1" name=""/>
-        <p:cNvGrpSpPr/>
-        <p:nvPr/>
-      </p:nvGrpSpPr>
-      <p:grpSpPr>
-        <a:xfrm>
-          <a:off x="0" y="0"/>
-          <a:ext cx="0" cy="0"/>
-          <a:chOff x="0" y="0"/>
-          <a:chExt cx="0" cy="0"/>
-        </a:xfrm>
-      </p:grpSpPr>
-      <p:sp>
-        <p:nvSpPr>
-          <p:cNvPr id="2" name="Slide Image Placeholder 1"/>
-          <p:cNvSpPr>
-            <a:spLocks noGrp="1" noRot="1" noChangeAspect="1"/>
-          </p:cNvSpPr>
-          <p:nvPr>
-            <p:ph type="sldImg"/>
-          </p:nvPr>
-        </p:nvSpPr>
-        <p:spPr/>
-      </p:sp>
-      <p:sp>
-        <p:nvSpPr>
-          <p:cNvPr id="3" name="Notes Placeholder 2"/>
-          <p:cNvSpPr>
-            <a:spLocks noGrp="1"/>
-          </p:cNvSpPr>
-          <p:nvPr>
-            <p:ph type="body" idx="1"/>
-          </p:nvPr>
-        </p:nvSpPr>
-        <p:spPr/>
-        <p:txBody>
-          <a:bodyPr/>
-          <a:lstStyle/>
-          <a:p>
-            <a:r>
-              <a:rPr lang="en-US" dirty="0"/>
-              <a:t>Итог по моей части. Плагин analytics_plugin для Godot 4 даёт инди-разработчику серьёзную аналитику и адаптивный геймплей через простое API из четырёх вызовов, с настройкой прямо в редакторе и надёжной отправкой телеметрии. Спасибо за внимание.</a:t>
-            </a:r>
-            <a:endParaRPr lang="en-US" dirty="0"/>
-          </a:p>
-        </p:txBody>
-      </p:sp>
-      <p:sp>
-        <p:nvSpPr>
-          <p:cNvPr id="4" name="Slide Number Placeholder 3"/>
-          <p:cNvSpPr>
-            <a:spLocks noGrp="1"/>
-          </p:cNvSpPr>
-          <p:nvPr>
-            <p:ph type="sldNum" sz="quarter" idx="10"/>
-          </p:nvPr>
-        </p:nvSpPr>
-        <p:spPr/>
-        <p:txBody>
-          <a:bodyPr/>
-          <a:lstStyle/>
-          <a:p>
-            <a:fld id="{F7021451-1387-4CA6-816F-3879F97B5CBC}" type="slidenum">
-              <a:rPr lang="en-US"/>
-              <a:t>10</a:t>
             </a:fld>
             <a:endParaRPr lang="en-US"/>
           </a:p>
@@ -689,7 +381,6 @@
               <a:rPr lang="en-US" dirty="0"/>
               <a:t>Почему это актуально. Инди-разработчики выпускают огромное число игр, но у них почти нет доступа к серьёзной аналитике поведения и адаптивному балансу — это дорого и требует отдельной команды дата-инженеров. В результате сложность настраивается вручную, на глаз, и одинаково для всех игроков. Наша ниша — готовый плагин, который встраивает такую аналитику в любой проект на Godot за несколько шагов. Вся сложность спрятана внутри, наружу — простое API.</a:t>
             </a:r>
-            <a:endParaRPr lang="en-US" dirty="0"/>
           </a:p>
         </p:txBody>
       </p:sp>
@@ -777,7 +468,6 @@
               <a:rPr lang="en-US" dirty="0"/>
               <a:t>Движок мы выбрали Godot 4 и вот почему. Во-первых, он полностью открытый и бесплатный, под MIT-лицензией — никаких роялти, что принципиально для инди. Во-вторых, у Godot отличная нативная система плагинов: EditorPlugin, autoload-синглтоны, собственные панели в редакторе — всё это «из коробки», именно на этом построен наш аддон. В-третьих, GDScript даёт низкий порог входа и очень быструю итерацию. Целевая версия — 4.2 и выше, вся установка плагина — это копирование одной папки.</a:t>
             </a:r>
-            <a:endParaRPr lang="en-US" dirty="0"/>
           </a:p>
         </p:txBody>
       </p:sp>
@@ -798,7 +488,7 @@
           <a:p>
             <a:fld id="{F7021451-1387-4CA6-816F-3879F97B5CBC}" type="slidenum">
               <a:rPr lang="en-US"/>
-              <a:t>3</a:t>
+              <a:t>4</a:t>
             </a:fld>
             <a:endParaRPr lang="en-US"/>
           </a:p>
@@ -863,9 +553,8 @@
           <a:p>
             <a:r>
               <a:rPr lang="en-US" dirty="0"/>
-              <a:t>Как плагин встроен в общую систему. В игре есть autoload Analytics — единая точка с четырьмя методами: инициализация, старт игры, track событий и завершение. Модуль cloud_sender собирает события в батчи и шлёт на backend на эндпоинт ingest. Важная деталь — offline-буфер в формате JSONL: если сети нет, события не теряются, а отправляются при восстановлении связи. Обратно приходит adaptation, и AdaptationBridge превращает её в конкретные параметры баланса: сложность, плотность врагов, множитель лута.</a:t>
-            </a:r>
-            <a:endParaRPr lang="en-US" dirty="0"/>
+              <a:t>Теперь интерфейс для разработчика. Вся настройка живёт в редакторе Godot, во вкладке Analytics — руками конфиги править не нужно. Есть четыре блока: настройки облака — URL сервера, размер буфера, интервал автоотправки, повторы и кэш на случай оффлайна; ML-профиль — список событий, критические точки с весами, архетипы и параметр bootstrap_actions; просмотр логов — что ушло на сервер и что он ответил; и проверка сервера — кнопка health-check плюс блок с последней полученной адаптацией.</a:t>
+            </a:r>
           </a:p>
         </p:txBody>
       </p:sp>
@@ -886,7 +575,7 @@
           <a:p>
             <a:fld id="{F7021451-1387-4CA6-816F-3879F97B5CBC}" type="slidenum">
               <a:rPr lang="en-US"/>
-              <a:t>4</a:t>
+              <a:t>5</a:t>
             </a:fld>
             <a:endParaRPr lang="en-US"/>
           </a:p>
@@ -951,9 +640,8 @@
           <a:p>
             <a:r>
               <a:rPr lang="en-US" dirty="0"/>
-              <a:t>Теперь интерфейс для разработчика. Вся настройка живёт в редакторе Godot, во вкладке Analytics — руками конфиги править не нужно. Есть четыре блока: настройки облака — URL сервера, размер буфера, интервал автоотправки, повторы и кэш на случай оффлайна; ML-профиль — список событий, критические точки с весами, архетипы и параметр bootstrap_actions; просмотр логов — что ушло на сервер и что он ответил; и проверка сервера — кнопка health-check плюс блок с последней полученной адаптацией.</a:t>
-            </a:r>
-            <a:endParaRPr lang="en-US" dirty="0"/>
+              <a:t>Вот как выглядят панели на практике. Слева — настройки облака: URL эндпоинта ingest, размер батча, интервал автоотправки, число повторов и переключатель offline-кэша. Справа — редактор ML-профиля: разработчик галочками задаёт архетипы, которые должна различать модель, и список критических точек с весами — это те числовые метрики, из которых сервер строит признаки. Всё это сохраняется и автоматически уходит на сервер как профиль игры.</a:t>
+            </a:r>
           </a:p>
         </p:txBody>
       </p:sp>
@@ -974,7 +662,7 @@
           <a:p>
             <a:fld id="{F7021451-1387-4CA6-816F-3879F97B5CBC}" type="slidenum">
               <a:rPr lang="en-US"/>
-              <a:t>5</a:t>
+              <a:t>6</a:t>
             </a:fld>
             <a:endParaRPr lang="en-US"/>
           </a:p>
@@ -1039,9 +727,8 @@
           <a:p>
             <a:r>
               <a:rPr lang="en-US" dirty="0"/>
-              <a:t>Вот как выглядят панели на практике. Слева — настройки облака: URL эндпоинта ingest, размер батча, интервал автоотправки, число повторов и переключатель offline-кэша. Справа — редактор ML-профиля: разработчик галочками задаёт архетипы, которые должна различать модель, и список критических точек с весами — это те числовые метрики, из которых сервер строит признаки. Всё это сохраняется и автоматически уходит на сервер как профиль игры.</a:t>
-            </a:r>
-            <a:endParaRPr lang="en-US" dirty="0"/>
+              <a:t>Контракт с сервером. Плагин шлёт на эндпоинт ingest JSON из двух частей. events — это батч событий: каждое содержит id сессии и игрока, имя события, время и parameters — числовые метрики, на которых работает ML. metadata — это критические точки и архетипы из профиля игры плюс режим cloud. Ключевой момент: большую часть полей плагин подставляет сам — session_id, timestamp, game_time, состояние, — разработчику в коде нужно лишь вызвать track с именем события и своим словарём параметров.</a:t>
+            </a:r>
           </a:p>
         </p:txBody>
       </p:sp>
@@ -1062,7 +749,7 @@
           <a:p>
             <a:fld id="{F7021451-1387-4CA6-816F-3879F97B5CBC}" type="slidenum">
               <a:rPr lang="en-US"/>
-              <a:t>6</a:t>
+              <a:t>7</a:t>
             </a:fld>
             <a:endParaRPr lang="en-US"/>
           </a:p>
@@ -1127,9 +814,8 @@
           <a:p>
             <a:r>
               <a:rPr lang="en-US" dirty="0"/>
-              <a:t>Контракт с сервером. Плагин шлёт на эндпоинт ingest JSON из двух частей. events — это батч событий: каждое содержит id сессии и игрока, имя события, время и parameters — числовые метрики, на которых работает ML. metadata — это критические точки и архетипы из профиля игры плюс режим cloud. Ключевой момент: большую часть полей плагин подставляет сам — session_id, timestamp, game_time, состояние, — разработчику в коде нужно лишь вызвать track с именем события и своим словарём параметров.</a:t>
-            </a:r>
-            <a:endParaRPr lang="en-US" dirty="0"/>
+              <a:t>Почему решение масштабируется на большие проекты. Аддон полностью изолирован — переносится только своя папка, он не лезет в код игры. API минимально: четыре вызова встраиваются в проект любого размера без рефакторинга. Сеть защищена батчами, повторами и offline-очередью, так что нестабильное соединение не ломает игру. И всё конфигурируется под конкретную игру через профиль. Работает это благодаря слабой связности: плагин общается с игрой через autoload и сигналы, а вся тяжёлая логика вынесена на сервер, поэтому клиент остаётся лёгким.</a:t>
+            </a:r>
           </a:p>
         </p:txBody>
       </p:sp>
@@ -1150,7 +836,7 @@
           <a:p>
             <a:fld id="{F7021451-1387-4CA6-816F-3879F97B5CBC}" type="slidenum">
               <a:rPr lang="en-US"/>
-              <a:t>7</a:t>
+              <a:t>8</a:t>
             </a:fld>
             <a:endParaRPr lang="en-US"/>
           </a:p>
@@ -1215,9 +901,8 @@
           <a:p>
             <a:r>
               <a:rPr lang="en-US" dirty="0"/>
-              <a:t>Почему решение масштабируется на большие проекты. Аддон полностью изолирован — переносится только своя папка, он не лезет в код игры. API минимально: четыре вызова встраиваются в проект любого размера без рефакторинга. Сеть защищена батчами, повторами и offline-очередью, так что нестабильное соединение не ломает игру. И всё конфигурируется под конкретную игру через профиль. Работает это благодаря слабой связности: плагин общается с игрой через autoload и сигналы, а вся тяжёлая логика вынесена на сервер, поэтому клиент остаётся лёгким.</a:t>
-            </a:r>
-            <a:endParaRPr lang="en-US" dirty="0"/>
+              <a:t>Планы по плагину: оформить аддон для официальной Asset Library Godot, чтобы его можно было ставить в один клик. Расширить панель редактора — добавить визуализацию воронок событий и историю полученных адаптаций. И довести автоматические E2E-тесты интеграции как регрессионный чеклист. Весь код плагина — в репозитории по QR-коду, папка godot-plugin.</a:t>
+            </a:r>
           </a:p>
         </p:txBody>
       </p:sp>
@@ -1238,7 +923,7 @@
           <a:p>
             <a:fld id="{F7021451-1387-4CA6-816F-3879F97B5CBC}" type="slidenum">
               <a:rPr lang="en-US"/>
-              <a:t>8</a:t>
+              <a:t>9</a:t>
             </a:fld>
             <a:endParaRPr lang="en-US"/>
           </a:p>
@@ -1303,9 +988,8 @@
           <a:p>
             <a:r>
               <a:rPr lang="en-US" dirty="0"/>
-              <a:t>Планы по плагину: оформить аддон для официальной Asset Library Godot, чтобы его можно было ставить в один клик. Расширить панель редактора — добавить визуализацию воронок событий и историю полученных адаптаций. И довести автоматические E2E-тесты интеграции как регрессионный чеклист. Весь код плагина — в репозитории по QR-коду, папка godot-plugin.</a:t>
-            </a:r>
-            <a:endParaRPr lang="en-US" dirty="0"/>
+              <a:t>Итог по моей части. Плагин analytics_plugin для Godot 4 даёт инди-разработчику серьёзную аналитику и адаптивный геймплей через простое API из четырёх вызовов, с настройкой прямо в редакторе и надёжной отправкой телеметрии. Спасибо за внимание.</a:t>
+            </a:r>
           </a:p>
         </p:txBody>
       </p:sp>
@@ -1326,7 +1010,7 @@
           <a:p>
             <a:fld id="{F7021451-1387-4CA6-816F-3879F97B5CBC}" type="slidenum">
               <a:rPr lang="en-US"/>
-              <a:t>9</a:t>
+              <a:t>10</a:t>
             </a:fld>
             <a:endParaRPr lang="en-US"/>
           </a:p>
@@ -1378,6 +1062,11 @@
 <file path=ppt/slideMasters/slideMaster1.xml><?xml version="1.0" encoding="utf-8"?>
 <p:sldMaster xmlns:a="http://schemas.openxmlformats.org/drawingml/2006/main" xmlns:r="http://schemas.openxmlformats.org/officeDocument/2006/relationships" xmlns:p="http://schemas.openxmlformats.org/presentationml/2006/main">
   <p:cSld>
+    <p:bg>
+      <p:bgRef idx="1001">
+        <a:schemeClr val="bg1"/>
+      </p:bgRef>
+    </p:bg>
     <p:spTree>
       <p:nvGrpSpPr>
         <p:cNvPr id="1" name=""/>
@@ -1660,6 +1349,7 @@
         <a:solidFill>
           <a:srgbClr val="0B5E88"/>
         </a:solidFill>
+        <a:effectLst/>
       </p:bgPr>
     </p:bg>
     <p:spTree>
@@ -2117,11 +1807,11 @@
           <a:bodyPr wrap="square" lIns="0" tIns="0" rIns="0" bIns="0" rtlCol="0" anchor="ctr"/>
           <a:lstStyle/>
           <a:p>
-            <a:pPr indent="0" marL="0">
-              <a:buNone/>
-            </a:pPr>
-            <a:r>
-              <a:rPr lang="en-US" sz="1300" b="1" spc="250" kern="0" dirty="0">
+            <a:pPr marL="0" indent="0">
+              <a:buNone/>
+            </a:pPr>
+            <a:r>
+              <a:rPr lang="en-US" sz="1300" b="1" kern="0" spc="250" dirty="0">
                 <a:solidFill>
                   <a:srgbClr val="8FD0EE"/>
                 </a:solidFill>
@@ -2156,7 +1846,7 @@
           <a:bodyPr wrap="square" lIns="0" tIns="0" rIns="0" bIns="0" rtlCol="0" anchor="t"/>
           <a:lstStyle/>
           <a:p>
-            <a:pPr indent="0" marL="0">
+            <a:pPr marL="0" indent="0">
               <a:lnSpc>
                 <a:spcPct val="102000"/>
               </a:lnSpc>
@@ -2198,13 +1888,24 @@
           <a:bodyPr wrap="square" lIns="0" tIns="0" rIns="0" bIns="0" rtlCol="0" anchor="t"/>
           <a:lstStyle/>
           <a:p>
-            <a:pPr indent="0" marL="0">
+            <a:pPr marL="0" indent="0">
               <a:lnSpc>
                 <a:spcPct val="105000"/>
               </a:lnSpc>
               <a:buNone/>
             </a:pPr>
             <a:r>
+              <a:rPr lang="en-US" sz="1450" dirty="0" err="1">
+                <a:solidFill>
+                  <a:srgbClr val="CFE8F6"/>
+                </a:solidFill>
+                <a:latin typeface="Calibri" pitchFamily="34" charset="0"/>
+                <a:ea typeface="Calibri" pitchFamily="34" charset="-122"/>
+                <a:cs typeface="Calibri" pitchFamily="34" charset="-120"/>
+              </a:rPr>
+              <a:t>Плагин</a:t>
+            </a:r>
+            <a:r>
               <a:rPr lang="en-US" sz="1450" dirty="0">
                 <a:solidFill>
                   <a:srgbClr val="CFE8F6"/>
@@ -2213,7 +1914,51 @@
                 <a:ea typeface="Calibri" pitchFamily="34" charset="-122"/>
                 <a:cs typeface="Calibri" pitchFamily="34" charset="-120"/>
               </a:rPr>
-              <a:t>Плагин analytics_plugin для Godot 4: сбор игровых событий и передача телеметрии на сервер с надёжной доставкой и offline-буфером</a:t>
+              <a:t> </a:t>
+            </a:r>
+            <a:r>
+              <a:rPr lang="en-US" sz="1450" dirty="0" err="1">
+                <a:solidFill>
+                  <a:srgbClr val="CFE8F6"/>
+                </a:solidFill>
+                <a:latin typeface="Calibri" pitchFamily="34" charset="0"/>
+                <a:ea typeface="Calibri" pitchFamily="34" charset="-122"/>
+                <a:cs typeface="Calibri" pitchFamily="34" charset="-120"/>
+              </a:rPr>
+              <a:t>для</a:t>
+            </a:r>
+            <a:r>
+              <a:rPr lang="en-US" sz="1450" dirty="0">
+                <a:solidFill>
+                  <a:srgbClr val="CFE8F6"/>
+                </a:solidFill>
+                <a:latin typeface="Calibri" pitchFamily="34" charset="0"/>
+                <a:ea typeface="Calibri" pitchFamily="34" charset="-122"/>
+                <a:cs typeface="Calibri" pitchFamily="34" charset="-120"/>
+              </a:rPr>
+              <a:t> Godot 4: сбор игровых событий и передача телеметрии на сервер с </a:t>
+            </a:r>
+            <a:r>
+              <a:rPr lang="en-US" sz="1450" dirty="0" err="1">
+                <a:solidFill>
+                  <a:srgbClr val="CFE8F6"/>
+                </a:solidFill>
+                <a:latin typeface="Calibri" pitchFamily="34" charset="0"/>
+                <a:ea typeface="Calibri" pitchFamily="34" charset="-122"/>
+                <a:cs typeface="Calibri" pitchFamily="34" charset="-120"/>
+              </a:rPr>
+              <a:t>доставкой</a:t>
+            </a:r>
+            <a:r>
+              <a:rPr lang="en-US" sz="1450" dirty="0">
+                <a:solidFill>
+                  <a:srgbClr val="CFE8F6"/>
+                </a:solidFill>
+                <a:latin typeface="Calibri" pitchFamily="34" charset="0"/>
+                <a:ea typeface="Calibri" pitchFamily="34" charset="-122"/>
+                <a:cs typeface="Calibri" pitchFamily="34" charset="-120"/>
+              </a:rPr>
+              <a:t> и offline-буфером</a:t>
             </a:r>
             <a:endParaRPr lang="en-US" sz="1450" dirty="0"/>
           </a:p>
@@ -2240,7 +1985,7 @@
           </a:solidFill>
           <a:ln/>
           <a:effectLst>
-            <a:outerShdw sx="100000" sy="100000" kx="0" ky="0" algn="bl" rotWithShape="0" blurRad="114300" dist="38100" dir="5400000">
+            <a:outerShdw blurRad="114300" dist="38100" dir="5400000" algn="bl" rotWithShape="0">
               <a:srgbClr val="9FB6C4">
                 <a:alpha val="28000"/>
               </a:srgbClr>
@@ -2267,7 +2012,7 @@
           </a:solidFill>
           <a:ln/>
           <a:effectLst>
-            <a:outerShdw sx="100000" sy="100000" kx="0" ky="0" algn="bl" rotWithShape="0" blurRad="88900" dist="25400" dir="5400000">
+            <a:outerShdw blurRad="88900" dist="25400" dir="5400000" algn="bl" rotWithShape="0">
               <a:srgbClr val="B8C9D4">
                 <a:alpha val="22000"/>
               </a:srgbClr>
@@ -2277,14 +2022,14 @@
       </p:sp>
       <p:pic>
         <p:nvPicPr>
-          <p:cNvPr id="28" name="Image 0" descr="icons/gamepad.png">    </p:cNvPr>
+          <p:cNvPr id="28" name="Image 0" descr="icons/gamepad.png"/>
           <p:cNvPicPr>
             <a:picLocks noChangeAspect="1"/>
           </p:cNvPicPr>
           <p:nvPr/>
         </p:nvPicPr>
         <p:blipFill>
-          <a:blip r:embed="rId1"/>
+          <a:blip r:embed="rId3"/>
           <a:stretch>
             <a:fillRect/>
           </a:stretch>
@@ -2320,11 +2065,11 @@
           <a:bodyPr wrap="square" lIns="0" tIns="0" rIns="0" bIns="0" rtlCol="0" anchor="ctr"/>
           <a:lstStyle/>
           <a:p>
-            <a:pPr indent="0" marL="0">
-              <a:buNone/>
-            </a:pPr>
-            <a:r>
-              <a:rPr lang="en-US" sz="1050" b="1" spc="200" kern="0" dirty="0">
+            <a:pPr marL="0" indent="0">
+              <a:buNone/>
+            </a:pPr>
+            <a:r>
+              <a:rPr lang="en-US" sz="1050" b="1" kern="0" spc="200" dirty="0">
                 <a:solidFill>
                   <a:srgbClr val="8FD0EE"/>
                 </a:solidFill>
@@ -2359,7 +2104,7 @@
           <a:bodyPr wrap="square" lIns="0" tIns="0" rIns="0" bIns="0" rtlCol="0" anchor="ctr"/>
           <a:lstStyle/>
           <a:p>
-            <a:pPr indent="0" marL="0">
+            <a:pPr marL="0" indent="0">
               <a:buNone/>
             </a:pPr>
             <a:r>
@@ -2398,7 +2143,7 @@
           <a:bodyPr wrap="square" lIns="0" tIns="0" rIns="0" bIns="0" rtlCol="0" anchor="ctr"/>
           <a:lstStyle/>
           <a:p>
-            <a:pPr indent="0" marL="0">
+            <a:pPr marL="0" indent="0">
               <a:buNone/>
             </a:pPr>
             <a:r>
@@ -2437,7 +2182,7 @@
           </a:solidFill>
           <a:ln/>
           <a:effectLst>
-            <a:outerShdw sx="100000" sy="100000" kx="0" ky="0" algn="bl" rotWithShape="0" blurRad="114300" dist="38100" dir="5400000">
+            <a:outerShdw blurRad="114300" dist="38100" dir="5400000" algn="bl" rotWithShape="0">
               <a:srgbClr val="9FB6C4">
                 <a:alpha val="28000"/>
               </a:srgbClr>
@@ -2466,11 +2211,11 @@
           <a:bodyPr wrap="square" lIns="0" tIns="0" rIns="0" bIns="0" rtlCol="0" anchor="ctr"/>
           <a:lstStyle/>
           <a:p>
-            <a:pPr indent="0" marL="0">
-              <a:buNone/>
-            </a:pPr>
-            <a:r>
-              <a:rPr lang="en-US" sz="1050" b="1" spc="200" kern="0" dirty="0">
+            <a:pPr marL="0" indent="0">
+              <a:buNone/>
+            </a:pPr>
+            <a:r>
+              <a:rPr lang="en-US" sz="1050" b="1" kern="0" spc="200" dirty="0">
                 <a:solidFill>
                   <a:srgbClr val="8FD0EE"/>
                 </a:solidFill>
@@ -2505,7 +2250,7 @@
           <a:bodyPr wrap="square" lIns="0" tIns="0" rIns="0" bIns="0" rtlCol="0" anchor="t"/>
           <a:lstStyle/>
           <a:p>
-            <a:pPr indent="0" marL="0">
+            <a:pPr marL="0" indent="0">
               <a:lnSpc>
                 <a:spcPct val="102000"/>
               </a:lnSpc>
@@ -2525,7 +2270,7 @@
             <a:endParaRPr lang="en-US" sz="1500" dirty="0"/>
           </a:p>
           <a:p>
-            <a:pPr indent="0" marL="0">
+            <a:pPr marL="0" indent="0">
               <a:lnSpc>
                 <a:spcPct val="102000"/>
               </a:lnSpc>
@@ -2562,6 +2307,7 @@
         <a:solidFill>
           <a:srgbClr val="0B5E88"/>
         </a:solidFill>
+        <a:effectLst/>
       </p:bgPr>
     </p:bg>
     <p:spTree>
@@ -3019,11 +2765,11 @@
           <a:bodyPr wrap="square" lIns="0" tIns="0" rIns="0" bIns="0" rtlCol="0" anchor="ctr"/>
           <a:lstStyle/>
           <a:p>
-            <a:pPr indent="0" marL="0">
-              <a:buNone/>
-            </a:pPr>
-            <a:r>
-              <a:rPr lang="en-US" sz="1400" b="1" spc="300" kern="0" dirty="0">
+            <a:pPr marL="0" indent="0">
+              <a:buNone/>
+            </a:pPr>
+            <a:r>
+              <a:rPr lang="en-US" sz="1400" b="1" kern="0" spc="300" dirty="0">
                 <a:solidFill>
                   <a:srgbClr val="8FD0EE"/>
                 </a:solidFill>
@@ -3058,7 +2804,7 @@
           <a:bodyPr wrap="square" lIns="0" tIns="0" rIns="0" bIns="0" rtlCol="0" anchor="t"/>
           <a:lstStyle/>
           <a:p>
-            <a:pPr indent="0" marL="0">
+            <a:pPr marL="0" indent="0">
               <a:lnSpc>
                 <a:spcPct val="102000"/>
               </a:lnSpc>
@@ -3078,7 +2824,7 @@
             <a:endParaRPr lang="en-US" sz="3400" dirty="0"/>
           </a:p>
           <a:p>
-            <a:pPr indent="0" marL="0">
+            <a:pPr marL="0" indent="0">
               <a:lnSpc>
                 <a:spcPct val="102000"/>
               </a:lnSpc>
@@ -3120,13 +2866,35 @@
           <a:bodyPr wrap="square" lIns="0" tIns="0" rIns="0" bIns="0" rtlCol="0" anchor="t"/>
           <a:lstStyle/>
           <a:p>
-            <a:pPr indent="0" marL="0">
+            <a:pPr marL="0" indent="0">
               <a:lnSpc>
                 <a:spcPct val="105000"/>
               </a:lnSpc>
               <a:buNone/>
             </a:pPr>
             <a:r>
+              <a:rPr lang="ru-RU" sz="1500" dirty="0">
+                <a:solidFill>
+                  <a:srgbClr val="CFE8F6"/>
+                </a:solidFill>
+                <a:latin typeface="Calibri" pitchFamily="34" charset="0"/>
+                <a:ea typeface="Calibri" pitchFamily="34" charset="-122"/>
+                <a:cs typeface="Calibri" pitchFamily="34" charset="-120"/>
+              </a:rPr>
+              <a:t>Плагин </a:t>
+            </a:r>
+            <a:r>
+              <a:rPr lang="en-US" sz="1500" dirty="0" err="1">
+                <a:solidFill>
+                  <a:srgbClr val="CFE8F6"/>
+                </a:solidFill>
+                <a:latin typeface="Calibri" pitchFamily="34" charset="0"/>
+                <a:ea typeface="Calibri" pitchFamily="34" charset="-122"/>
+                <a:cs typeface="Calibri" pitchFamily="34" charset="-120"/>
+              </a:rPr>
+              <a:t>для</a:t>
+            </a:r>
+            <a:r>
               <a:rPr lang="en-US" sz="1500" dirty="0">
                 <a:solidFill>
                   <a:srgbClr val="CFE8F6"/>
@@ -3135,7 +2903,51 @@
                 <a:ea typeface="Calibri" pitchFamily="34" charset="-122"/>
                 <a:cs typeface="Calibri" pitchFamily="34" charset="-120"/>
               </a:rPr>
-              <a:t>analytics_plugin для Godot 4 · простое API из 4 вызовов · настройка в редакторе · надёжная отправка телеметрии и offline-буфер</a:t>
+              <a:t> Godot 4 · настройка в редакторе ·  </a:t>
+            </a:r>
+            <a:r>
+              <a:rPr lang="en-US" sz="1500" dirty="0" err="1">
+                <a:solidFill>
+                  <a:srgbClr val="CFE8F6"/>
+                </a:solidFill>
+                <a:latin typeface="Calibri" pitchFamily="34" charset="0"/>
+                <a:ea typeface="Calibri" pitchFamily="34" charset="-122"/>
+                <a:cs typeface="Calibri" pitchFamily="34" charset="-120"/>
+              </a:rPr>
+              <a:t>отправка</a:t>
+            </a:r>
+            <a:r>
+              <a:rPr lang="en-US" sz="1500" dirty="0">
+                <a:solidFill>
+                  <a:srgbClr val="CFE8F6"/>
+                </a:solidFill>
+                <a:latin typeface="Calibri" pitchFamily="34" charset="0"/>
+                <a:ea typeface="Calibri" pitchFamily="34" charset="-122"/>
+                <a:cs typeface="Calibri" pitchFamily="34" charset="-120"/>
+              </a:rPr>
+              <a:t> </a:t>
+            </a:r>
+            <a:r>
+              <a:rPr lang="en-US" sz="1500" dirty="0" err="1">
+                <a:solidFill>
+                  <a:srgbClr val="CFE8F6"/>
+                </a:solidFill>
+                <a:latin typeface="Calibri" pitchFamily="34" charset="0"/>
+                <a:ea typeface="Calibri" pitchFamily="34" charset="-122"/>
+                <a:cs typeface="Calibri" pitchFamily="34" charset="-120"/>
+              </a:rPr>
+              <a:t>телеметрии</a:t>
+            </a:r>
+            <a:r>
+              <a:rPr lang="en-US" sz="1500" dirty="0">
+                <a:solidFill>
+                  <a:srgbClr val="CFE8F6"/>
+                </a:solidFill>
+                <a:latin typeface="Calibri" pitchFamily="34" charset="0"/>
+                <a:ea typeface="Calibri" pitchFamily="34" charset="-122"/>
+                <a:cs typeface="Calibri" pitchFamily="34" charset="-120"/>
+              </a:rPr>
+              <a:t> ·   offline-буфер</a:t>
             </a:r>
             <a:endParaRPr lang="en-US" sz="1500" dirty="0"/>
           </a:p>
@@ -3162,7 +2974,7 @@
           <a:bodyPr wrap="square" lIns="0" tIns="0" rIns="0" bIns="0" rtlCol="0" anchor="ctr"/>
           <a:lstStyle/>
           <a:p>
-            <a:pPr indent="0" marL="0">
+            <a:pPr marL="0" indent="0">
               <a:buNone/>
             </a:pPr>
             <a:r>
@@ -3176,9 +2988,6 @@
               </a:rPr>
               <a:t>Артамонов Фёдор Андреевич  ·  Godot-инженер</a:t>
             </a:r>
-            <a:pPr indent="0" marL="0">
-              <a:buNone/>
-            </a:pPr>
             <a:r>
               <a:rPr lang="en-US" sz="1400" dirty="0">
                 <a:solidFill>
@@ -3215,7 +3024,7 @@
           <a:bodyPr wrap="square" lIns="0" tIns="0" rIns="0" bIns="0" rtlCol="0" anchor="ctr"/>
           <a:lstStyle/>
           <a:p>
-            <a:pPr indent="0" marL="0">
+            <a:pPr marL="0" indent="0">
               <a:buNone/>
             </a:pPr>
             <a:r>
@@ -3249,6 +3058,7 @@
         <a:solidFill>
           <a:srgbClr val="FFFFFF"/>
         </a:solidFill>
+        <a:effectLst/>
       </p:bgPr>
     </p:bg>
     <p:spTree>
@@ -3286,7 +3096,7 @@
           <a:bodyPr wrap="square" lIns="0" tIns="0" rIns="0" bIns="0" rtlCol="0" anchor="ctr"/>
           <a:lstStyle/>
           <a:p>
-            <a:pPr algn="r" indent="0" marL="0">
+            <a:pPr marL="0" indent="0" algn="r">
               <a:buNone/>
             </a:pPr>
             <a:r>
@@ -3325,11 +3135,11 @@
           <a:bodyPr wrap="square" lIns="0" tIns="0" rIns="0" bIns="0" rtlCol="0" anchor="ctr"/>
           <a:lstStyle/>
           <a:p>
-            <a:pPr indent="0" marL="0">
-              <a:buNone/>
-            </a:pPr>
-            <a:r>
-              <a:rPr lang="en-US" sz="1250" b="1" spc="250" kern="0" dirty="0">
+            <a:pPr marL="0" indent="0">
+              <a:buNone/>
+            </a:pPr>
+            <a:r>
+              <a:rPr lang="en-US" sz="1250" b="1" kern="0" spc="250" dirty="0">
                 <a:solidFill>
                   <a:srgbClr val="1F9BD8"/>
                 </a:solidFill>
@@ -3364,7 +3174,7 @@
           <a:bodyPr wrap="square" lIns="0" tIns="0" rIns="0" bIns="0" rtlCol="0" anchor="ctr"/>
           <a:lstStyle/>
           <a:p>
-            <a:pPr indent="0" marL="0">
+            <a:pPr marL="0" indent="0">
               <a:buNone/>
             </a:pPr>
             <a:r>
@@ -3384,84 +3194,6 @@
       </p:sp>
       <p:sp>
         <p:nvSpPr>
-          <p:cNvPr id="5" name="Text 3"/>
-          <p:cNvSpPr/>
-          <p:nvPr/>
-        </p:nvSpPr>
-        <p:spPr>
-          <a:xfrm>
-            <a:off x="640080" y="6437376"/>
-            <a:ext cx="7315200" cy="274320"/>
-          </a:xfrm>
-          <a:prstGeom prst="rect">
-            <a:avLst/>
-          </a:prstGeom>
-          <a:noFill/>
-          <a:ln/>
-        </p:spPr>
-        <p:txBody>
-          <a:bodyPr wrap="square" lIns="0" tIns="0" rIns="0" bIns="0" rtlCol="0" anchor="ctr"/>
-          <a:lstStyle/>
-          <a:p>
-            <a:pPr indent="0" marL="0">
-              <a:buNone/>
-            </a:pPr>
-            <a:r>
-              <a:rPr lang="en-US" sz="900" dirty="0">
-                <a:solidFill>
-                  <a:srgbClr val="6B7480"/>
-                </a:solidFill>
-                <a:latin typeface="Calibri" pitchFamily="34" charset="0"/>
-                <a:ea typeface="Calibri" pitchFamily="34" charset="-122"/>
-                <a:cs typeface="Calibri" pitchFamily="34" charset="-120"/>
-              </a:rPr>
-              <a:t>адаптивный геймплей на телеметрии</a:t>
-            </a:r>
-            <a:endParaRPr lang="en-US" sz="900" dirty="0"/>
-          </a:p>
-        </p:txBody>
-      </p:sp>
-      <p:sp>
-        <p:nvSpPr>
-          <p:cNvPr id="6" name="Text 4"/>
-          <p:cNvSpPr/>
-          <p:nvPr/>
-        </p:nvSpPr>
-        <p:spPr>
-          <a:xfrm>
-            <a:off x="10728655" y="6437376"/>
-            <a:ext cx="822960" cy="274320"/>
-          </a:xfrm>
-          <a:prstGeom prst="rect">
-            <a:avLst/>
-          </a:prstGeom>
-          <a:noFill/>
-          <a:ln/>
-        </p:spPr>
-        <p:txBody>
-          <a:bodyPr wrap="square" lIns="0" tIns="0" rIns="0" bIns="0" rtlCol="0" anchor="ctr"/>
-          <a:lstStyle/>
-          <a:p>
-            <a:pPr algn="r" indent="0" marL="0">
-              <a:buNone/>
-            </a:pPr>
-            <a:r>
-              <a:rPr lang="en-US" sz="900" dirty="0">
-                <a:solidFill>
-                  <a:srgbClr val="6B7480"/>
-                </a:solidFill>
-                <a:latin typeface="Calibri" pitchFamily="34" charset="0"/>
-                <a:ea typeface="Calibri" pitchFamily="34" charset="-122"/>
-                <a:cs typeface="Calibri" pitchFamily="34" charset="-120"/>
-              </a:rPr>
-              <a:t>2 / 10</a:t>
-            </a:r>
-            <a:endParaRPr lang="en-US" sz="900" dirty="0"/>
-          </a:p>
-        </p:txBody>
-      </p:sp>
-      <p:sp>
-        <p:nvSpPr>
           <p:cNvPr id="7" name="Text 5"/>
           <p:cNvSpPr/>
           <p:nvPr/>
@@ -3481,7 +3213,7 @@
           <a:bodyPr wrap="square" lIns="0" tIns="0" rIns="0" bIns="0" rtlCol="0" anchor="ctr"/>
           <a:lstStyle/>
           <a:p>
-            <a:pPr indent="0" marL="0">
+            <a:pPr marL="0" indent="0">
               <a:lnSpc>
                 <a:spcPct val="105000"/>
               </a:lnSpc>
@@ -3528,7 +3260,7 @@
             <a:prstDash val="solid"/>
           </a:ln>
           <a:effectLst>
-            <a:outerShdw sx="100000" sy="100000" kx="0" ky="0" algn="bl" rotWithShape="0" blurRad="88900" dist="25400" dir="5400000">
+            <a:outerShdw blurRad="88900" dist="25400" dir="5400000" algn="bl" rotWithShape="0">
               <a:srgbClr val="B8C9D4">
                 <a:alpha val="22000"/>
               </a:srgbClr>
@@ -3555,7 +3287,7 @@
           </a:solidFill>
           <a:ln/>
           <a:effectLst>
-            <a:outerShdw sx="100000" sy="100000" kx="0" ky="0" algn="bl" rotWithShape="0" blurRad="88900" dist="25400" dir="5400000">
+            <a:outerShdw blurRad="88900" dist="25400" dir="5400000" algn="bl" rotWithShape="0">
               <a:srgbClr val="B8C9D4">
                 <a:alpha val="22000"/>
               </a:srgbClr>
@@ -3565,14 +3297,14 @@
       </p:sp>
       <p:pic>
         <p:nvPicPr>
-          <p:cNvPr id="10" name="Image 0" descr="icons/store.png">    </p:cNvPr>
+          <p:cNvPr id="10" name="Image 0" descr="icons/store.png"/>
           <p:cNvPicPr>
             <a:picLocks noChangeAspect="1"/>
           </p:cNvPicPr>
           <p:nvPr/>
         </p:nvPicPr>
         <p:blipFill>
-          <a:blip r:embed="rId1"/>
+          <a:blip r:embed="rId3"/>
           <a:stretch>
             <a:fillRect/>
           </a:stretch>
@@ -3608,7 +3340,7 @@
           <a:bodyPr wrap="square" lIns="0" tIns="0" rIns="0" bIns="0" rtlCol="0" anchor="t"/>
           <a:lstStyle/>
           <a:p>
-            <a:pPr indent="0" marL="0">
+            <a:pPr marL="0" indent="0">
               <a:buNone/>
             </a:pPr>
             <a:r>
@@ -3647,7 +3379,7 @@
           <a:bodyPr wrap="square" lIns="0" tIns="0" rIns="0" bIns="0" rtlCol="0" anchor="t"/>
           <a:lstStyle/>
           <a:p>
-            <a:pPr indent="0" marL="0">
+            <a:pPr marL="0" indent="0">
               <a:lnSpc>
                 <a:spcPct val="104000"/>
               </a:lnSpc>
@@ -3694,7 +3426,7 @@
             <a:prstDash val="solid"/>
           </a:ln>
           <a:effectLst>
-            <a:outerShdw sx="100000" sy="100000" kx="0" ky="0" algn="bl" rotWithShape="0" blurRad="88900" dist="25400" dir="5400000">
+            <a:outerShdw blurRad="88900" dist="25400" dir="5400000" algn="bl" rotWithShape="0">
               <a:srgbClr val="B8C9D4">
                 <a:alpha val="22000"/>
               </a:srgbClr>
@@ -3721,7 +3453,7 @@
           </a:solidFill>
           <a:ln/>
           <a:effectLst>
-            <a:outerShdw sx="100000" sy="100000" kx="0" ky="0" algn="bl" rotWithShape="0" blurRad="88900" dist="25400" dir="5400000">
+            <a:outerShdw blurRad="88900" dist="25400" dir="5400000" algn="bl" rotWithShape="0">
               <a:srgbClr val="B8C9D4">
                 <a:alpha val="22000"/>
               </a:srgbClr>
@@ -3731,14 +3463,14 @@
       </p:sp>
       <p:pic>
         <p:nvPicPr>
-          <p:cNvPr id="15" name="Image 1" descr="icons/users.png">    </p:cNvPr>
+          <p:cNvPr id="15" name="Image 1" descr="icons/users.png"/>
           <p:cNvPicPr>
             <a:picLocks noChangeAspect="1"/>
           </p:cNvPicPr>
           <p:nvPr/>
         </p:nvPicPr>
         <p:blipFill>
-          <a:blip r:embed="rId2"/>
+          <a:blip r:embed="rId4"/>
           <a:stretch>
             <a:fillRect/>
           </a:stretch>
@@ -3774,7 +3506,7 @@
           <a:bodyPr wrap="square" lIns="0" tIns="0" rIns="0" bIns="0" rtlCol="0" anchor="t"/>
           <a:lstStyle/>
           <a:p>
-            <a:pPr indent="0" marL="0">
+            <a:pPr marL="0" indent="0">
               <a:buNone/>
             </a:pPr>
             <a:r>
@@ -3813,7 +3545,7 @@
           <a:bodyPr wrap="square" lIns="0" tIns="0" rIns="0" bIns="0" rtlCol="0" anchor="t"/>
           <a:lstStyle/>
           <a:p>
-            <a:pPr indent="0" marL="0">
+            <a:pPr marL="0" indent="0">
               <a:lnSpc>
                 <a:spcPct val="104000"/>
               </a:lnSpc>
@@ -3860,7 +3592,7 @@
             <a:prstDash val="solid"/>
           </a:ln>
           <a:effectLst>
-            <a:outerShdw sx="100000" sy="100000" kx="0" ky="0" algn="bl" rotWithShape="0" blurRad="88900" dist="25400" dir="5400000">
+            <a:outerShdw blurRad="88900" dist="25400" dir="5400000" algn="bl" rotWithShape="0">
               <a:srgbClr val="B8C9D4">
                 <a:alpha val="22000"/>
               </a:srgbClr>
@@ -3887,7 +3619,7 @@
           </a:solidFill>
           <a:ln/>
           <a:effectLst>
-            <a:outerShdw sx="100000" sy="100000" kx="0" ky="0" algn="bl" rotWithShape="0" blurRad="88900" dist="25400" dir="5400000">
+            <a:outerShdw blurRad="88900" dist="25400" dir="5400000" algn="bl" rotWithShape="0">
               <a:srgbClr val="B8C9D4">
                 <a:alpha val="22000"/>
               </a:srgbClr>
@@ -3897,14 +3629,14 @@
       </p:sp>
       <p:pic>
         <p:nvPicPr>
-          <p:cNvPr id="20" name="Image 2" descr="icons/sliders.png">    </p:cNvPr>
+          <p:cNvPr id="20" name="Image 2" descr="icons/sliders.png"/>
           <p:cNvPicPr>
             <a:picLocks noChangeAspect="1"/>
           </p:cNvPicPr>
           <p:nvPr/>
         </p:nvPicPr>
         <p:blipFill>
-          <a:blip r:embed="rId3"/>
+          <a:blip r:embed="rId5"/>
           <a:stretch>
             <a:fillRect/>
           </a:stretch>
@@ -3940,7 +3672,7 @@
           <a:bodyPr wrap="square" lIns="0" tIns="0" rIns="0" bIns="0" rtlCol="0" anchor="t"/>
           <a:lstStyle/>
           <a:p>
-            <a:pPr indent="0" marL="0">
+            <a:pPr marL="0" indent="0">
               <a:buNone/>
             </a:pPr>
             <a:r>
@@ -3979,7 +3711,7 @@
           <a:bodyPr wrap="square" lIns="0" tIns="0" rIns="0" bIns="0" rtlCol="0" anchor="t"/>
           <a:lstStyle/>
           <a:p>
-            <a:pPr indent="0" marL="0">
+            <a:pPr marL="0" indent="0">
               <a:lnSpc>
                 <a:spcPct val="104000"/>
               </a:lnSpc>
@@ -4026,7 +3758,7 @@
             <a:prstDash val="solid"/>
           </a:ln>
           <a:effectLst>
-            <a:outerShdw sx="100000" sy="100000" kx="0" ky="0" algn="bl" rotWithShape="0" blurRad="88900" dist="25400" dir="5400000">
+            <a:outerShdw blurRad="88900" dist="25400" dir="5400000" algn="bl" rotWithShape="0">
               <a:srgbClr val="B8C9D4">
                 <a:alpha val="22000"/>
               </a:srgbClr>
@@ -4053,7 +3785,7 @@
           </a:solidFill>
           <a:ln/>
           <a:effectLst>
-            <a:outerShdw sx="100000" sy="100000" kx="0" ky="0" algn="bl" rotWithShape="0" blurRad="88900" dist="25400" dir="5400000">
+            <a:outerShdw blurRad="88900" dist="25400" dir="5400000" algn="bl" rotWithShape="0">
               <a:srgbClr val="B8C9D4">
                 <a:alpha val="22000"/>
               </a:srgbClr>
@@ -4063,14 +3795,14 @@
       </p:sp>
       <p:pic>
         <p:nvPicPr>
-          <p:cNvPr id="25" name="Image 3" descr="icons/puzzle.png">    </p:cNvPr>
+          <p:cNvPr id="25" name="Image 3" descr="icons/puzzle.png"/>
           <p:cNvPicPr>
             <a:picLocks noChangeAspect="1"/>
           </p:cNvPicPr>
           <p:nvPr/>
         </p:nvPicPr>
         <p:blipFill>
-          <a:blip r:embed="rId4"/>
+          <a:blip r:embed="rId6"/>
           <a:stretch>
             <a:fillRect/>
           </a:stretch>
@@ -4106,7 +3838,7 @@
           <a:bodyPr wrap="square" lIns="0" tIns="0" rIns="0" bIns="0" rtlCol="0" anchor="ctr"/>
           <a:lstStyle/>
           <a:p>
-            <a:pPr indent="0" marL="0">
+            <a:pPr marL="0" indent="0">
               <a:lnSpc>
                 <a:spcPct val="103000"/>
               </a:lnSpc>
@@ -4123,12 +3855,6 @@
               </a:rPr>
               <a:t>Ниша проекта:  </a:t>
             </a:r>
-            <a:pPr indent="0" marL="0">
-              <a:lnSpc>
-                <a:spcPct val="103000"/>
-              </a:lnSpc>
-              <a:buNone/>
-            </a:pPr>
             <a:r>
               <a:rPr lang="en-US" sz="1350" dirty="0">
                 <a:solidFill>
@@ -4138,7 +3864,40 @@
                 <a:ea typeface="Calibri" pitchFamily="34" charset="-122"/>
                 <a:cs typeface="Calibri" pitchFamily="34" charset="-120"/>
               </a:rPr>
-              <a:t>готовый плагин, который встраивает «большую» аналитику и адаптивный геймплей в любой Godot-проект за несколько шагов. Сложность системы скрыта внутри — наружу простое API из 4 вызовов.</a:t>
+              <a:t>готовый плагин, который </a:t>
+            </a:r>
+            <a:r>
+              <a:rPr lang="en-US" sz="1350" dirty="0" err="1">
+                <a:solidFill>
+                  <a:srgbClr val="33383F"/>
+                </a:solidFill>
+                <a:latin typeface="Calibri" pitchFamily="34" charset="0"/>
+                <a:ea typeface="Calibri" pitchFamily="34" charset="-122"/>
+                <a:cs typeface="Calibri" pitchFamily="34" charset="-120"/>
+              </a:rPr>
+              <a:t>встраивает</a:t>
+            </a:r>
+            <a:r>
+              <a:rPr lang="en-US" sz="1350">
+                <a:solidFill>
+                  <a:srgbClr val="33383F"/>
+                </a:solidFill>
+                <a:latin typeface="Calibri" pitchFamily="34" charset="0"/>
+                <a:ea typeface="Calibri" pitchFamily="34" charset="-122"/>
+                <a:cs typeface="Calibri" pitchFamily="34" charset="-120"/>
+              </a:rPr>
+              <a:t> аналитику</a:t>
+            </a:r>
+            <a:r>
+              <a:rPr lang="en-US" sz="1350" dirty="0">
+                <a:solidFill>
+                  <a:srgbClr val="33383F"/>
+                </a:solidFill>
+                <a:latin typeface="Calibri" pitchFamily="34" charset="0"/>
+                <a:ea typeface="Calibri" pitchFamily="34" charset="-122"/>
+                <a:cs typeface="Calibri" pitchFamily="34" charset="-120"/>
+              </a:rPr>
+              <a:t> и адаптивный геймплей в любой Godot-проект за несколько шагов. </a:t>
             </a:r>
             <a:endParaRPr lang="en-US" sz="1350" dirty="0"/>
           </a:p>
@@ -4154,12 +3913,13 @@
 
 <file path=ppt/slides/slide3.xml><?xml version="1.0" encoding="utf-8"?>
 <p:sld xmlns:a="http://schemas.openxmlformats.org/drawingml/2006/main" xmlns:r="http://schemas.openxmlformats.org/officeDocument/2006/relationships" xmlns:p="http://schemas.openxmlformats.org/presentationml/2006/main">
-  <p:cSld name="Slide 3">
+  <p:cSld>
     <p:bg>
       <p:bgPr>
         <a:solidFill>
           <a:srgbClr val="FFFFFF"/>
         </a:solidFill>
+        <a:effectLst/>
       </p:bgPr>
     </p:bg>
     <p:spTree>
@@ -4178,14 +3938,14 @@
       </p:grpSpPr>
       <p:sp>
         <p:nvSpPr>
-          <p:cNvPr id="2" name="Text 0"/>
-          <p:cNvSpPr/>
-          <p:nvPr/>
-        </p:nvSpPr>
-        <p:spPr>
-          <a:xfrm>
-            <a:off x="10820095" y="384048"/>
-            <a:ext cx="822960" cy="640080"/>
+          <p:cNvPr id="101" name="Text"/>
+          <p:cNvSpPr/>
+          <p:nvPr/>
+        </p:nvSpPr>
+        <p:spPr>
+          <a:xfrm>
+            <a:off x="640080" y="475488"/>
+            <a:ext cx="8229600" cy="274320"/>
           </a:xfrm>
           <a:prstGeom prst="rect">
             <a:avLst/>
@@ -4197,34 +3957,71 @@
           <a:bodyPr wrap="square" lIns="0" tIns="0" rIns="0" bIns="0" rtlCol="0" anchor="ctr"/>
           <a:lstStyle/>
           <a:p>
-            <a:pPr algn="r" indent="0" marL="0">
-              <a:buNone/>
-            </a:pPr>
-            <a:r>
-              <a:rPr lang="en-US" sz="3000" b="1" dirty="0">
-                <a:solidFill>
-                  <a:srgbClr val="C6D6E0"/>
+            <a:pPr marL="0" indent="0" algn="l">
+              <a:buNone/>
+            </a:pPr>
+            <a:r>
+              <a:rPr lang="ru-RU" sz="1250" b="1" kern="0" spc="250" dirty="0">
+                <a:solidFill>
+                  <a:srgbClr val="1F9BD8"/>
+                </a:solidFill>
+                <a:latin typeface="Calibri" pitchFamily="34" charset="0"/>
+                <a:ea typeface="Calibri" pitchFamily="34" charset="-122"/>
+                <a:cs typeface="Calibri" pitchFamily="34" charset="-120"/>
+              </a:rPr>
+              <a:t>АРХИТЕКТУРА ПРОЕКТА</a:t>
+            </a:r>
+          </a:p>
+        </p:txBody>
+      </p:sp>
+      <p:sp>
+        <p:nvSpPr>
+          <p:cNvPr id="102" name="Text"/>
+          <p:cNvSpPr/>
+          <p:nvPr/>
+        </p:nvSpPr>
+        <p:spPr>
+          <a:xfrm>
+            <a:off x="640080" y="749808"/>
+            <a:ext cx="10362895" cy="640080"/>
+          </a:xfrm>
+          <a:prstGeom prst="rect">
+            <a:avLst/>
+          </a:prstGeom>
+          <a:noFill/>
+          <a:ln/>
+        </p:spPr>
+        <p:txBody>
+          <a:bodyPr wrap="square" lIns="0" tIns="0" rIns="0" bIns="0" rtlCol="0" anchor="ctr"/>
+          <a:lstStyle/>
+          <a:p>
+            <a:pPr marL="0" indent="0" algn="l">
+              <a:buNone/>
+            </a:pPr>
+            <a:r>
+              <a:rPr lang="ru-RU" sz="3000" b="1" kern="0" dirty="0">
+                <a:solidFill>
+                  <a:srgbClr val="111418"/>
                 </a:solidFill>
                 <a:latin typeface="Cambria" pitchFamily="34" charset="0"/>
                 <a:ea typeface="Cambria" pitchFamily="34" charset="-122"/>
                 <a:cs typeface="Cambria" pitchFamily="34" charset="-120"/>
               </a:rPr>
-              <a:t>03</a:t>
-            </a:r>
-            <a:endParaRPr lang="en-US" sz="3000" dirty="0"/>
-          </a:p>
-        </p:txBody>
-      </p:sp>
-      <p:sp>
-        <p:nvSpPr>
-          <p:cNvPr id="3" name="Text 1"/>
-          <p:cNvSpPr/>
-          <p:nvPr/>
-        </p:nvSpPr>
-        <p:spPr>
-          <a:xfrm>
-            <a:off x="640080" y="475488"/>
-            <a:ext cx="8229600" cy="274320"/>
+              <a:t>Как устроен проект целиком</a:t>
+            </a:r>
+          </a:p>
+        </p:txBody>
+      </p:sp>
+      <p:sp>
+        <p:nvSpPr>
+          <p:cNvPr id="103" name="Text"/>
+          <p:cNvSpPr/>
+          <p:nvPr/>
+        </p:nvSpPr>
+        <p:spPr>
+          <a:xfrm>
+            <a:off x="640501" y="1509697"/>
+            <a:ext cx="10911840" cy="520000"/>
           </a:xfrm>
           <a:prstGeom prst="rect">
             <a:avLst/>
@@ -4236,34 +4033,67 @@
           <a:bodyPr wrap="square" lIns="0" tIns="0" rIns="0" bIns="0" rtlCol="0" anchor="ctr"/>
           <a:lstStyle/>
           <a:p>
-            <a:pPr indent="0" marL="0">
-              <a:buNone/>
-            </a:pPr>
-            <a:r>
-              <a:rPr lang="en-US" sz="1250" b="1" spc="250" kern="0" dirty="0">
-                <a:solidFill>
-                  <a:srgbClr val="1F9BD8"/>
-                </a:solidFill>
-                <a:latin typeface="Calibri" pitchFamily="34" charset="0"/>
-                <a:ea typeface="Calibri" pitchFamily="34" charset="-122"/>
-                <a:cs typeface="Calibri" pitchFamily="34" charset="-120"/>
-              </a:rPr>
-              <a:t>ВЫБОР ДВИЖКА</a:t>
-            </a:r>
-            <a:endParaRPr lang="en-US" sz="1250" dirty="0"/>
-          </a:p>
-        </p:txBody>
-      </p:sp>
-      <p:sp>
-        <p:nvSpPr>
-          <p:cNvPr id="4" name="Text 2"/>
-          <p:cNvSpPr/>
-          <p:nvPr/>
-        </p:nvSpPr>
-        <p:spPr>
-          <a:xfrm>
-            <a:off x="640080" y="749808"/>
-            <a:ext cx="10362895" cy="777240"/>
+            <a:pPr marL="0" indent="0" algn="l">
+              <a:buNone/>
+            </a:pPr>
+            <a:r>
+              <a:rPr lang="ru-RU" sz="1300" kern="0" dirty="0">
+                <a:solidFill>
+                  <a:srgbClr val="33383F"/>
+                </a:solidFill>
+                <a:latin typeface="Calibri" pitchFamily="34" charset="0"/>
+                <a:ea typeface="Calibri" pitchFamily="34" charset="-122"/>
+                <a:cs typeface="Calibri" pitchFamily="34" charset="-120"/>
+              </a:rPr>
+              <a:t>Игра собирает события, сервер их обрабатывает и хранит, нейросетевая модель возвращает параметры адаптации — и геймплей подстраивается под игрока.</a:t>
+            </a:r>
+          </a:p>
+        </p:txBody>
+      </p:sp>
+      <p:sp>
+        <p:nvSpPr>
+          <p:cNvPr id="104" name="Card"/>
+          <p:cNvSpPr/>
+          <p:nvPr/>
+        </p:nvSpPr>
+        <p:spPr>
+          <a:xfrm>
+            <a:off x="640080" y="2360000"/>
+            <a:ext cx="3300000" cy="2120000"/>
+          </a:xfrm>
+          <a:prstGeom prst="roundRect">
+            <a:avLst>
+              <a:gd name="adj" fmla="val 4865"/>
+            </a:avLst>
+          </a:prstGeom>
+          <a:solidFill>
+            <a:srgbClr val="1F9BD8"/>
+          </a:solidFill>
+          <a:ln w="19050">
+            <a:solidFill>
+              <a:srgbClr val="1F9BD8"/>
+            </a:solidFill>
+            <a:prstDash val="solid"/>
+          </a:ln>
+          <a:effectLst>
+            <a:outerShdw blurRad="88900" dist="25400" dir="5400000" algn="bl" rotWithShape="0">
+              <a:srgbClr val="B8C9D4">
+                <a:alpha val="22000"/>
+              </a:srgbClr>
+            </a:outerShdw>
+          </a:effectLst>
+        </p:spPr>
+      </p:sp>
+      <p:sp>
+        <p:nvSpPr>
+          <p:cNvPr id="105" name="Text"/>
+          <p:cNvSpPr/>
+          <p:nvPr/>
+        </p:nvSpPr>
+        <p:spPr>
+          <a:xfrm>
+            <a:off x="900080" y="2530000"/>
+            <a:ext cx="2780000" cy="240000"/>
           </a:xfrm>
           <a:prstGeom prst="rect">
             <a:avLst/>
@@ -4275,34 +4105,71 @@
           <a:bodyPr wrap="square" lIns="0" tIns="0" rIns="0" bIns="0" rtlCol="0" anchor="ctr"/>
           <a:lstStyle/>
           <a:p>
-            <a:pPr indent="0" marL="0">
-              <a:buNone/>
-            </a:pPr>
-            <a:r>
-              <a:rPr lang="en-US" sz="3000" b="1" dirty="0">
-                <a:solidFill>
-                  <a:srgbClr val="111418"/>
+            <a:pPr marL="0" indent="0" algn="l">
+              <a:buNone/>
+            </a:pPr>
+            <a:r>
+              <a:rPr lang="ru-RU" sz="950" b="1" kern="0" spc="180" dirty="0">
+                <a:solidFill>
+                  <a:srgbClr val="CFE9F8"/>
+                </a:solidFill>
+                <a:latin typeface="Calibri" pitchFamily="34" charset="0"/>
+                <a:ea typeface="Calibri" pitchFamily="34" charset="-122"/>
+                <a:cs typeface="Calibri" pitchFamily="34" charset="-120"/>
+              </a:rPr>
+              <a:t>ПЛАГИН · GODOT</a:t>
+            </a:r>
+          </a:p>
+        </p:txBody>
+      </p:sp>
+      <p:sp>
+        <p:nvSpPr>
+          <p:cNvPr id="106" name="Text"/>
+          <p:cNvSpPr/>
+          <p:nvPr/>
+        </p:nvSpPr>
+        <p:spPr>
+          <a:xfrm>
+            <a:off x="900080" y="2810000"/>
+            <a:ext cx="2780000" cy="420000"/>
+          </a:xfrm>
+          <a:prstGeom prst="rect">
+            <a:avLst/>
+          </a:prstGeom>
+          <a:noFill/>
+          <a:ln/>
+        </p:spPr>
+        <p:txBody>
+          <a:bodyPr wrap="square" lIns="0" tIns="0" rIns="0" bIns="0" rtlCol="0" anchor="ctr"/>
+          <a:lstStyle/>
+          <a:p>
+            <a:pPr marL="0" indent="0" algn="l">
+              <a:buNone/>
+            </a:pPr>
+            <a:r>
+              <a:rPr lang="ru-RU" sz="1600" b="1" kern="0" dirty="0">
+                <a:solidFill>
+                  <a:srgbClr val="FFFFFF"/>
                 </a:solidFill>
                 <a:latin typeface="Cambria" pitchFamily="34" charset="0"/>
                 <a:ea typeface="Cambria" pitchFamily="34" charset="-122"/>
                 <a:cs typeface="Cambria" pitchFamily="34" charset="-120"/>
               </a:rPr>
-              <a:t>Преимущества Godot 4</a:t>
-            </a:r>
-            <a:endParaRPr lang="en-US" sz="3000" dirty="0"/>
-          </a:p>
-        </p:txBody>
-      </p:sp>
-      <p:sp>
-        <p:nvSpPr>
-          <p:cNvPr id="5" name="Text 3"/>
-          <p:cNvSpPr/>
-          <p:nvPr/>
-        </p:nvSpPr>
-        <p:spPr>
-          <a:xfrm>
-            <a:off x="640080" y="6437376"/>
-            <a:ext cx="7315200" cy="274320"/>
+              <a:t>Игра</a:t>
+            </a:r>
+          </a:p>
+        </p:txBody>
+      </p:sp>
+      <p:sp>
+        <p:nvSpPr>
+          <p:cNvPr id="107" name="Text"/>
+          <p:cNvSpPr/>
+          <p:nvPr/>
+        </p:nvSpPr>
+        <p:spPr>
+          <a:xfrm>
+            <a:off x="900080" y="3220000"/>
+            <a:ext cx="2780000" cy="300000"/>
           </a:xfrm>
           <a:prstGeom prst="rect">
             <a:avLst/>
@@ -4314,112 +4181,33 @@
           <a:bodyPr wrap="square" lIns="0" tIns="0" rIns="0" bIns="0" rtlCol="0" anchor="ctr"/>
           <a:lstStyle/>
           <a:p>
-            <a:pPr indent="0" marL="0">
-              <a:buNone/>
-            </a:pPr>
-            <a:r>
-              <a:rPr lang="en-US" sz="900" dirty="0">
-                <a:solidFill>
-                  <a:srgbClr val="6B7480"/>
-                </a:solidFill>
-                <a:latin typeface="Calibri" pitchFamily="34" charset="0"/>
-                <a:ea typeface="Calibri" pitchFamily="34" charset="-122"/>
-                <a:cs typeface="Calibri" pitchFamily="34" charset="-120"/>
-              </a:rPr>
-              <a:t>адаптивный геймплей на телеметрии</a:t>
-            </a:r>
-            <a:endParaRPr lang="en-US" sz="900" dirty="0"/>
-          </a:p>
-        </p:txBody>
-      </p:sp>
-      <p:sp>
-        <p:nvSpPr>
-          <p:cNvPr id="6" name="Text 4"/>
-          <p:cNvSpPr/>
-          <p:nvPr/>
-        </p:nvSpPr>
-        <p:spPr>
-          <a:xfrm>
-            <a:off x="10728655" y="6437376"/>
-            <a:ext cx="822960" cy="274320"/>
-          </a:xfrm>
-          <a:prstGeom prst="rect">
-            <a:avLst/>
-          </a:prstGeom>
-          <a:noFill/>
-          <a:ln/>
-        </p:spPr>
-        <p:txBody>
-          <a:bodyPr wrap="square" lIns="0" tIns="0" rIns="0" bIns="0" rtlCol="0" anchor="ctr"/>
-          <a:lstStyle/>
-          <a:p>
-            <a:pPr algn="r" indent="0" marL="0">
-              <a:buNone/>
-            </a:pPr>
-            <a:r>
-              <a:rPr lang="en-US" sz="900" dirty="0">
-                <a:solidFill>
-                  <a:srgbClr val="6B7480"/>
-                </a:solidFill>
-                <a:latin typeface="Calibri" pitchFamily="34" charset="0"/>
-                <a:ea typeface="Calibri" pitchFamily="34" charset="-122"/>
-                <a:cs typeface="Calibri" pitchFamily="34" charset="-120"/>
-              </a:rPr>
-              <a:t>3 / 10</a:t>
-            </a:r>
-            <a:endParaRPr lang="en-US" sz="900" dirty="0"/>
-          </a:p>
-        </p:txBody>
-      </p:sp>
-      <p:sp>
-        <p:nvSpPr>
-          <p:cNvPr id="7" name="Text 5"/>
-          <p:cNvSpPr/>
-          <p:nvPr/>
-        </p:nvSpPr>
-        <p:spPr>
-          <a:xfrm>
-            <a:off x="640080" y="1828800"/>
-            <a:ext cx="2743200" cy="868680"/>
-          </a:xfrm>
-          <a:prstGeom prst="rect">
-            <a:avLst/>
-          </a:prstGeom>
-          <a:noFill/>
-          <a:ln/>
-        </p:spPr>
-        <p:txBody>
-          <a:bodyPr wrap="square" lIns="0" tIns="0" rIns="0" bIns="0" rtlCol="0" anchor="ctr"/>
-          <a:lstStyle/>
-          <a:p>
-            <a:pPr algn="ctr" indent="0" marL="0">
-              <a:buNone/>
-            </a:pPr>
-            <a:r>
-              <a:rPr lang="en-US" sz="5000" b="1" dirty="0">
-                <a:solidFill>
-                  <a:srgbClr val="0E7FB8"/>
-                </a:solidFill>
-                <a:latin typeface="Cambria" pitchFamily="34" charset="0"/>
-                <a:ea typeface="Cambria" pitchFamily="34" charset="-122"/>
-                <a:cs typeface="Cambria" pitchFamily="34" charset="-120"/>
-              </a:rPr>
-              <a:t>100%</a:t>
-            </a:r>
-            <a:endParaRPr lang="en-US" sz="5000" dirty="0"/>
-          </a:p>
-        </p:txBody>
-      </p:sp>
-      <p:sp>
-        <p:nvSpPr>
-          <p:cNvPr id="8" name="Text 6"/>
-          <p:cNvSpPr/>
-          <p:nvPr/>
-        </p:nvSpPr>
-        <p:spPr>
-          <a:xfrm>
-            <a:off x="640080" y="2697480"/>
-            <a:ext cx="2743200" cy="457200"/>
+            <a:pPr marL="0" indent="0" algn="l">
+              <a:buNone/>
+            </a:pPr>
+            <a:r>
+              <a:rPr lang="ru-RU" sz="1100" kern="0" dirty="0">
+                <a:solidFill>
+                  <a:srgbClr val="DCF1FB"/>
+                </a:solidFill>
+                <a:latin typeface="Calibri" pitchFamily="34" charset="0"/>
+                <a:ea typeface="Calibri" pitchFamily="34" charset="-122"/>
+                <a:cs typeface="Calibri" pitchFamily="34" charset="-120"/>
+              </a:rPr>
+              <a:t>аддон analytics_plugin</a:t>
+            </a:r>
+          </a:p>
+        </p:txBody>
+      </p:sp>
+      <p:sp>
+        <p:nvSpPr>
+          <p:cNvPr id="108" name="Text"/>
+          <p:cNvSpPr/>
+          <p:nvPr/>
+        </p:nvSpPr>
+        <p:spPr>
+          <a:xfrm>
+            <a:off x="900080" y="3580000"/>
+            <a:ext cx="2780000" cy="820000"/>
           </a:xfrm>
           <a:prstGeom prst="rect">
             <a:avLst/>
@@ -4431,198 +4219,73 @@
           <a:bodyPr wrap="square" lIns="0" tIns="0" rIns="0" bIns="0" rtlCol="0" anchor="t"/>
           <a:lstStyle/>
           <a:p>
-            <a:pPr algn="ctr" indent="0" marL="0">
-              <a:buNone/>
-            </a:pPr>
-            <a:r>
-              <a:rPr lang="en-US" sz="1200" dirty="0">
-                <a:solidFill>
-                  <a:srgbClr val="6B7480"/>
-                </a:solidFill>
-                <a:latin typeface="Calibri" pitchFamily="34" charset="0"/>
-                <a:ea typeface="Calibri" pitchFamily="34" charset="-122"/>
-                <a:cs typeface="Calibri" pitchFamily="34" charset="-120"/>
-              </a:rPr>
-              <a:t>открытый код, MIT-лицензия</a:t>
-            </a:r>
-            <a:endParaRPr lang="en-US" sz="1200" dirty="0"/>
-          </a:p>
-        </p:txBody>
-      </p:sp>
-      <p:sp>
-        <p:nvSpPr>
-          <p:cNvPr id="9" name="Text 7"/>
-          <p:cNvSpPr/>
-          <p:nvPr/>
-        </p:nvSpPr>
-        <p:spPr>
-          <a:xfrm>
-            <a:off x="3383280" y="1828800"/>
-            <a:ext cx="2743200" cy="868680"/>
-          </a:xfrm>
-          <a:prstGeom prst="rect">
-            <a:avLst/>
-          </a:prstGeom>
-          <a:noFill/>
-          <a:ln/>
-        </p:spPr>
-        <p:txBody>
-          <a:bodyPr wrap="square" lIns="0" tIns="0" rIns="0" bIns="0" rtlCol="0" anchor="ctr"/>
-          <a:lstStyle/>
-          <a:p>
-            <a:pPr algn="ctr" indent="0" marL="0">
-              <a:buNone/>
-            </a:pPr>
-            <a:r>
-              <a:rPr lang="en-US" sz="5000" b="1" dirty="0">
-                <a:solidFill>
-                  <a:srgbClr val="0E7FB8"/>
-                </a:solidFill>
-                <a:latin typeface="Cambria" pitchFamily="34" charset="0"/>
-                <a:ea typeface="Cambria" pitchFamily="34" charset="-122"/>
-                <a:cs typeface="Cambria" pitchFamily="34" charset="-120"/>
-              </a:rPr>
-              <a:t>4.2+</a:t>
-            </a:r>
-            <a:endParaRPr lang="en-US" sz="5000" dirty="0"/>
-          </a:p>
-        </p:txBody>
-      </p:sp>
-      <p:sp>
-        <p:nvSpPr>
-          <p:cNvPr id="10" name="Text 8"/>
-          <p:cNvSpPr/>
-          <p:nvPr/>
-        </p:nvSpPr>
-        <p:spPr>
-          <a:xfrm>
-            <a:off x="3383280" y="2697480"/>
-            <a:ext cx="2743200" cy="457200"/>
-          </a:xfrm>
-          <a:prstGeom prst="rect">
-            <a:avLst/>
-          </a:prstGeom>
-          <a:noFill/>
-          <a:ln/>
-        </p:spPr>
-        <p:txBody>
-          <a:bodyPr wrap="square" lIns="0" tIns="0" rIns="0" bIns="0" rtlCol="0" anchor="t"/>
-          <a:lstStyle/>
-          <a:p>
-            <a:pPr algn="ctr" indent="0" marL="0">
-              <a:buNone/>
-            </a:pPr>
-            <a:r>
-              <a:rPr lang="en-US" sz="1200" dirty="0">
-                <a:solidFill>
-                  <a:srgbClr val="6B7480"/>
-                </a:solidFill>
-                <a:latin typeface="Calibri" pitchFamily="34" charset="0"/>
-                <a:ea typeface="Calibri" pitchFamily="34" charset="-122"/>
-                <a:cs typeface="Calibri" pitchFamily="34" charset="-120"/>
-              </a:rPr>
-              <a:t>целевая версия движка</a:t>
-            </a:r>
-            <a:endParaRPr lang="en-US" sz="1200" dirty="0"/>
-          </a:p>
-        </p:txBody>
-      </p:sp>
-      <p:sp>
-        <p:nvSpPr>
-          <p:cNvPr id="11" name="Text 9"/>
-          <p:cNvSpPr/>
-          <p:nvPr/>
-        </p:nvSpPr>
-        <p:spPr>
-          <a:xfrm>
-            <a:off x="6126480" y="1828800"/>
-            <a:ext cx="2743200" cy="868680"/>
-          </a:xfrm>
-          <a:prstGeom prst="rect">
-            <a:avLst/>
-          </a:prstGeom>
-          <a:noFill/>
-          <a:ln/>
-        </p:spPr>
-        <p:txBody>
-          <a:bodyPr wrap="square" lIns="0" tIns="0" rIns="0" bIns="0" rtlCol="0" anchor="ctr"/>
-          <a:lstStyle/>
-          <a:p>
-            <a:pPr algn="ctr" indent="0" marL="0">
-              <a:buNone/>
-            </a:pPr>
-            <a:r>
-              <a:rPr lang="en-US" sz="5000" b="1" dirty="0">
-                <a:solidFill>
-                  <a:srgbClr val="0E7FB8"/>
-                </a:solidFill>
-                <a:latin typeface="Cambria" pitchFamily="34" charset="0"/>
-                <a:ea typeface="Cambria" pitchFamily="34" charset="-122"/>
-                <a:cs typeface="Cambria" pitchFamily="34" charset="-120"/>
-              </a:rPr>
-              <a:t>1 папка</a:t>
-            </a:r>
-            <a:endParaRPr lang="en-US" sz="5000" dirty="0"/>
-          </a:p>
-        </p:txBody>
-      </p:sp>
-      <p:sp>
-        <p:nvSpPr>
-          <p:cNvPr id="12" name="Text 10"/>
-          <p:cNvSpPr/>
-          <p:nvPr/>
-        </p:nvSpPr>
-        <p:spPr>
-          <a:xfrm>
-            <a:off x="6126480" y="2697480"/>
-            <a:ext cx="2743200" cy="457200"/>
-          </a:xfrm>
-          <a:prstGeom prst="rect">
-            <a:avLst/>
-          </a:prstGeom>
-          <a:noFill/>
-          <a:ln/>
-        </p:spPr>
-        <p:txBody>
-          <a:bodyPr wrap="square" lIns="0" tIns="0" rIns="0" bIns="0" rtlCol="0" anchor="t"/>
-          <a:lstStyle/>
-          <a:p>
-            <a:pPr algn="ctr" indent="0" marL="0">
-              <a:buNone/>
-            </a:pPr>
-            <a:r>
-              <a:rPr lang="en-US" sz="1200" dirty="0">
-                <a:solidFill>
-                  <a:srgbClr val="6B7480"/>
-                </a:solidFill>
-                <a:latin typeface="Calibri" pitchFamily="34" charset="0"/>
-                <a:ea typeface="Calibri" pitchFamily="34" charset="-122"/>
-                <a:cs typeface="Calibri" pitchFamily="34" charset="-120"/>
-              </a:rPr>
-              <a:t>вся установка аддона</a:t>
-            </a:r>
-            <a:endParaRPr lang="en-US" sz="1200" dirty="0"/>
-          </a:p>
-        </p:txBody>
-      </p:sp>
-      <p:sp>
-        <p:nvSpPr>
-          <p:cNvPr id="13" name="Shape 11"/>
-          <p:cNvSpPr/>
-          <p:nvPr/>
-        </p:nvSpPr>
-        <p:spPr>
-          <a:xfrm>
-            <a:off x="640080" y="3246120"/>
-            <a:ext cx="3474720" cy="2194560"/>
+            <a:pPr marL="0" indent="0" algn="l">
+              <a:buNone/>
+            </a:pPr>
+            <a:r>
+              <a:rPr lang="ru-RU" sz="1000" kern="0" dirty="0">
+                <a:solidFill>
+                  <a:srgbClr val="E6F4FC"/>
+                </a:solidFill>
+                <a:latin typeface="Calibri" pitchFamily="34" charset="0"/>
+                <a:ea typeface="Calibri" pitchFamily="34" charset="-122"/>
+                <a:cs typeface="Calibri" pitchFamily="34" charset="-120"/>
+              </a:rPr>
+              <a:t>•  сбор игровых событий</a:t>
+            </a:r>
+          </a:p>
+          <a:p>
+            <a:pPr marL="0" indent="0" algn="l">
+              <a:buNone/>
+            </a:pPr>
+            <a:r>
+              <a:rPr lang="ru-RU" sz="1000" kern="0" dirty="0">
+                <a:solidFill>
+                  <a:srgbClr val="E6F4FC"/>
+                </a:solidFill>
+                <a:latin typeface="Calibri" pitchFamily="34" charset="0"/>
+                <a:ea typeface="Calibri" pitchFamily="34" charset="-122"/>
+                <a:cs typeface="Calibri" pitchFamily="34" charset="-120"/>
+              </a:rPr>
+              <a:t>•  отправка телеметрии</a:t>
+            </a:r>
+          </a:p>
+          <a:p>
+            <a:pPr marL="0" indent="0" algn="l">
+              <a:buNone/>
+            </a:pPr>
+            <a:r>
+              <a:rPr lang="ru-RU" sz="1000" kern="0" dirty="0">
+                <a:solidFill>
+                  <a:srgbClr val="E6F4FC"/>
+                </a:solidFill>
+                <a:latin typeface="Calibri" pitchFamily="34" charset="0"/>
+                <a:ea typeface="Calibri" pitchFamily="34" charset="-122"/>
+                <a:cs typeface="Calibri" pitchFamily="34" charset="-120"/>
+              </a:rPr>
+              <a:t>•  приём адаптации</a:t>
+            </a:r>
+          </a:p>
+        </p:txBody>
+      </p:sp>
+      <p:sp>
+        <p:nvSpPr>
+          <p:cNvPr id="109" name="Card"/>
+          <p:cNvSpPr/>
+          <p:nvPr/>
+        </p:nvSpPr>
+        <p:spPr>
+          <a:xfrm>
+            <a:off x="4446000" y="2360000"/>
+            <a:ext cx="3300000" cy="2120000"/>
           </a:xfrm>
           <a:prstGeom prst="roundRect">
             <a:avLst>
-              <a:gd name="adj" fmla="val 3750"/>
+              <a:gd name="adj" fmla="val 4865"/>
             </a:avLst>
           </a:prstGeom>
           <a:solidFill>
-            <a:srgbClr val="FFFFFF"/>
+            <a:srgbClr val="F4FAFD"/>
           </a:solidFill>
           <a:ln w="12700">
             <a:solidFill>
@@ -4631,7 +4294,7 @@
             <a:prstDash val="solid"/>
           </a:ln>
           <a:effectLst>
-            <a:outerShdw sx="100000" sy="100000" kx="0" ky="0" algn="bl" rotWithShape="0" blurRad="88900" dist="25400" dir="5400000">
+            <a:outerShdw blurRad="88900" dist="25400" dir="5400000" algn="bl" rotWithShape="0">
               <a:srgbClr val="B8C9D4">
                 <a:alpha val="22000"/>
               </a:srgbClr>
@@ -4641,65 +4304,14 @@
       </p:sp>
       <p:sp>
         <p:nvSpPr>
-          <p:cNvPr id="14" name="Shape 12"/>
-          <p:cNvSpPr/>
-          <p:nvPr/>
-        </p:nvSpPr>
-        <p:spPr>
-          <a:xfrm>
-            <a:off x="877824" y="3502152"/>
-            <a:ext cx="548640" cy="548640"/>
-          </a:xfrm>
-          <a:prstGeom prst="ellipse">
-            <a:avLst/>
-          </a:prstGeom>
-          <a:solidFill>
-            <a:srgbClr val="1F9BD8"/>
-          </a:solidFill>
-          <a:ln/>
-          <a:effectLst>
-            <a:outerShdw sx="100000" sy="100000" kx="0" ky="0" algn="bl" rotWithShape="0" blurRad="88900" dist="25400" dir="5400000">
-              <a:srgbClr val="B8C9D4">
-                <a:alpha val="22000"/>
-              </a:srgbClr>
-            </a:outerShdw>
-          </a:effectLst>
-        </p:spPr>
-      </p:sp>
-      <p:pic>
-        <p:nvPicPr>
-          <p:cNvPr id="15" name="Image 0" descr="icons/check.png">    </p:cNvPr>
-          <p:cNvPicPr>
-            <a:picLocks noChangeAspect="1"/>
-          </p:cNvPicPr>
-          <p:nvPr/>
-        </p:nvPicPr>
-        <p:blipFill>
-          <a:blip r:embed="rId1"/>
-          <a:stretch>
-            <a:fillRect/>
-          </a:stretch>
-        </p:blipFill>
-        <p:spPr>
-          <a:xfrm>
-            <a:off x="1042416" y="3666744"/>
-            <a:ext cx="219456" cy="219456"/>
-          </a:xfrm>
-          <a:prstGeom prst="rect">
-            <a:avLst/>
-          </a:prstGeom>
-        </p:spPr>
-      </p:pic>
-      <p:sp>
-        <p:nvSpPr>
-          <p:cNvPr id="16" name="Text 13"/>
-          <p:cNvSpPr/>
-          <p:nvPr/>
-        </p:nvSpPr>
-        <p:spPr>
-          <a:xfrm>
-            <a:off x="877824" y="4178808"/>
-            <a:ext cx="3017520" cy="457200"/>
+          <p:cNvPr id="110" name="Text"/>
+          <p:cNvSpPr/>
+          <p:nvPr/>
+        </p:nvSpPr>
+        <p:spPr>
+          <a:xfrm>
+            <a:off x="4706000" y="2530000"/>
+            <a:ext cx="2780000" cy="240000"/>
           </a:xfrm>
           <a:prstGeom prst="rect">
             <a:avLst/>
@@ -4711,34 +4323,109 @@
           <a:bodyPr wrap="square" lIns="0" tIns="0" rIns="0" bIns="0" rtlCol="0" anchor="ctr"/>
           <a:lstStyle/>
           <a:p>
-            <a:pPr indent="0" marL="0">
-              <a:buNone/>
-            </a:pPr>
-            <a:r>
-              <a:rPr lang="en-US" sz="1450" b="1" dirty="0">
+            <a:pPr marL="0" indent="0" algn="l">
+              <a:buNone/>
+            </a:pPr>
+            <a:r>
+              <a:rPr lang="ru-RU" sz="950" b="1" kern="0" spc="180" dirty="0">
+                <a:solidFill>
+                  <a:srgbClr val="1F9BD8"/>
+                </a:solidFill>
+                <a:latin typeface="Calibri" pitchFamily="34" charset="0"/>
+                <a:ea typeface="Calibri" pitchFamily="34" charset="-122"/>
+                <a:cs typeface="Calibri" pitchFamily="34" charset="-120"/>
+              </a:rPr>
+              <a:t>СЕРВЕР</a:t>
+            </a:r>
+          </a:p>
+        </p:txBody>
+      </p:sp>
+      <p:sp>
+        <p:nvSpPr>
+          <p:cNvPr id="111" name="Text"/>
+          <p:cNvSpPr/>
+          <p:nvPr/>
+        </p:nvSpPr>
+        <p:spPr>
+          <a:xfrm>
+            <a:off x="4706000" y="2810000"/>
+            <a:ext cx="2780000" cy="420000"/>
+          </a:xfrm>
+          <a:prstGeom prst="rect">
+            <a:avLst/>
+          </a:prstGeom>
+          <a:noFill/>
+          <a:ln/>
+        </p:spPr>
+        <p:txBody>
+          <a:bodyPr wrap="square" lIns="0" tIns="0" rIns="0" bIns="0" rtlCol="0" anchor="ctr"/>
+          <a:lstStyle/>
+          <a:p>
+            <a:pPr marL="0" indent="0" algn="l">
+              <a:buNone/>
+            </a:pPr>
+            <a:r>
+              <a:rPr lang="ru-RU" sz="1600" b="1" kern="0" dirty="0">
                 <a:solidFill>
                   <a:srgbClr val="111418"/>
                 </a:solidFill>
-                <a:latin typeface="Calibri" pitchFamily="34" charset="0"/>
-                <a:ea typeface="Calibri" pitchFamily="34" charset="-122"/>
-                <a:cs typeface="Calibri" pitchFamily="34" charset="-120"/>
-              </a:rPr>
-              <a:t>Бесплатный и открытый</a:t>
-            </a:r>
-            <a:endParaRPr lang="en-US" sz="1450" dirty="0"/>
-          </a:p>
-        </p:txBody>
-      </p:sp>
-      <p:sp>
-        <p:nvSpPr>
-          <p:cNvPr id="17" name="Text 14"/>
-          <p:cNvSpPr/>
-          <p:nvPr/>
-        </p:nvSpPr>
-        <p:spPr>
-          <a:xfrm>
-            <a:off x="877824" y="4617720"/>
-            <a:ext cx="3017520" cy="731520"/>
+                <a:latin typeface="Cambria" pitchFamily="34" charset="0"/>
+                <a:ea typeface="Cambria" pitchFamily="34" charset="-122"/>
+                <a:cs typeface="Cambria" pitchFamily="34" charset="-120"/>
+              </a:rPr>
+              <a:t>Backend</a:t>
+            </a:r>
+          </a:p>
+        </p:txBody>
+      </p:sp>
+      <p:sp>
+        <p:nvSpPr>
+          <p:cNvPr id="112" name="Text"/>
+          <p:cNvSpPr/>
+          <p:nvPr/>
+        </p:nvSpPr>
+        <p:spPr>
+          <a:xfrm>
+            <a:off x="4706000" y="3220000"/>
+            <a:ext cx="2780000" cy="300000"/>
+          </a:xfrm>
+          <a:prstGeom prst="rect">
+            <a:avLst/>
+          </a:prstGeom>
+          <a:noFill/>
+          <a:ln/>
+        </p:spPr>
+        <p:txBody>
+          <a:bodyPr wrap="square" lIns="0" tIns="0" rIns="0" bIns="0" rtlCol="0" anchor="ctr"/>
+          <a:lstStyle/>
+          <a:p>
+            <a:pPr marL="0" indent="0" algn="l">
+              <a:buNone/>
+            </a:pPr>
+            <a:r>
+              <a:rPr lang="ru-RU" sz="1100" kern="0" dirty="0">
+                <a:solidFill>
+                  <a:srgbClr val="33383F"/>
+                </a:solidFill>
+                <a:latin typeface="Calibri" pitchFamily="34" charset="0"/>
+                <a:ea typeface="Calibri" pitchFamily="34" charset="-122"/>
+                <a:cs typeface="Calibri" pitchFamily="34" charset="-120"/>
+              </a:rPr>
+              <a:t>FastAPI + PostgreSQL</a:t>
+            </a:r>
+          </a:p>
+        </p:txBody>
+      </p:sp>
+      <p:sp>
+        <p:nvSpPr>
+          <p:cNvPr id="113" name="Text"/>
+          <p:cNvSpPr/>
+          <p:nvPr/>
+        </p:nvSpPr>
+        <p:spPr>
+          <a:xfrm>
+            <a:off x="4706000" y="3580000"/>
+            <a:ext cx="2780000" cy="820000"/>
           </a:xfrm>
           <a:prstGeom prst="rect">
             <a:avLst/>
@@ -4750,45 +4437,73 @@
           <a:bodyPr wrap="square" lIns="0" tIns="0" rIns="0" bIns="0" rtlCol="0" anchor="t"/>
           <a:lstStyle/>
           <a:p>
-            <a:pPr indent="0" marL="0">
-              <a:lnSpc>
-                <a:spcPct val="103000"/>
-              </a:lnSpc>
-              <a:buNone/>
-            </a:pPr>
-            <a:r>
-              <a:rPr lang="en-US" sz="1200" dirty="0">
-                <a:solidFill>
-                  <a:srgbClr val="33383F"/>
-                </a:solidFill>
-                <a:latin typeface="Calibri" pitchFamily="34" charset="0"/>
-                <a:ea typeface="Calibri" pitchFamily="34" charset="-122"/>
-                <a:cs typeface="Calibri" pitchFamily="34" charset="-120"/>
-              </a:rPr>
-              <a:t>нет роялти и лицензионных платежей — критично для инди</a:t>
-            </a:r>
-            <a:endParaRPr lang="en-US" sz="1200" dirty="0"/>
-          </a:p>
-        </p:txBody>
-      </p:sp>
-      <p:sp>
-        <p:nvSpPr>
-          <p:cNvPr id="18" name="Shape 15"/>
-          <p:cNvSpPr/>
-          <p:nvPr/>
-        </p:nvSpPr>
-        <p:spPr>
-          <a:xfrm>
-            <a:off x="4352544" y="3246120"/>
-            <a:ext cx="3474720" cy="2194560"/>
+            <a:pPr marL="0" indent="0" algn="l">
+              <a:buNone/>
+            </a:pPr>
+            <a:r>
+              <a:rPr lang="ru-RU" sz="1000" kern="0" dirty="0">
+                <a:solidFill>
+                  <a:srgbClr val="5A6470"/>
+                </a:solidFill>
+                <a:latin typeface="Calibri" pitchFamily="34" charset="0"/>
+                <a:ea typeface="Calibri" pitchFamily="34" charset="-122"/>
+                <a:cs typeface="Calibri" pitchFamily="34" charset="-120"/>
+              </a:rPr>
+              <a:t>•  приём и хранение событий</a:t>
+            </a:r>
+          </a:p>
+          <a:p>
+            <a:pPr marL="0" indent="0" algn="l">
+              <a:buNone/>
+            </a:pPr>
+            <a:r>
+              <a:rPr lang="ru-RU" sz="1000" kern="0" dirty="0">
+                <a:solidFill>
+                  <a:srgbClr val="5A6470"/>
+                </a:solidFill>
+                <a:latin typeface="Calibri" pitchFamily="34" charset="0"/>
+                <a:ea typeface="Calibri" pitchFamily="34" charset="-122"/>
+                <a:cs typeface="Calibri" pitchFamily="34" charset="-120"/>
+              </a:rPr>
+              <a:t>•  построение признаков</a:t>
+            </a:r>
+          </a:p>
+          <a:p>
+            <a:pPr marL="0" indent="0" algn="l">
+              <a:buNone/>
+            </a:pPr>
+            <a:r>
+              <a:rPr lang="ru-RU" sz="1000" kern="0" dirty="0">
+                <a:solidFill>
+                  <a:srgbClr val="5A6470"/>
+                </a:solidFill>
+                <a:latin typeface="Calibri" pitchFamily="34" charset="0"/>
+                <a:ea typeface="Calibri" pitchFamily="34" charset="-122"/>
+                <a:cs typeface="Calibri" pitchFamily="34" charset="-120"/>
+              </a:rPr>
+              <a:t>•  вызов ML, ответ игре</a:t>
+            </a:r>
+          </a:p>
+        </p:txBody>
+      </p:sp>
+      <p:sp>
+        <p:nvSpPr>
+          <p:cNvPr id="114" name="Card"/>
+          <p:cNvSpPr/>
+          <p:nvPr/>
+        </p:nvSpPr>
+        <p:spPr>
+          <a:xfrm>
+            <a:off x="8251920" y="2360000"/>
+            <a:ext cx="3300000" cy="2120000"/>
           </a:xfrm>
           <a:prstGeom prst="roundRect">
             <a:avLst>
-              <a:gd name="adj" fmla="val 3750"/>
+              <a:gd name="adj" fmla="val 4865"/>
             </a:avLst>
           </a:prstGeom>
           <a:solidFill>
-            <a:srgbClr val="EAF6FC"/>
+            <a:srgbClr val="F4FAFD"/>
           </a:solidFill>
           <a:ln w="12700">
             <a:solidFill>
@@ -4797,7 +4512,7 @@
             <a:prstDash val="solid"/>
           </a:ln>
           <a:effectLst>
-            <a:outerShdw sx="100000" sy="100000" kx="0" ky="0" algn="bl" rotWithShape="0" blurRad="88900" dist="25400" dir="5400000">
+            <a:outerShdw blurRad="88900" dist="25400" dir="5400000" algn="bl" rotWithShape="0">
               <a:srgbClr val="B8C9D4">
                 <a:alpha val="22000"/>
               </a:srgbClr>
@@ -4807,65 +4522,14 @@
       </p:sp>
       <p:sp>
         <p:nvSpPr>
-          <p:cNvPr id="19" name="Shape 16"/>
-          <p:cNvSpPr/>
-          <p:nvPr/>
-        </p:nvSpPr>
-        <p:spPr>
-          <a:xfrm>
-            <a:off x="4590288" y="3502152"/>
-            <a:ext cx="548640" cy="548640"/>
-          </a:xfrm>
-          <a:prstGeom prst="ellipse">
-            <a:avLst/>
-          </a:prstGeom>
-          <a:solidFill>
-            <a:srgbClr val="1F9BD8"/>
-          </a:solidFill>
-          <a:ln/>
-          <a:effectLst>
-            <a:outerShdw sx="100000" sy="100000" kx="0" ky="0" algn="bl" rotWithShape="0" blurRad="88900" dist="25400" dir="5400000">
-              <a:srgbClr val="B8C9D4">
-                <a:alpha val="22000"/>
-              </a:srgbClr>
-            </a:outerShdw>
-          </a:effectLst>
-        </p:spPr>
-      </p:sp>
-      <p:pic>
-        <p:nvPicPr>
-          <p:cNvPr id="20" name="Image 1" descr="icons/puzzle.png">    </p:cNvPr>
-          <p:cNvPicPr>
-            <a:picLocks noChangeAspect="1"/>
-          </p:cNvPicPr>
-          <p:nvPr/>
-        </p:nvPicPr>
-        <p:blipFill>
-          <a:blip r:embed="rId2"/>
-          <a:stretch>
-            <a:fillRect/>
-          </a:stretch>
-        </p:blipFill>
-        <p:spPr>
-          <a:xfrm>
-            <a:off x="4754880" y="3666744"/>
-            <a:ext cx="219456" cy="219456"/>
-          </a:xfrm>
-          <a:prstGeom prst="rect">
-            <a:avLst/>
-          </a:prstGeom>
-        </p:spPr>
-      </p:pic>
-      <p:sp>
-        <p:nvSpPr>
-          <p:cNvPr id="21" name="Text 17"/>
-          <p:cNvSpPr/>
-          <p:nvPr/>
-        </p:nvSpPr>
-        <p:spPr>
-          <a:xfrm>
-            <a:off x="4590288" y="4178808"/>
-            <a:ext cx="3017520" cy="457200"/>
+          <p:cNvPr id="115" name="Text"/>
+          <p:cNvSpPr/>
+          <p:nvPr/>
+        </p:nvSpPr>
+        <p:spPr>
+          <a:xfrm>
+            <a:off x="8511920" y="2530000"/>
+            <a:ext cx="2780000" cy="240000"/>
           </a:xfrm>
           <a:prstGeom prst="rect">
             <a:avLst/>
@@ -4877,34 +4541,109 @@
           <a:bodyPr wrap="square" lIns="0" tIns="0" rIns="0" bIns="0" rtlCol="0" anchor="ctr"/>
           <a:lstStyle/>
           <a:p>
-            <a:pPr indent="0" marL="0">
-              <a:buNone/>
-            </a:pPr>
-            <a:r>
-              <a:rPr lang="en-US" sz="1450" b="1" dirty="0">
+            <a:pPr marL="0" indent="0" algn="l">
+              <a:buNone/>
+            </a:pPr>
+            <a:r>
+              <a:rPr lang="ru-RU" sz="950" b="1" kern="0" spc="180" dirty="0">
+                <a:solidFill>
+                  <a:srgbClr val="1F9BD8"/>
+                </a:solidFill>
+                <a:latin typeface="Calibri" pitchFamily="34" charset="0"/>
+                <a:ea typeface="Calibri" pitchFamily="34" charset="-122"/>
+                <a:cs typeface="Calibri" pitchFamily="34" charset="-120"/>
+              </a:rPr>
+              <a:t>МОДЕЛЬ</a:t>
+            </a:r>
+          </a:p>
+        </p:txBody>
+      </p:sp>
+      <p:sp>
+        <p:nvSpPr>
+          <p:cNvPr id="116" name="Text"/>
+          <p:cNvSpPr/>
+          <p:nvPr/>
+        </p:nvSpPr>
+        <p:spPr>
+          <a:xfrm>
+            <a:off x="8511920" y="2810000"/>
+            <a:ext cx="2780000" cy="420000"/>
+          </a:xfrm>
+          <a:prstGeom prst="rect">
+            <a:avLst/>
+          </a:prstGeom>
+          <a:noFill/>
+          <a:ln/>
+        </p:spPr>
+        <p:txBody>
+          <a:bodyPr wrap="square" lIns="0" tIns="0" rIns="0" bIns="0" rtlCol="0" anchor="ctr"/>
+          <a:lstStyle/>
+          <a:p>
+            <a:pPr marL="0" indent="0" algn="l">
+              <a:buNone/>
+            </a:pPr>
+            <a:r>
+              <a:rPr lang="ru-RU" sz="1600" b="1" kern="0" dirty="0">
                 <a:solidFill>
                   <a:srgbClr val="111418"/>
                 </a:solidFill>
-                <a:latin typeface="Calibri" pitchFamily="34" charset="0"/>
-                <a:ea typeface="Calibri" pitchFamily="34" charset="-122"/>
-                <a:cs typeface="Calibri" pitchFamily="34" charset="-120"/>
-              </a:rPr>
-              <a:t>Нативная система плагинов</a:t>
-            </a:r>
-            <a:endParaRPr lang="en-US" sz="1450" dirty="0"/>
-          </a:p>
-        </p:txBody>
-      </p:sp>
-      <p:sp>
-        <p:nvSpPr>
-          <p:cNvPr id="22" name="Text 18"/>
-          <p:cNvSpPr/>
-          <p:nvPr/>
-        </p:nvSpPr>
-        <p:spPr>
-          <a:xfrm>
-            <a:off x="4590288" y="4617720"/>
-            <a:ext cx="3017520" cy="731520"/>
+                <a:latin typeface="Cambria" pitchFamily="34" charset="0"/>
+                <a:ea typeface="Cambria" pitchFamily="34" charset="-122"/>
+                <a:cs typeface="Cambria" pitchFamily="34" charset="-120"/>
+              </a:rPr>
+              <a:t>ML-сервис</a:t>
+            </a:r>
+          </a:p>
+        </p:txBody>
+      </p:sp>
+      <p:sp>
+        <p:nvSpPr>
+          <p:cNvPr id="117" name="Text"/>
+          <p:cNvSpPr/>
+          <p:nvPr/>
+        </p:nvSpPr>
+        <p:spPr>
+          <a:xfrm>
+            <a:off x="8511920" y="3220000"/>
+            <a:ext cx="2780000" cy="300000"/>
+          </a:xfrm>
+          <a:prstGeom prst="rect">
+            <a:avLst/>
+          </a:prstGeom>
+          <a:noFill/>
+          <a:ln/>
+        </p:spPr>
+        <p:txBody>
+          <a:bodyPr wrap="square" lIns="0" tIns="0" rIns="0" bIns="0" rtlCol="0" anchor="ctr"/>
+          <a:lstStyle/>
+          <a:p>
+            <a:pPr marL="0" indent="0" algn="l">
+              <a:buNone/>
+            </a:pPr>
+            <a:r>
+              <a:rPr lang="ru-RU" sz="1100" kern="0" dirty="0">
+                <a:solidFill>
+                  <a:srgbClr val="33383F"/>
+                </a:solidFill>
+                <a:latin typeface="Calibri" pitchFamily="34" charset="0"/>
+                <a:ea typeface="Calibri" pitchFamily="34" charset="-122"/>
+                <a:cs typeface="Calibri" pitchFamily="34" charset="-120"/>
+              </a:rPr>
+              <a:t>нейросеть · ONNX</a:t>
+            </a:r>
+          </a:p>
+        </p:txBody>
+      </p:sp>
+      <p:sp>
+        <p:nvSpPr>
+          <p:cNvPr id="118" name="Text"/>
+          <p:cNvSpPr/>
+          <p:nvPr/>
+        </p:nvSpPr>
+        <p:spPr>
+          <a:xfrm>
+            <a:off x="8511920" y="3580000"/>
+            <a:ext cx="2780000" cy="820000"/>
           </a:xfrm>
           <a:prstGeom prst="rect">
             <a:avLst/>
@@ -4916,122 +4655,168 @@
           <a:bodyPr wrap="square" lIns="0" tIns="0" rIns="0" bIns="0" rtlCol="0" anchor="t"/>
           <a:lstStyle/>
           <a:p>
-            <a:pPr indent="0" marL="0">
-              <a:lnSpc>
-                <a:spcPct val="103000"/>
-              </a:lnSpc>
-              <a:buNone/>
-            </a:pPr>
-            <a:r>
-              <a:rPr lang="en-US" sz="1200" dirty="0">
-                <a:solidFill>
-                  <a:srgbClr val="33383F"/>
-                </a:solidFill>
-                <a:latin typeface="Calibri" pitchFamily="34" charset="0"/>
-                <a:ea typeface="Calibri" pitchFamily="34" charset="-122"/>
-                <a:cs typeface="Calibri" pitchFamily="34" charset="-120"/>
-              </a:rPr>
-              <a:t>EditorPlugin, autoload, кастомные панели редактора «из коробки»</a:t>
-            </a:r>
-            <a:endParaRPr lang="en-US" sz="1200" dirty="0"/>
-          </a:p>
-        </p:txBody>
-      </p:sp>
-      <p:sp>
-        <p:nvSpPr>
-          <p:cNvPr id="23" name="Shape 19"/>
-          <p:cNvSpPr/>
-          <p:nvPr/>
-        </p:nvSpPr>
-        <p:spPr>
-          <a:xfrm>
-            <a:off x="8065008" y="3246120"/>
-            <a:ext cx="3474720" cy="2194560"/>
+            <a:pPr marL="0" indent="0" algn="l">
+              <a:buNone/>
+            </a:pPr>
+            <a:r>
+              <a:rPr lang="ru-RU" sz="1000" kern="0" dirty="0">
+                <a:solidFill>
+                  <a:srgbClr val="5A6470"/>
+                </a:solidFill>
+                <a:latin typeface="Calibri" pitchFamily="34" charset="0"/>
+                <a:ea typeface="Calibri" pitchFamily="34" charset="-122"/>
+                <a:cs typeface="Calibri" pitchFamily="34" charset="-120"/>
+              </a:rPr>
+              <a:t>•  определение архетипа</a:t>
+            </a:r>
+          </a:p>
+          <a:p>
+            <a:pPr marL="0" indent="0" algn="l">
+              <a:buNone/>
+            </a:pPr>
+            <a:r>
+              <a:rPr lang="ru-RU" sz="1000" kern="0" dirty="0">
+                <a:solidFill>
+                  <a:srgbClr val="5A6470"/>
+                </a:solidFill>
+                <a:latin typeface="Calibri" pitchFamily="34" charset="0"/>
+                <a:ea typeface="Calibri" pitchFamily="34" charset="-122"/>
+                <a:cs typeface="Calibri" pitchFamily="34" charset="-120"/>
+              </a:rPr>
+              <a:t>•  расчёт параметров адаптации</a:t>
+            </a:r>
+          </a:p>
+          <a:p>
+            <a:pPr marL="0" indent="0" algn="l">
+              <a:buNone/>
+            </a:pPr>
+            <a:r>
+              <a:rPr lang="ru-RU" sz="1000" kern="0" dirty="0">
+                <a:solidFill>
+                  <a:srgbClr val="5A6470"/>
+                </a:solidFill>
+                <a:latin typeface="Calibri" pitchFamily="34" charset="0"/>
+                <a:ea typeface="Calibri" pitchFamily="34" charset="-122"/>
+                <a:cs typeface="Calibri" pitchFamily="34" charset="-120"/>
+              </a:rPr>
+              <a:t>•  обучение на данных</a:t>
+            </a:r>
+          </a:p>
+        </p:txBody>
+      </p:sp>
+      <p:sp>
+        <p:nvSpPr>
+          <p:cNvPr id="119" name="Text"/>
+          <p:cNvSpPr/>
+          <p:nvPr/>
+        </p:nvSpPr>
+        <p:spPr>
+          <a:xfrm>
+            <a:off x="4013040" y="3220000"/>
+            <a:ext cx="360040" cy="400000"/>
+          </a:xfrm>
+          <a:prstGeom prst="rect">
+            <a:avLst/>
+          </a:prstGeom>
+          <a:noFill/>
+          <a:ln/>
+        </p:spPr>
+        <p:txBody>
+          <a:bodyPr wrap="square" lIns="0" tIns="0" rIns="0" bIns="0" rtlCol="0" anchor="ctr"/>
+          <a:lstStyle/>
+          <a:p>
+            <a:pPr marL="0" indent="0" algn="ctr">
+              <a:buNone/>
+            </a:pPr>
+            <a:r>
+              <a:rPr lang="ru-RU" sz="1700" b="1" kern="0" dirty="0">
+                <a:solidFill>
+                  <a:srgbClr val="1F9BD8"/>
+                </a:solidFill>
+                <a:latin typeface="Calibri" pitchFamily="34" charset="0"/>
+                <a:ea typeface="Calibri" pitchFamily="34" charset="-122"/>
+                <a:cs typeface="Calibri" pitchFamily="34" charset="-120"/>
+              </a:rPr>
+              <a:t>▶</a:t>
+            </a:r>
+          </a:p>
+        </p:txBody>
+      </p:sp>
+      <p:sp>
+        <p:nvSpPr>
+          <p:cNvPr id="121" name="Text"/>
+          <p:cNvSpPr/>
+          <p:nvPr/>
+        </p:nvSpPr>
+        <p:spPr>
+          <a:xfrm>
+            <a:off x="7818960" y="3220000"/>
+            <a:ext cx="360040" cy="400000"/>
+          </a:xfrm>
+          <a:prstGeom prst="rect">
+            <a:avLst/>
+          </a:prstGeom>
+          <a:noFill/>
+          <a:ln/>
+        </p:spPr>
+        <p:txBody>
+          <a:bodyPr wrap="square" lIns="0" tIns="0" rIns="0" bIns="0" rtlCol="0" anchor="ctr"/>
+          <a:lstStyle/>
+          <a:p>
+            <a:pPr marL="0" indent="0" algn="ctr">
+              <a:buNone/>
+            </a:pPr>
+            <a:r>
+              <a:rPr lang="ru-RU" sz="1700" b="1" kern="0" dirty="0">
+                <a:solidFill>
+                  <a:srgbClr val="1F9BD8"/>
+                </a:solidFill>
+                <a:latin typeface="Calibri" pitchFamily="34" charset="0"/>
+                <a:ea typeface="Calibri" pitchFamily="34" charset="-122"/>
+                <a:cs typeface="Calibri" pitchFamily="34" charset="-120"/>
+              </a:rPr>
+              <a:t>▶</a:t>
+            </a:r>
+          </a:p>
+        </p:txBody>
+      </p:sp>
+      <p:sp>
+        <p:nvSpPr>
+          <p:cNvPr id="123" name="Card"/>
+          <p:cNvSpPr/>
+          <p:nvPr/>
+        </p:nvSpPr>
+        <p:spPr>
+          <a:xfrm>
+            <a:off x="640080" y="4680000"/>
+            <a:ext cx="10911840" cy="580000"/>
           </a:xfrm>
           <a:prstGeom prst="roundRect">
             <a:avLst>
-              <a:gd name="adj" fmla="val 3750"/>
+              <a:gd name="adj" fmla="val 8000"/>
             </a:avLst>
           </a:prstGeom>
           <a:solidFill>
-            <a:srgbClr val="FFFFFF"/>
+            <a:srgbClr val="EAF6FC"/>
           </a:solidFill>
           <a:ln w="12700">
             <a:solidFill>
-              <a:srgbClr val="DCE6EC"/>
+              <a:srgbClr val="CFE6F4"/>
             </a:solidFill>
             <a:prstDash val="solid"/>
           </a:ln>
-          <a:effectLst>
-            <a:outerShdw sx="100000" sy="100000" kx="0" ky="0" algn="bl" rotWithShape="0" blurRad="88900" dist="25400" dir="5400000">
-              <a:srgbClr val="B8C9D4">
-                <a:alpha val="22000"/>
-              </a:srgbClr>
-            </a:outerShdw>
-          </a:effectLst>
-        </p:spPr>
-      </p:sp>
-      <p:sp>
-        <p:nvSpPr>
-          <p:cNvPr id="24" name="Shape 20"/>
-          <p:cNvSpPr/>
-          <p:nvPr/>
-        </p:nvSpPr>
-        <p:spPr>
-          <a:xfrm>
-            <a:off x="8302752" y="3502152"/>
-            <a:ext cx="548640" cy="548640"/>
-          </a:xfrm>
-          <a:prstGeom prst="ellipse">
-            <a:avLst/>
-          </a:prstGeom>
-          <a:solidFill>
-            <a:srgbClr val="1F9BD8"/>
-          </a:solidFill>
-          <a:ln/>
-          <a:effectLst>
-            <a:outerShdw sx="100000" sy="100000" kx="0" ky="0" algn="bl" rotWithShape="0" blurRad="88900" dist="25400" dir="5400000">
-              <a:srgbClr val="B8C9D4">
-                <a:alpha val="22000"/>
-              </a:srgbClr>
-            </a:outerShdw>
-          </a:effectLst>
-        </p:spPr>
-      </p:sp>
-      <p:pic>
-        <p:nvPicPr>
-          <p:cNvPr id="25" name="Image 2" descr="icons/bolt.png">    </p:cNvPr>
-          <p:cNvPicPr>
-            <a:picLocks noChangeAspect="1"/>
-          </p:cNvPicPr>
-          <p:nvPr/>
-        </p:nvPicPr>
-        <p:blipFill>
-          <a:blip r:embed="rId3"/>
-          <a:stretch>
-            <a:fillRect/>
-          </a:stretch>
-        </p:blipFill>
-        <p:spPr>
-          <a:xfrm>
-            <a:off x="8467344" y="3666744"/>
-            <a:ext cx="219456" cy="219456"/>
-          </a:xfrm>
-          <a:prstGeom prst="rect">
-            <a:avLst/>
-          </a:prstGeom>
-        </p:spPr>
-      </p:pic>
-      <p:sp>
-        <p:nvSpPr>
-          <p:cNvPr id="26" name="Text 21"/>
-          <p:cNvSpPr/>
-          <p:nvPr/>
-        </p:nvSpPr>
-        <p:spPr>
-          <a:xfrm>
-            <a:off x="8302752" y="4178808"/>
-            <a:ext cx="3017520" cy="457200"/>
+        </p:spPr>
+      </p:sp>
+      <p:sp>
+        <p:nvSpPr>
+          <p:cNvPr id="124" name="Text"/>
+          <p:cNvSpPr/>
+          <p:nvPr/>
+        </p:nvSpPr>
+        <p:spPr>
+          <a:xfrm>
+            <a:off x="940080" y="4680000"/>
+            <a:ext cx="10311840" cy="580000"/>
           </a:xfrm>
           <a:prstGeom prst="rect">
             <a:avLst/>
@@ -5043,53 +4828,22 @@
           <a:bodyPr wrap="square" lIns="0" tIns="0" rIns="0" bIns="0" rtlCol="0" anchor="ctr"/>
           <a:lstStyle/>
           <a:p>
-            <a:pPr indent="0" marL="0">
-              <a:buNone/>
-            </a:pPr>
-            <a:r>
-              <a:rPr lang="en-US" sz="1450" b="1" dirty="0">
-                <a:solidFill>
-                  <a:srgbClr val="111418"/>
-                </a:solidFill>
-                <a:latin typeface="Calibri" pitchFamily="34" charset="0"/>
-                <a:ea typeface="Calibri" pitchFamily="34" charset="-122"/>
-                <a:cs typeface="Calibri" pitchFamily="34" charset="-120"/>
-              </a:rPr>
-              <a:t>GDScript + быстрый цикл</a:t>
-            </a:r>
-            <a:endParaRPr lang="en-US" sz="1450" dirty="0"/>
-          </a:p>
-        </p:txBody>
-      </p:sp>
-      <p:sp>
-        <p:nvSpPr>
-          <p:cNvPr id="27" name="Text 22"/>
-          <p:cNvSpPr/>
-          <p:nvPr/>
-        </p:nvSpPr>
-        <p:spPr>
-          <a:xfrm>
-            <a:off x="8302752" y="4617720"/>
-            <a:ext cx="3017520" cy="731520"/>
-          </a:xfrm>
-          <a:prstGeom prst="rect">
-            <a:avLst/>
-          </a:prstGeom>
-          <a:noFill/>
-          <a:ln/>
-        </p:spPr>
-        <p:txBody>
-          <a:bodyPr wrap="square" lIns="0" tIns="0" rIns="0" bIns="0" rtlCol="0" anchor="t"/>
-          <a:lstStyle/>
-          <a:p>
-            <a:pPr indent="0" marL="0">
-              <a:lnSpc>
-                <a:spcPct val="103000"/>
-              </a:lnSpc>
-              <a:buNone/>
-            </a:pPr>
-            <a:r>
-              <a:rPr lang="en-US" sz="1200" dirty="0">
+            <a:pPr marL="0" indent="0" algn="l">
+              <a:buNone/>
+            </a:pPr>
+            <a:r>
+              <a:rPr lang="ru-RU" sz="1100" b="1" kern="0" dirty="0">
+                <a:solidFill>
+                  <a:srgbClr val="15719E"/>
+                </a:solidFill>
+                <a:latin typeface="Calibri" pitchFamily="34" charset="0"/>
+                <a:ea typeface="Calibri" pitchFamily="34" charset="-122"/>
+                <a:cs typeface="Calibri" pitchFamily="34" charset="-120"/>
+              </a:rPr>
+              <a:t>◀  Адаптация возвращается в игру в ответе сервера:  </a:t>
+            </a:r>
+            <a:r>
+              <a:rPr lang="ru-RU" sz="1100" kern="0" dirty="0">
                 <a:solidFill>
                   <a:srgbClr val="33383F"/>
                 </a:solidFill>
@@ -5097,9 +4851,8 @@
                 <a:ea typeface="Calibri" pitchFamily="34" charset="-122"/>
                 <a:cs typeface="Calibri" pitchFamily="34" charset="-120"/>
               </a:rPr>
-              <a:t>низкий порог входа, мгновенная итерация в редакторе</a:t>
-            </a:r>
-            <a:endParaRPr lang="en-US" sz="1200" dirty="0"/>
+              <a:t>сложность · плотность врагов · множитель добычи</a:t>
+            </a:r>
           </a:p>
         </p:txBody>
       </p:sp>
@@ -5113,12 +4866,13 @@
 
 <file path=ppt/slides/slide4.xml><?xml version="1.0" encoding="utf-8"?>
 <p:sld xmlns:a="http://schemas.openxmlformats.org/drawingml/2006/main" xmlns:r="http://schemas.openxmlformats.org/officeDocument/2006/relationships" xmlns:p="http://schemas.openxmlformats.org/presentationml/2006/main">
-  <p:cSld name="Slide 4">
+  <p:cSld name="Slide 3">
     <p:bg>
       <p:bgPr>
         <a:solidFill>
           <a:srgbClr val="FFFFFF"/>
         </a:solidFill>
+        <a:effectLst/>
       </p:bgPr>
     </p:bg>
     <p:spTree>
@@ -5156,7 +4910,7 @@
           <a:bodyPr wrap="square" lIns="0" tIns="0" rIns="0" bIns="0" rtlCol="0" anchor="ctr"/>
           <a:lstStyle/>
           <a:p>
-            <a:pPr algn="r" indent="0" marL="0">
+            <a:pPr marL="0" indent="0" algn="r">
               <a:buNone/>
             </a:pPr>
             <a:r>
@@ -5168,7 +4922,7 @@
                 <a:ea typeface="Cambria" pitchFamily="34" charset="-122"/>
                 <a:cs typeface="Cambria" pitchFamily="34" charset="-120"/>
               </a:rPr>
-              <a:t>04</a:t>
+              <a:t>03</a:t>
             </a:r>
             <a:endParaRPr lang="en-US" sz="3000" dirty="0"/>
           </a:p>
@@ -5195,11 +4949,11 @@
           <a:bodyPr wrap="square" lIns="0" tIns="0" rIns="0" bIns="0" rtlCol="0" anchor="ctr"/>
           <a:lstStyle/>
           <a:p>
-            <a:pPr indent="0" marL="0">
-              <a:buNone/>
-            </a:pPr>
-            <a:r>
-              <a:rPr lang="en-US" sz="1250" b="1" spc="250" kern="0" dirty="0">
+            <a:pPr marL="0" indent="0">
+              <a:buNone/>
+            </a:pPr>
+            <a:r>
+              <a:rPr lang="en-US" sz="1250" b="1" kern="0" spc="250" dirty="0">
                 <a:solidFill>
                   <a:srgbClr val="1F9BD8"/>
                 </a:solidFill>
@@ -5207,7 +4961,7 @@
                 <a:ea typeface="Calibri" pitchFamily="34" charset="-122"/>
                 <a:cs typeface="Calibri" pitchFamily="34" charset="-120"/>
               </a:rPr>
-              <a:t>РЕАЛИЗАЦИЯ</a:t>
+              <a:t>ВЫБОР ДВИЖКА</a:t>
             </a:r>
             <a:endParaRPr lang="en-US" sz="1250" dirty="0"/>
           </a:p>
@@ -5234,7 +4988,7 @@
           <a:bodyPr wrap="square" lIns="0" tIns="0" rIns="0" bIns="0" rtlCol="0" anchor="ctr"/>
           <a:lstStyle/>
           <a:p>
-            <a:pPr indent="0" marL="0">
+            <a:pPr marL="0" indent="0">
               <a:buNone/>
             </a:pPr>
             <a:r>
@@ -5246,7 +5000,7 @@
                 <a:ea typeface="Cambria" pitchFamily="34" charset="-122"/>
                 <a:cs typeface="Cambria" pitchFamily="34" charset="-120"/>
               </a:rPr>
-              <a:t>Роль плагина в общей системе</a:t>
+              <a:t>Преимущества Godot 4</a:t>
             </a:r>
             <a:endParaRPr lang="en-US" sz="3000" dirty="0"/>
           </a:p>
@@ -5254,14 +5008,14 @@
       </p:sp>
       <p:sp>
         <p:nvSpPr>
-          <p:cNvPr id="5" name="Text 3"/>
-          <p:cNvSpPr/>
-          <p:nvPr/>
-        </p:nvSpPr>
-        <p:spPr>
-          <a:xfrm>
-            <a:off x="640080" y="6437376"/>
-            <a:ext cx="7315200" cy="274320"/>
+          <p:cNvPr id="7" name="Text 5"/>
+          <p:cNvSpPr/>
+          <p:nvPr/>
+        </p:nvSpPr>
+        <p:spPr>
+          <a:xfrm>
+            <a:off x="1981200" y="1816636"/>
+            <a:ext cx="2743200" cy="868680"/>
           </a:xfrm>
           <a:prstGeom prst="rect">
             <a:avLst/>
@@ -5273,11 +5027,50 @@
           <a:bodyPr wrap="square" lIns="0" tIns="0" rIns="0" bIns="0" rtlCol="0" anchor="ctr"/>
           <a:lstStyle/>
           <a:p>
-            <a:pPr indent="0" marL="0">
-              <a:buNone/>
-            </a:pPr>
-            <a:r>
-              <a:rPr lang="en-US" sz="900" dirty="0">
+            <a:pPr marL="0" indent="0" algn="ctr">
+              <a:buNone/>
+            </a:pPr>
+            <a:r>
+              <a:rPr lang="en-US" sz="5000" b="1" dirty="0">
+                <a:solidFill>
+                  <a:srgbClr val="0E7FB8"/>
+                </a:solidFill>
+                <a:latin typeface="Cambria" pitchFamily="34" charset="0"/>
+                <a:ea typeface="Cambria" pitchFamily="34" charset="-122"/>
+                <a:cs typeface="Cambria" pitchFamily="34" charset="-120"/>
+              </a:rPr>
+              <a:t>100%</a:t>
+            </a:r>
+            <a:endParaRPr lang="en-US" sz="5000" dirty="0"/>
+          </a:p>
+        </p:txBody>
+      </p:sp>
+      <p:sp>
+        <p:nvSpPr>
+          <p:cNvPr id="8" name="Text 6"/>
+          <p:cNvSpPr/>
+          <p:nvPr/>
+        </p:nvSpPr>
+        <p:spPr>
+          <a:xfrm>
+            <a:off x="1981200" y="2685316"/>
+            <a:ext cx="2743200" cy="457200"/>
+          </a:xfrm>
+          <a:prstGeom prst="rect">
+            <a:avLst/>
+          </a:prstGeom>
+          <a:noFill/>
+          <a:ln/>
+        </p:spPr>
+        <p:txBody>
+          <a:bodyPr wrap="square" lIns="0" tIns="0" rIns="0" bIns="0" rtlCol="0" anchor="t"/>
+          <a:lstStyle/>
+          <a:p>
+            <a:pPr marL="0" indent="0" algn="ctr">
+              <a:buNone/>
+            </a:pPr>
+            <a:r>
+              <a:rPr lang="en-US" sz="1200" dirty="0">
                 <a:solidFill>
                   <a:srgbClr val="6B7480"/>
                 </a:solidFill>
@@ -5285,22 +5078,22 @@
                 <a:ea typeface="Calibri" pitchFamily="34" charset="-122"/>
                 <a:cs typeface="Calibri" pitchFamily="34" charset="-120"/>
               </a:rPr>
-              <a:t>адаптивный геймплей на телеметрии</a:t>
-            </a:r>
-            <a:endParaRPr lang="en-US" sz="900" dirty="0"/>
-          </a:p>
-        </p:txBody>
-      </p:sp>
-      <p:sp>
-        <p:nvSpPr>
-          <p:cNvPr id="6" name="Text 4"/>
-          <p:cNvSpPr/>
-          <p:nvPr/>
-        </p:nvSpPr>
-        <p:spPr>
-          <a:xfrm>
-            <a:off x="10728655" y="6437376"/>
-            <a:ext cx="822960" cy="274320"/>
+              <a:t>открытый код, MIT-лицензия</a:t>
+            </a:r>
+            <a:endParaRPr lang="en-US" sz="1200" dirty="0"/>
+          </a:p>
+        </p:txBody>
+      </p:sp>
+      <p:sp>
+        <p:nvSpPr>
+          <p:cNvPr id="9" name="Text 7"/>
+          <p:cNvSpPr/>
+          <p:nvPr/>
+        </p:nvSpPr>
+        <p:spPr>
+          <a:xfrm>
+            <a:off x="4724400" y="1816636"/>
+            <a:ext cx="2743200" cy="868680"/>
           </a:xfrm>
           <a:prstGeom prst="rect">
             <a:avLst/>
@@ -5312,11 +5105,50 @@
           <a:bodyPr wrap="square" lIns="0" tIns="0" rIns="0" bIns="0" rtlCol="0" anchor="ctr"/>
           <a:lstStyle/>
           <a:p>
-            <a:pPr algn="r" indent="0" marL="0">
-              <a:buNone/>
-            </a:pPr>
-            <a:r>
-              <a:rPr lang="en-US" sz="900" dirty="0">
+            <a:pPr marL="0" indent="0" algn="ctr">
+              <a:buNone/>
+            </a:pPr>
+            <a:r>
+              <a:rPr lang="en-US" sz="5000" b="1" dirty="0">
+                <a:solidFill>
+                  <a:srgbClr val="0E7FB8"/>
+                </a:solidFill>
+                <a:latin typeface="Cambria" pitchFamily="34" charset="0"/>
+                <a:ea typeface="Cambria" pitchFamily="34" charset="-122"/>
+                <a:cs typeface="Cambria" pitchFamily="34" charset="-120"/>
+              </a:rPr>
+              <a:t>4.2+</a:t>
+            </a:r>
+            <a:endParaRPr lang="en-US" sz="5000" dirty="0"/>
+          </a:p>
+        </p:txBody>
+      </p:sp>
+      <p:sp>
+        <p:nvSpPr>
+          <p:cNvPr id="10" name="Text 8"/>
+          <p:cNvSpPr/>
+          <p:nvPr/>
+        </p:nvSpPr>
+        <p:spPr>
+          <a:xfrm>
+            <a:off x="4724400" y="2685316"/>
+            <a:ext cx="2743200" cy="457200"/>
+          </a:xfrm>
+          <a:prstGeom prst="rect">
+            <a:avLst/>
+          </a:prstGeom>
+          <a:noFill/>
+          <a:ln/>
+        </p:spPr>
+        <p:txBody>
+          <a:bodyPr wrap="square" lIns="0" tIns="0" rIns="0" bIns="0" rtlCol="0" anchor="t"/>
+          <a:lstStyle/>
+          <a:p>
+            <a:pPr marL="0" indent="0" algn="ctr">
+              <a:buNone/>
+            </a:pPr>
+            <a:r>
+              <a:rPr lang="en-US" sz="1200" dirty="0">
                 <a:solidFill>
                   <a:srgbClr val="6B7480"/>
                 </a:solidFill>
@@ -5324,30 +5156,108 @@
                 <a:ea typeface="Calibri" pitchFamily="34" charset="-122"/>
                 <a:cs typeface="Calibri" pitchFamily="34" charset="-120"/>
               </a:rPr>
-              <a:t>4 / 10</a:t>
-            </a:r>
-            <a:endParaRPr lang="en-US" sz="900" dirty="0"/>
-          </a:p>
-        </p:txBody>
-      </p:sp>
-      <p:sp>
-        <p:nvSpPr>
-          <p:cNvPr id="7" name="Shape 5"/>
-          <p:cNvSpPr/>
-          <p:nvPr/>
-        </p:nvSpPr>
-        <p:spPr>
-          <a:xfrm>
-            <a:off x="640080" y="1965960"/>
-            <a:ext cx="2542032" cy="1691640"/>
+              <a:t>целевая версия движка</a:t>
+            </a:r>
+            <a:endParaRPr lang="en-US" sz="1200" dirty="0"/>
+          </a:p>
+        </p:txBody>
+      </p:sp>
+      <p:sp>
+        <p:nvSpPr>
+          <p:cNvPr id="11" name="Text 9"/>
+          <p:cNvSpPr/>
+          <p:nvPr/>
+        </p:nvSpPr>
+        <p:spPr>
+          <a:xfrm>
+            <a:off x="7467600" y="1816636"/>
+            <a:ext cx="2743200" cy="868680"/>
+          </a:xfrm>
+          <a:prstGeom prst="rect">
+            <a:avLst/>
+          </a:prstGeom>
+          <a:noFill/>
+          <a:ln/>
+        </p:spPr>
+        <p:txBody>
+          <a:bodyPr wrap="square" lIns="0" tIns="0" rIns="0" bIns="0" rtlCol="0" anchor="ctr"/>
+          <a:lstStyle/>
+          <a:p>
+            <a:pPr marL="0" indent="0" algn="ctr">
+              <a:buNone/>
+            </a:pPr>
+            <a:r>
+              <a:rPr lang="en-US" sz="5000" b="1" dirty="0">
+                <a:solidFill>
+                  <a:srgbClr val="0E7FB8"/>
+                </a:solidFill>
+                <a:latin typeface="Cambria" pitchFamily="34" charset="0"/>
+                <a:ea typeface="Cambria" pitchFamily="34" charset="-122"/>
+                <a:cs typeface="Cambria" pitchFamily="34" charset="-120"/>
+              </a:rPr>
+              <a:t>1 папка</a:t>
+            </a:r>
+            <a:endParaRPr lang="en-US" sz="5000" dirty="0"/>
+          </a:p>
+        </p:txBody>
+      </p:sp>
+      <p:sp>
+        <p:nvSpPr>
+          <p:cNvPr id="12" name="Text 10"/>
+          <p:cNvSpPr/>
+          <p:nvPr/>
+        </p:nvSpPr>
+        <p:spPr>
+          <a:xfrm>
+            <a:off x="7467600" y="2685316"/>
+            <a:ext cx="2743200" cy="457200"/>
+          </a:xfrm>
+          <a:prstGeom prst="rect">
+            <a:avLst/>
+          </a:prstGeom>
+          <a:noFill/>
+          <a:ln/>
+        </p:spPr>
+        <p:txBody>
+          <a:bodyPr wrap="square" lIns="0" tIns="0" rIns="0" bIns="0" rtlCol="0" anchor="t"/>
+          <a:lstStyle/>
+          <a:p>
+            <a:pPr marL="0" indent="0" algn="ctr">
+              <a:buNone/>
+            </a:pPr>
+            <a:r>
+              <a:rPr lang="en-US" sz="1200" dirty="0">
+                <a:solidFill>
+                  <a:srgbClr val="6B7480"/>
+                </a:solidFill>
+                <a:latin typeface="Calibri" pitchFamily="34" charset="0"/>
+                <a:ea typeface="Calibri" pitchFamily="34" charset="-122"/>
+                <a:cs typeface="Calibri" pitchFamily="34" charset="-120"/>
+              </a:rPr>
+              <a:t>вся установка аддона</a:t>
+            </a:r>
+            <a:endParaRPr lang="en-US" sz="1200" dirty="0"/>
+          </a:p>
+        </p:txBody>
+      </p:sp>
+      <p:sp>
+        <p:nvSpPr>
+          <p:cNvPr id="13" name="Shape 11"/>
+          <p:cNvSpPr/>
+          <p:nvPr/>
+        </p:nvSpPr>
+        <p:spPr>
+          <a:xfrm>
+            <a:off x="640080" y="3246120"/>
+            <a:ext cx="3474720" cy="2194560"/>
           </a:xfrm>
           <a:prstGeom prst="roundRect">
             <a:avLst>
-              <a:gd name="adj" fmla="val 4865"/>
+              <a:gd name="adj" fmla="val 3750"/>
             </a:avLst>
           </a:prstGeom>
           <a:solidFill>
-            <a:srgbClr val="1F9BD8"/>
+            <a:srgbClr val="FFFFFF"/>
           </a:solidFill>
           <a:ln w="12700">
             <a:solidFill>
@@ -5356,7 +5266,7 @@
             <a:prstDash val="solid"/>
           </a:ln>
           <a:effectLst>
-            <a:outerShdw sx="100000" sy="100000" kx="0" ky="0" algn="bl" rotWithShape="0" blurRad="88900" dist="25400" dir="5400000">
+            <a:outerShdw blurRad="88900" dist="25400" dir="5400000" algn="bl" rotWithShape="0">
               <a:srgbClr val="B8C9D4">
                 <a:alpha val="22000"/>
               </a:srgbClr>
@@ -5366,24 +5276,24 @@
       </p:sp>
       <p:sp>
         <p:nvSpPr>
-          <p:cNvPr id="8" name="Shape 6"/>
-          <p:cNvSpPr/>
-          <p:nvPr/>
-        </p:nvSpPr>
-        <p:spPr>
-          <a:xfrm>
-            <a:off x="859536" y="2203704"/>
-            <a:ext cx="530352" cy="530352"/>
+          <p:cNvPr id="14" name="Shape 12"/>
+          <p:cNvSpPr/>
+          <p:nvPr/>
+        </p:nvSpPr>
+        <p:spPr>
+          <a:xfrm>
+            <a:off x="877824" y="3502152"/>
+            <a:ext cx="548640" cy="548640"/>
           </a:xfrm>
           <a:prstGeom prst="ellipse">
             <a:avLst/>
           </a:prstGeom>
           <a:solidFill>
-            <a:srgbClr val="FFFFFF"/>
+            <a:srgbClr val="1F9BD8"/>
           </a:solidFill>
           <a:ln/>
           <a:effectLst>
-            <a:outerShdw sx="100000" sy="100000" kx="0" ky="0" algn="bl" rotWithShape="0" blurRad="88900" dist="25400" dir="5400000">
+            <a:outerShdw blurRad="88900" dist="25400" dir="5400000" algn="bl" rotWithShape="0">
               <a:srgbClr val="B8C9D4">
                 <a:alpha val="22000"/>
               </a:srgbClr>
@@ -5393,22 +5303,22 @@
       </p:sp>
       <p:pic>
         <p:nvPicPr>
-          <p:cNvPr id="9" name="Image 0" descr="icons/gamepad_blue.png">    </p:cNvPr>
+          <p:cNvPr id="15" name="Image 0" descr="icons/check.png"/>
           <p:cNvPicPr>
             <a:picLocks noChangeAspect="1"/>
           </p:cNvPicPr>
           <p:nvPr/>
         </p:nvPicPr>
         <p:blipFill>
-          <a:blip r:embed="rId1"/>
+          <a:blip r:embed="rId3"/>
           <a:stretch>
             <a:fillRect/>
           </a:stretch>
         </p:blipFill>
         <p:spPr>
           <a:xfrm>
-            <a:off x="1018642" y="2362810"/>
-            <a:ext cx="212141" cy="212141"/>
+            <a:off x="1042416" y="3666744"/>
+            <a:ext cx="219456" cy="219456"/>
           </a:xfrm>
           <a:prstGeom prst="rect">
             <a:avLst/>
@@ -5417,14 +5327,14 @@
       </p:pic>
       <p:sp>
         <p:nvSpPr>
-          <p:cNvPr id="10" name="Text 7"/>
-          <p:cNvSpPr/>
-          <p:nvPr/>
-        </p:nvSpPr>
-        <p:spPr>
-          <a:xfrm>
-            <a:off x="859536" y="2843784"/>
-            <a:ext cx="2103120" cy="384048"/>
+          <p:cNvPr id="16" name="Text 13"/>
+          <p:cNvSpPr/>
+          <p:nvPr/>
+        </p:nvSpPr>
+        <p:spPr>
+          <a:xfrm>
+            <a:off x="877824" y="4178808"/>
+            <a:ext cx="3017520" cy="457200"/>
           </a:xfrm>
           <a:prstGeom prst="rect">
             <a:avLst/>
@@ -5436,121 +5346,83 @@
           <a:bodyPr wrap="square" lIns="0" tIns="0" rIns="0" bIns="0" rtlCol="0" anchor="ctr"/>
           <a:lstStyle/>
           <a:p>
-            <a:pPr indent="0" marL="0">
-              <a:buNone/>
-            </a:pPr>
-            <a:r>
-              <a:rPr lang="en-US" sz="1400" b="1" dirty="0">
-                <a:solidFill>
-                  <a:srgbClr val="FFFFFF"/>
-                </a:solidFill>
-                <a:latin typeface="Calibri" pitchFamily="34" charset="0"/>
-                <a:ea typeface="Calibri" pitchFamily="34" charset="-122"/>
-                <a:cs typeface="Calibri" pitchFamily="34" charset="-120"/>
-              </a:rPr>
-              <a:t>Игра</a:t>
-            </a:r>
-            <a:endParaRPr lang="en-US" sz="1400" dirty="0"/>
-          </a:p>
-        </p:txBody>
-      </p:sp>
-      <p:sp>
-        <p:nvSpPr>
-          <p:cNvPr id="11" name="Text 8"/>
-          <p:cNvSpPr/>
-          <p:nvPr/>
-        </p:nvSpPr>
-        <p:spPr>
-          <a:xfrm>
-            <a:off x="859536" y="3209544"/>
-            <a:ext cx="2103120" cy="320040"/>
-          </a:xfrm>
-          <a:prstGeom prst="rect">
-            <a:avLst/>
-          </a:prstGeom>
-          <a:noFill/>
-          <a:ln/>
-        </p:spPr>
-        <p:txBody>
-          <a:bodyPr wrap="square" lIns="0" tIns="0" rIns="0" bIns="0" rtlCol="0" anchor="ctr"/>
-          <a:lstStyle/>
-          <a:p>
-            <a:pPr indent="0" marL="0">
-              <a:buNone/>
-            </a:pPr>
-            <a:r>
-              <a:rPr lang="en-US" sz="1050" dirty="0">
-                <a:solidFill>
-                  <a:srgbClr val="DCF1FB"/>
-                </a:solidFill>
-                <a:latin typeface="Calibri" pitchFamily="34" charset="0"/>
-                <a:ea typeface="Calibri" pitchFamily="34" charset="-122"/>
-                <a:cs typeface="Calibri" pitchFamily="34" charset="-120"/>
-              </a:rPr>
-              <a:t>track() событий</a:t>
-            </a:r>
-            <a:endParaRPr lang="en-US" sz="1050" dirty="0"/>
-          </a:p>
-        </p:txBody>
-      </p:sp>
-      <p:sp>
-        <p:nvSpPr>
-          <p:cNvPr id="12" name="Text 9"/>
-          <p:cNvSpPr/>
-          <p:nvPr/>
-        </p:nvSpPr>
-        <p:spPr>
-          <a:xfrm>
-            <a:off x="3200400" y="2514600"/>
-            <a:ext cx="274320" cy="365760"/>
-          </a:xfrm>
-          <a:prstGeom prst="rect">
-            <a:avLst/>
-          </a:prstGeom>
-          <a:noFill/>
-          <a:ln/>
-        </p:spPr>
-        <p:txBody>
-          <a:bodyPr wrap="square" lIns="0" tIns="0" rIns="0" bIns="0" rtlCol="0" anchor="ctr"/>
-          <a:lstStyle/>
-          <a:p>
-            <a:pPr algn="ctr" indent="0" marL="0">
-              <a:buNone/>
-            </a:pPr>
-            <a:r>
-              <a:rPr lang="en-US" sz="1600" b="1" dirty="0">
-                <a:solidFill>
-                  <a:srgbClr val="1F9BD8"/>
-                </a:solidFill>
-                <a:latin typeface="Calibri" pitchFamily="34" charset="0"/>
-                <a:ea typeface="Calibri" pitchFamily="34" charset="-122"/>
-                <a:cs typeface="Calibri" pitchFamily="34" charset="-120"/>
-              </a:rPr>
-              <a:t>▶</a:t>
-            </a:r>
-            <a:endParaRPr lang="en-US" sz="1600" dirty="0"/>
-          </a:p>
-        </p:txBody>
-      </p:sp>
-      <p:sp>
-        <p:nvSpPr>
-          <p:cNvPr id="13" name="Shape 10"/>
-          <p:cNvSpPr/>
-          <p:nvPr/>
-        </p:nvSpPr>
-        <p:spPr>
-          <a:xfrm>
-            <a:off x="3474720" y="1965960"/>
-            <a:ext cx="2542032" cy="1691640"/>
+            <a:pPr marL="0" indent="0">
+              <a:buNone/>
+            </a:pPr>
+            <a:r>
+              <a:rPr lang="en-US" sz="1450" b="1" dirty="0">
+                <a:solidFill>
+                  <a:srgbClr val="111418"/>
+                </a:solidFill>
+                <a:latin typeface="Calibri" pitchFamily="34" charset="0"/>
+                <a:ea typeface="Calibri" pitchFamily="34" charset="-122"/>
+                <a:cs typeface="Calibri" pitchFamily="34" charset="-120"/>
+              </a:rPr>
+              <a:t>Бесплатный и открытый</a:t>
+            </a:r>
+            <a:endParaRPr lang="en-US" sz="1450" dirty="0"/>
+          </a:p>
+        </p:txBody>
+      </p:sp>
+      <p:sp>
+        <p:nvSpPr>
+          <p:cNvPr id="17" name="Text 14"/>
+          <p:cNvSpPr/>
+          <p:nvPr/>
+        </p:nvSpPr>
+        <p:spPr>
+          <a:xfrm>
+            <a:off x="877824" y="4617720"/>
+            <a:ext cx="3017520" cy="731520"/>
+          </a:xfrm>
+          <a:prstGeom prst="rect">
+            <a:avLst/>
+          </a:prstGeom>
+          <a:noFill/>
+          <a:ln/>
+        </p:spPr>
+        <p:txBody>
+          <a:bodyPr wrap="square" lIns="0" tIns="0" rIns="0" bIns="0" rtlCol="0" anchor="t"/>
+          <a:lstStyle/>
+          <a:p>
+            <a:pPr marL="0" indent="0">
+              <a:lnSpc>
+                <a:spcPct val="103000"/>
+              </a:lnSpc>
+              <a:buNone/>
+            </a:pPr>
+            <a:r>
+              <a:rPr lang="en-US" sz="1200" dirty="0">
+                <a:solidFill>
+                  <a:srgbClr val="33383F"/>
+                </a:solidFill>
+                <a:latin typeface="Calibri" pitchFamily="34" charset="0"/>
+                <a:ea typeface="Calibri" pitchFamily="34" charset="-122"/>
+                <a:cs typeface="Calibri" pitchFamily="34" charset="-120"/>
+              </a:rPr>
+              <a:t>нет роялти и лицензионных платежей — критично для инди</a:t>
+            </a:r>
+            <a:endParaRPr lang="en-US" sz="1200" dirty="0"/>
+          </a:p>
+        </p:txBody>
+      </p:sp>
+      <p:sp>
+        <p:nvSpPr>
+          <p:cNvPr id="18" name="Shape 15"/>
+          <p:cNvSpPr/>
+          <p:nvPr/>
+        </p:nvSpPr>
+        <p:spPr>
+          <a:xfrm>
+            <a:off x="4352544" y="3246120"/>
+            <a:ext cx="3474720" cy="2194560"/>
           </a:xfrm>
           <a:prstGeom prst="roundRect">
             <a:avLst>
-              <a:gd name="adj" fmla="val 4865"/>
+              <a:gd name="adj" fmla="val 3750"/>
             </a:avLst>
           </a:prstGeom>
-          <a:solidFill>
-            <a:srgbClr val="F4FAFD"/>
-          </a:solidFill>
+          <a:noFill/>
           <a:ln w="12700">
             <a:solidFill>
               <a:srgbClr val="DCE6EC"/>
@@ -5558,7 +5430,7 @@
             <a:prstDash val="solid"/>
           </a:ln>
           <a:effectLst>
-            <a:outerShdw sx="100000" sy="100000" kx="0" ky="0" algn="bl" rotWithShape="0" blurRad="88900" dist="25400" dir="5400000">
+            <a:outerShdw blurRad="88900" dist="25400" dir="5400000" algn="bl" rotWithShape="0">
               <a:srgbClr val="B8C9D4">
                 <a:alpha val="22000"/>
               </a:srgbClr>
@@ -5568,14 +5440,14 @@
       </p:sp>
       <p:sp>
         <p:nvSpPr>
-          <p:cNvPr id="14" name="Shape 11"/>
-          <p:cNvSpPr/>
-          <p:nvPr/>
-        </p:nvSpPr>
-        <p:spPr>
-          <a:xfrm>
-            <a:off x="3694176" y="2203704"/>
-            <a:ext cx="530352" cy="530352"/>
+          <p:cNvPr id="19" name="Shape 16"/>
+          <p:cNvSpPr/>
+          <p:nvPr/>
+        </p:nvSpPr>
+        <p:spPr>
+          <a:xfrm>
+            <a:off x="4590288" y="3502152"/>
+            <a:ext cx="548640" cy="548640"/>
           </a:xfrm>
           <a:prstGeom prst="ellipse">
             <a:avLst/>
@@ -5585,7 +5457,7 @@
           </a:solidFill>
           <a:ln/>
           <a:effectLst>
-            <a:outerShdw sx="100000" sy="100000" kx="0" ky="0" algn="bl" rotWithShape="0" blurRad="88900" dist="25400" dir="5400000">
+            <a:outerShdw blurRad="88900" dist="25400" dir="5400000" algn="bl" rotWithShape="0">
               <a:srgbClr val="B8C9D4">
                 <a:alpha val="22000"/>
               </a:srgbClr>
@@ -5595,22 +5467,22 @@
       </p:sp>
       <p:pic>
         <p:nvPicPr>
-          <p:cNvPr id="15" name="Image 1" descr="icons/cloud.png">    </p:cNvPr>
+          <p:cNvPr id="20" name="Image 1" descr="icons/puzzle.png"/>
           <p:cNvPicPr>
             <a:picLocks noChangeAspect="1"/>
           </p:cNvPicPr>
           <p:nvPr/>
         </p:nvPicPr>
         <p:blipFill>
-          <a:blip r:embed="rId2"/>
+          <a:blip r:embed="rId4"/>
           <a:stretch>
             <a:fillRect/>
           </a:stretch>
         </p:blipFill>
         <p:spPr>
           <a:xfrm>
-            <a:off x="3853282" y="2362810"/>
-            <a:ext cx="212141" cy="212141"/>
+            <a:off x="4754880" y="3666744"/>
+            <a:ext cx="219456" cy="219456"/>
           </a:xfrm>
           <a:prstGeom prst="rect">
             <a:avLst/>
@@ -5619,14 +5491,14 @@
       </p:pic>
       <p:sp>
         <p:nvSpPr>
-          <p:cNvPr id="16" name="Text 12"/>
-          <p:cNvSpPr/>
-          <p:nvPr/>
-        </p:nvSpPr>
-        <p:spPr>
-          <a:xfrm>
-            <a:off x="3694176" y="2843784"/>
-            <a:ext cx="2103120" cy="384048"/>
+          <p:cNvPr id="21" name="Text 17"/>
+          <p:cNvSpPr/>
+          <p:nvPr/>
+        </p:nvSpPr>
+        <p:spPr>
+          <a:xfrm>
+            <a:off x="4590288" y="4178808"/>
+            <a:ext cx="3017520" cy="457200"/>
           </a:xfrm>
           <a:prstGeom prst="rect">
             <a:avLst/>
@@ -5638,11 +5510,11 @@
           <a:bodyPr wrap="square" lIns="0" tIns="0" rIns="0" bIns="0" rtlCol="0" anchor="ctr"/>
           <a:lstStyle/>
           <a:p>
-            <a:pPr indent="0" marL="0">
-              <a:buNone/>
-            </a:pPr>
-            <a:r>
-              <a:rPr lang="en-US" sz="1400" b="1" dirty="0">
+            <a:pPr marL="0" indent="0">
+              <a:buNone/>
+            </a:pPr>
+            <a:r>
+              <a:rPr lang="en-US" sz="1450" b="1" dirty="0">
                 <a:solidFill>
                   <a:srgbClr val="111418"/>
                 </a:solidFill>
@@ -5650,108 +5522,204 @@
                 <a:ea typeface="Calibri" pitchFamily="34" charset="-122"/>
                 <a:cs typeface="Calibri" pitchFamily="34" charset="-120"/>
               </a:rPr>
-              <a:t>cloud_sender</a:t>
-            </a:r>
-            <a:endParaRPr lang="en-US" sz="1400" dirty="0"/>
-          </a:p>
-        </p:txBody>
-      </p:sp>
-      <p:sp>
-        <p:nvSpPr>
-          <p:cNvPr id="17" name="Text 13"/>
-          <p:cNvSpPr/>
-          <p:nvPr/>
-        </p:nvSpPr>
-        <p:spPr>
-          <a:xfrm>
-            <a:off x="3694176" y="3209544"/>
-            <a:ext cx="2103120" cy="320040"/>
-          </a:xfrm>
-          <a:prstGeom prst="rect">
-            <a:avLst/>
-          </a:prstGeom>
-          <a:noFill/>
-          <a:ln/>
-        </p:spPr>
-        <p:txBody>
-          <a:bodyPr wrap="square" lIns="0" tIns="0" rIns="0" bIns="0" rtlCol="0" anchor="ctr"/>
-          <a:lstStyle/>
-          <a:p>
-            <a:pPr indent="0" marL="0">
-              <a:buNone/>
-            </a:pPr>
-            <a:r>
-              <a:rPr lang="en-US" sz="1050" dirty="0">
-                <a:solidFill>
-                  <a:srgbClr val="6B7480"/>
-                </a:solidFill>
-                <a:latin typeface="Calibri" pitchFamily="34" charset="0"/>
-                <a:ea typeface="Calibri" pitchFamily="34" charset="-122"/>
-                <a:cs typeface="Calibri" pitchFamily="34" charset="-120"/>
-              </a:rPr>
-              <a:t>батч + offline-буфер</a:t>
-            </a:r>
-            <a:endParaRPr lang="en-US" sz="1050" dirty="0"/>
-          </a:p>
-        </p:txBody>
-      </p:sp>
-      <p:sp>
-        <p:nvSpPr>
-          <p:cNvPr id="18" name="Text 14"/>
-          <p:cNvSpPr/>
-          <p:nvPr/>
-        </p:nvSpPr>
-        <p:spPr>
-          <a:xfrm>
-            <a:off x="6035040" y="2514600"/>
-            <a:ext cx="274320" cy="365760"/>
-          </a:xfrm>
-          <a:prstGeom prst="rect">
-            <a:avLst/>
-          </a:prstGeom>
-          <a:noFill/>
-          <a:ln/>
-        </p:spPr>
-        <p:txBody>
-          <a:bodyPr wrap="square" lIns="0" tIns="0" rIns="0" bIns="0" rtlCol="0" anchor="ctr"/>
-          <a:lstStyle/>
-          <a:p>
-            <a:pPr algn="ctr" indent="0" marL="0">
-              <a:buNone/>
-            </a:pPr>
-            <a:r>
-              <a:rPr lang="en-US" sz="1600" b="1" dirty="0">
-                <a:solidFill>
-                  <a:srgbClr val="1F9BD8"/>
-                </a:solidFill>
-                <a:latin typeface="Calibri" pitchFamily="34" charset="0"/>
-                <a:ea typeface="Calibri" pitchFamily="34" charset="-122"/>
-                <a:cs typeface="Calibri" pitchFamily="34" charset="-120"/>
-              </a:rPr>
-              <a:t>▶</a:t>
-            </a:r>
-            <a:endParaRPr lang="en-US" sz="1600" dirty="0"/>
-          </a:p>
-        </p:txBody>
-      </p:sp>
-      <p:sp>
-        <p:nvSpPr>
-          <p:cNvPr id="19" name="Shape 15"/>
-          <p:cNvSpPr/>
-          <p:nvPr/>
-        </p:nvSpPr>
-        <p:spPr>
-          <a:xfrm>
-            <a:off x="6309360" y="1965960"/>
-            <a:ext cx="2542032" cy="1691640"/>
+              <a:t>Нативная система плагинов</a:t>
+            </a:r>
+            <a:endParaRPr lang="en-US" sz="1450" dirty="0"/>
+          </a:p>
+        </p:txBody>
+      </p:sp>
+      <p:sp>
+        <p:nvSpPr>
+          <p:cNvPr id="22" name="Text 18"/>
+          <p:cNvSpPr/>
+          <p:nvPr/>
+        </p:nvSpPr>
+        <p:spPr>
+          <a:xfrm>
+            <a:off x="4590288" y="4617720"/>
+            <a:ext cx="3017520" cy="731520"/>
+          </a:xfrm>
+          <a:prstGeom prst="rect">
+            <a:avLst/>
+          </a:prstGeom>
+          <a:noFill/>
+          <a:ln/>
+        </p:spPr>
+        <p:txBody>
+          <a:bodyPr wrap="square" lIns="0" tIns="0" rIns="0" bIns="0" rtlCol="0" anchor="t"/>
+          <a:lstStyle/>
+          <a:p>
+            <a:pPr marL="0" indent="0">
+              <a:lnSpc>
+                <a:spcPct val="103000"/>
+              </a:lnSpc>
+              <a:buNone/>
+            </a:pPr>
+            <a:r>
+              <a:rPr lang="en-US" sz="1200" dirty="0">
+                <a:solidFill>
+                  <a:srgbClr val="33383F"/>
+                </a:solidFill>
+                <a:latin typeface="Calibri" pitchFamily="34" charset="0"/>
+                <a:ea typeface="Calibri" pitchFamily="34" charset="-122"/>
+                <a:cs typeface="Calibri" pitchFamily="34" charset="-120"/>
+              </a:rPr>
+              <a:t>EditorPlugin, </a:t>
+            </a:r>
+            <a:r>
+              <a:rPr lang="en-US" sz="1200" dirty="0" err="1">
+                <a:solidFill>
+                  <a:srgbClr val="33383F"/>
+                </a:solidFill>
+                <a:latin typeface="Calibri" pitchFamily="34" charset="0"/>
+                <a:ea typeface="Calibri" pitchFamily="34" charset="-122"/>
+                <a:cs typeface="Calibri" pitchFamily="34" charset="-120"/>
+              </a:rPr>
+              <a:t>автозагрузка</a:t>
+            </a:r>
+            <a:r>
+              <a:rPr lang="en-US" sz="1200" dirty="0">
+                <a:solidFill>
+                  <a:srgbClr val="33383F"/>
+                </a:solidFill>
+                <a:latin typeface="Calibri" pitchFamily="34" charset="0"/>
+                <a:ea typeface="Calibri" pitchFamily="34" charset="-122"/>
+                <a:cs typeface="Calibri" pitchFamily="34" charset="-120"/>
+              </a:rPr>
+              <a:t>, </a:t>
+            </a:r>
+            <a:r>
+              <a:rPr lang="en-US" sz="1200" dirty="0" err="1">
+                <a:solidFill>
+                  <a:srgbClr val="33383F"/>
+                </a:solidFill>
+                <a:latin typeface="Calibri" pitchFamily="34" charset="0"/>
+                <a:ea typeface="Calibri" pitchFamily="34" charset="-122"/>
+                <a:cs typeface="Calibri" pitchFamily="34" charset="-120"/>
+              </a:rPr>
+              <a:t>кастомные</a:t>
+            </a:r>
+            <a:r>
+              <a:rPr lang="en-US" sz="1200" dirty="0">
+                <a:solidFill>
+                  <a:srgbClr val="33383F"/>
+                </a:solidFill>
+                <a:latin typeface="Calibri" pitchFamily="34" charset="0"/>
+                <a:ea typeface="Calibri" pitchFamily="34" charset="-122"/>
+                <a:cs typeface="Calibri" pitchFamily="34" charset="-120"/>
+              </a:rPr>
+              <a:t> </a:t>
+            </a:r>
+            <a:r>
+              <a:rPr lang="en-US" sz="1200" dirty="0" err="1">
+                <a:solidFill>
+                  <a:srgbClr val="33383F"/>
+                </a:solidFill>
+                <a:latin typeface="Calibri" pitchFamily="34" charset="0"/>
+                <a:ea typeface="Calibri" pitchFamily="34" charset="-122"/>
+                <a:cs typeface="Calibri" pitchFamily="34" charset="-120"/>
+              </a:rPr>
+              <a:t>панели</a:t>
+            </a:r>
+            <a:r>
+              <a:rPr lang="en-US" sz="1200" dirty="0">
+                <a:solidFill>
+                  <a:srgbClr val="33383F"/>
+                </a:solidFill>
+                <a:latin typeface="Calibri" pitchFamily="34" charset="0"/>
+                <a:ea typeface="Calibri" pitchFamily="34" charset="-122"/>
+                <a:cs typeface="Calibri" pitchFamily="34" charset="-120"/>
+              </a:rPr>
+              <a:t> </a:t>
+            </a:r>
+            <a:r>
+              <a:rPr lang="en-US" sz="1200" dirty="0" err="1">
+                <a:solidFill>
+                  <a:srgbClr val="33383F"/>
+                </a:solidFill>
+                <a:latin typeface="Calibri" pitchFamily="34" charset="0"/>
+                <a:ea typeface="Calibri" pitchFamily="34" charset="-122"/>
+                <a:cs typeface="Calibri" pitchFamily="34" charset="-120"/>
+              </a:rPr>
+              <a:t>редактора</a:t>
+            </a:r>
+            <a:r>
+              <a:rPr lang="en-US" sz="1200" dirty="0">
+                <a:solidFill>
+                  <a:srgbClr val="33383F"/>
+                </a:solidFill>
+                <a:latin typeface="Calibri" pitchFamily="34" charset="0"/>
+                <a:ea typeface="Calibri" pitchFamily="34" charset="-122"/>
+                <a:cs typeface="Calibri" pitchFamily="34" charset="-120"/>
+              </a:rPr>
+              <a:t> «</a:t>
+            </a:r>
+            <a:r>
+              <a:rPr lang="en-US" sz="1200" dirty="0" err="1">
+                <a:solidFill>
+                  <a:srgbClr val="33383F"/>
+                </a:solidFill>
+                <a:latin typeface="Calibri" pitchFamily="34" charset="0"/>
+                <a:ea typeface="Calibri" pitchFamily="34" charset="-122"/>
+                <a:cs typeface="Calibri" pitchFamily="34" charset="-120"/>
+              </a:rPr>
+              <a:t>из</a:t>
+            </a:r>
+            <a:r>
+              <a:rPr lang="en-US" sz="1200" dirty="0">
+                <a:solidFill>
+                  <a:srgbClr val="33383F"/>
+                </a:solidFill>
+                <a:latin typeface="Calibri" pitchFamily="34" charset="0"/>
+                <a:ea typeface="Calibri" pitchFamily="34" charset="-122"/>
+                <a:cs typeface="Calibri" pitchFamily="34" charset="-120"/>
+              </a:rPr>
+              <a:t> </a:t>
+            </a:r>
+            <a:r>
+              <a:rPr lang="en-US" sz="1200" dirty="0" err="1">
+                <a:solidFill>
+                  <a:srgbClr val="33383F"/>
+                </a:solidFill>
+                <a:latin typeface="Calibri" pitchFamily="34" charset="0"/>
+                <a:ea typeface="Calibri" pitchFamily="34" charset="-122"/>
+                <a:cs typeface="Calibri" pitchFamily="34" charset="-120"/>
+              </a:rPr>
+              <a:t>коробки</a:t>
+            </a:r>
+            <a:r>
+              <a:rPr lang="en-US" sz="1200" dirty="0">
+                <a:solidFill>
+                  <a:srgbClr val="33383F"/>
+                </a:solidFill>
+                <a:latin typeface="Calibri" pitchFamily="34" charset="0"/>
+                <a:ea typeface="Calibri" pitchFamily="34" charset="-122"/>
+                <a:cs typeface="Calibri" pitchFamily="34" charset="-120"/>
+              </a:rPr>
+              <a:t>»</a:t>
+            </a:r>
+            <a:endParaRPr lang="en-US" sz="1200" dirty="0"/>
+          </a:p>
+        </p:txBody>
+      </p:sp>
+      <p:sp>
+        <p:nvSpPr>
+          <p:cNvPr id="23" name="Shape 19"/>
+          <p:cNvSpPr/>
+          <p:nvPr/>
+        </p:nvSpPr>
+        <p:spPr>
+          <a:xfrm>
+            <a:off x="8065008" y="3246120"/>
+            <a:ext cx="3474720" cy="2194560"/>
           </a:xfrm>
           <a:prstGeom prst="roundRect">
             <a:avLst>
-              <a:gd name="adj" fmla="val 4865"/>
+              <a:gd name="adj" fmla="val 3750"/>
             </a:avLst>
           </a:prstGeom>
           <a:solidFill>
-            <a:srgbClr val="F4FAFD"/>
+            <a:srgbClr val="FFFFFF"/>
           </a:solidFill>
           <a:ln w="12700">
             <a:solidFill>
@@ -5760,7 +5728,7 @@
             <a:prstDash val="solid"/>
           </a:ln>
           <a:effectLst>
-            <a:outerShdw sx="100000" sy="100000" kx="0" ky="0" algn="bl" rotWithShape="0" blurRad="88900" dist="25400" dir="5400000">
+            <a:outerShdw blurRad="88900" dist="25400" dir="5400000" algn="bl" rotWithShape="0">
               <a:srgbClr val="B8C9D4">
                 <a:alpha val="22000"/>
               </a:srgbClr>
@@ -5770,14 +5738,14 @@
       </p:sp>
       <p:sp>
         <p:nvSpPr>
-          <p:cNvPr id="20" name="Shape 16"/>
-          <p:cNvSpPr/>
-          <p:nvPr/>
-        </p:nvSpPr>
-        <p:spPr>
-          <a:xfrm>
-            <a:off x="6528816" y="2203704"/>
-            <a:ext cx="530352" cy="530352"/>
+          <p:cNvPr id="24" name="Shape 20"/>
+          <p:cNvSpPr/>
+          <p:nvPr/>
+        </p:nvSpPr>
+        <p:spPr>
+          <a:xfrm>
+            <a:off x="8302752" y="3502152"/>
+            <a:ext cx="548640" cy="548640"/>
           </a:xfrm>
           <a:prstGeom prst="ellipse">
             <a:avLst/>
@@ -5787,7 +5755,7 @@
           </a:solidFill>
           <a:ln/>
           <a:effectLst>
-            <a:outerShdw sx="100000" sy="100000" kx="0" ky="0" algn="bl" rotWithShape="0" blurRad="88900" dist="25400" dir="5400000">
+            <a:outerShdw blurRad="88900" dist="25400" dir="5400000" algn="bl" rotWithShape="0">
               <a:srgbClr val="B8C9D4">
                 <a:alpha val="22000"/>
               </a:srgbClr>
@@ -5797,372 +5765,7 @@
       </p:sp>
       <p:pic>
         <p:nvPicPr>
-          <p:cNvPr id="21" name="Image 2" descr="icons/server.png">    </p:cNvPr>
-          <p:cNvPicPr>
-            <a:picLocks noChangeAspect="1"/>
-          </p:cNvPicPr>
-          <p:nvPr/>
-        </p:nvPicPr>
-        <p:blipFill>
-          <a:blip r:embed="rId3"/>
-          <a:stretch>
-            <a:fillRect/>
-          </a:stretch>
-        </p:blipFill>
-        <p:spPr>
-          <a:xfrm>
-            <a:off x="6687922" y="2362810"/>
-            <a:ext cx="212141" cy="212141"/>
-          </a:xfrm>
-          <a:prstGeom prst="rect">
-            <a:avLst/>
-          </a:prstGeom>
-        </p:spPr>
-      </p:pic>
-      <p:sp>
-        <p:nvSpPr>
-          <p:cNvPr id="22" name="Text 17"/>
-          <p:cNvSpPr/>
-          <p:nvPr/>
-        </p:nvSpPr>
-        <p:spPr>
-          <a:xfrm>
-            <a:off x="6528816" y="2843784"/>
-            <a:ext cx="2103120" cy="384048"/>
-          </a:xfrm>
-          <a:prstGeom prst="rect">
-            <a:avLst/>
-          </a:prstGeom>
-          <a:noFill/>
-          <a:ln/>
-        </p:spPr>
-        <p:txBody>
-          <a:bodyPr wrap="square" lIns="0" tIns="0" rIns="0" bIns="0" rtlCol="0" anchor="ctr"/>
-          <a:lstStyle/>
-          <a:p>
-            <a:pPr indent="0" marL="0">
-              <a:buNone/>
-            </a:pPr>
-            <a:r>
-              <a:rPr lang="en-US" sz="1400" b="1" dirty="0">
-                <a:solidFill>
-                  <a:srgbClr val="111418"/>
-                </a:solidFill>
-                <a:latin typeface="Calibri" pitchFamily="34" charset="0"/>
-                <a:ea typeface="Calibri" pitchFamily="34" charset="-122"/>
-                <a:cs typeface="Calibri" pitchFamily="34" charset="-120"/>
-              </a:rPr>
-              <a:t>Backend</a:t>
-            </a:r>
-            <a:endParaRPr lang="en-US" sz="1400" dirty="0"/>
-          </a:p>
-        </p:txBody>
-      </p:sp>
-      <p:sp>
-        <p:nvSpPr>
-          <p:cNvPr id="23" name="Text 18"/>
-          <p:cNvSpPr/>
-          <p:nvPr/>
-        </p:nvSpPr>
-        <p:spPr>
-          <a:xfrm>
-            <a:off x="6528816" y="3209544"/>
-            <a:ext cx="2103120" cy="320040"/>
-          </a:xfrm>
-          <a:prstGeom prst="rect">
-            <a:avLst/>
-          </a:prstGeom>
-          <a:noFill/>
-          <a:ln/>
-        </p:spPr>
-        <p:txBody>
-          <a:bodyPr wrap="square" lIns="0" tIns="0" rIns="0" bIns="0" rtlCol="0" anchor="ctr"/>
-          <a:lstStyle/>
-          <a:p>
-            <a:pPr indent="0" marL="0">
-              <a:buNone/>
-            </a:pPr>
-            <a:r>
-              <a:rPr lang="en-US" sz="1050" dirty="0">
-                <a:solidFill>
-                  <a:srgbClr val="6B7480"/>
-                </a:solidFill>
-                <a:latin typeface="Calibri" pitchFamily="34" charset="0"/>
-                <a:ea typeface="Calibri" pitchFamily="34" charset="-122"/>
-                <a:cs typeface="Calibri" pitchFamily="34" charset="-120"/>
-              </a:rPr>
-              <a:t>/telemetry/ingest</a:t>
-            </a:r>
-            <a:endParaRPr lang="en-US" sz="1050" dirty="0"/>
-          </a:p>
-        </p:txBody>
-      </p:sp>
-      <p:sp>
-        <p:nvSpPr>
-          <p:cNvPr id="24" name="Text 19"/>
-          <p:cNvSpPr/>
-          <p:nvPr/>
-        </p:nvSpPr>
-        <p:spPr>
-          <a:xfrm>
-            <a:off x="8869680" y="2514600"/>
-            <a:ext cx="274320" cy="365760"/>
-          </a:xfrm>
-          <a:prstGeom prst="rect">
-            <a:avLst/>
-          </a:prstGeom>
-          <a:noFill/>
-          <a:ln/>
-        </p:spPr>
-        <p:txBody>
-          <a:bodyPr wrap="square" lIns="0" tIns="0" rIns="0" bIns="0" rtlCol="0" anchor="ctr"/>
-          <a:lstStyle/>
-          <a:p>
-            <a:pPr algn="ctr" indent="0" marL="0">
-              <a:buNone/>
-            </a:pPr>
-            <a:r>
-              <a:rPr lang="en-US" sz="1600" b="1" dirty="0">
-                <a:solidFill>
-                  <a:srgbClr val="1F9BD8"/>
-                </a:solidFill>
-                <a:latin typeface="Calibri" pitchFamily="34" charset="0"/>
-                <a:ea typeface="Calibri" pitchFamily="34" charset="-122"/>
-                <a:cs typeface="Calibri" pitchFamily="34" charset="-120"/>
-              </a:rPr>
-              <a:t>▶</a:t>
-            </a:r>
-            <a:endParaRPr lang="en-US" sz="1600" dirty="0"/>
-          </a:p>
-        </p:txBody>
-      </p:sp>
-      <p:sp>
-        <p:nvSpPr>
-          <p:cNvPr id="25" name="Shape 20"/>
-          <p:cNvSpPr/>
-          <p:nvPr/>
-        </p:nvSpPr>
-        <p:spPr>
-          <a:xfrm>
-            <a:off x="9144000" y="1965960"/>
-            <a:ext cx="2542032" cy="1691640"/>
-          </a:xfrm>
-          <a:prstGeom prst="roundRect">
-            <a:avLst>
-              <a:gd name="adj" fmla="val 4865"/>
-            </a:avLst>
-          </a:prstGeom>
-          <a:solidFill>
-            <a:srgbClr val="F4FAFD"/>
-          </a:solidFill>
-          <a:ln w="12700">
-            <a:solidFill>
-              <a:srgbClr val="DCE6EC"/>
-            </a:solidFill>
-            <a:prstDash val="solid"/>
-          </a:ln>
-          <a:effectLst>
-            <a:outerShdw sx="100000" sy="100000" kx="0" ky="0" algn="bl" rotWithShape="0" blurRad="88900" dist="25400" dir="5400000">
-              <a:srgbClr val="B8C9D4">
-                <a:alpha val="22000"/>
-              </a:srgbClr>
-            </a:outerShdw>
-          </a:effectLst>
-        </p:spPr>
-      </p:sp>
-      <p:sp>
-        <p:nvSpPr>
-          <p:cNvPr id="26" name="Shape 21"/>
-          <p:cNvSpPr/>
-          <p:nvPr/>
-        </p:nvSpPr>
-        <p:spPr>
-          <a:xfrm>
-            <a:off x="9363456" y="2203704"/>
-            <a:ext cx="530352" cy="530352"/>
-          </a:xfrm>
-          <a:prstGeom prst="ellipse">
-            <a:avLst/>
-          </a:prstGeom>
-          <a:solidFill>
-            <a:srgbClr val="1F9BD8"/>
-          </a:solidFill>
-          <a:ln/>
-          <a:effectLst>
-            <a:outerShdw sx="100000" sy="100000" kx="0" ky="0" algn="bl" rotWithShape="0" blurRad="88900" dist="25400" dir="5400000">
-              <a:srgbClr val="B8C9D4">
-                <a:alpha val="22000"/>
-              </a:srgbClr>
-            </a:outerShdw>
-          </a:effectLst>
-        </p:spPr>
-      </p:sp>
-      <p:pic>
-        <p:nvPicPr>
-          <p:cNvPr id="27" name="Image 3" descr="icons/sliders.png">    </p:cNvPr>
-          <p:cNvPicPr>
-            <a:picLocks noChangeAspect="1"/>
-          </p:cNvPicPr>
-          <p:nvPr/>
-        </p:nvPicPr>
-        <p:blipFill>
-          <a:blip r:embed="rId4"/>
-          <a:stretch>
-            <a:fillRect/>
-          </a:stretch>
-        </p:blipFill>
-        <p:spPr>
-          <a:xfrm>
-            <a:off x="9522562" y="2362810"/>
-            <a:ext cx="212141" cy="212141"/>
-          </a:xfrm>
-          <a:prstGeom prst="rect">
-            <a:avLst/>
-          </a:prstGeom>
-        </p:spPr>
-      </p:pic>
-      <p:sp>
-        <p:nvSpPr>
-          <p:cNvPr id="28" name="Text 22"/>
-          <p:cNvSpPr/>
-          <p:nvPr/>
-        </p:nvSpPr>
-        <p:spPr>
-          <a:xfrm>
-            <a:off x="9363456" y="2843784"/>
-            <a:ext cx="2103120" cy="384048"/>
-          </a:xfrm>
-          <a:prstGeom prst="rect">
-            <a:avLst/>
-          </a:prstGeom>
-          <a:noFill/>
-          <a:ln/>
-        </p:spPr>
-        <p:txBody>
-          <a:bodyPr wrap="square" lIns="0" tIns="0" rIns="0" bIns="0" rtlCol="0" anchor="ctr"/>
-          <a:lstStyle/>
-          <a:p>
-            <a:pPr indent="0" marL="0">
-              <a:buNone/>
-            </a:pPr>
-            <a:r>
-              <a:rPr lang="en-US" sz="1400" b="1" dirty="0">
-                <a:solidFill>
-                  <a:srgbClr val="111418"/>
-                </a:solidFill>
-                <a:latin typeface="Calibri" pitchFamily="34" charset="0"/>
-                <a:ea typeface="Calibri" pitchFamily="34" charset="-122"/>
-                <a:cs typeface="Calibri" pitchFamily="34" charset="-120"/>
-              </a:rPr>
-              <a:t>adaptation</a:t>
-            </a:r>
-            <a:endParaRPr lang="en-US" sz="1400" dirty="0"/>
-          </a:p>
-        </p:txBody>
-      </p:sp>
-      <p:sp>
-        <p:nvSpPr>
-          <p:cNvPr id="29" name="Text 23"/>
-          <p:cNvSpPr/>
-          <p:nvPr/>
-        </p:nvSpPr>
-        <p:spPr>
-          <a:xfrm>
-            <a:off x="9363456" y="3209544"/>
-            <a:ext cx="2103120" cy="320040"/>
-          </a:xfrm>
-          <a:prstGeom prst="rect">
-            <a:avLst/>
-          </a:prstGeom>
-          <a:noFill/>
-          <a:ln/>
-        </p:spPr>
-        <p:txBody>
-          <a:bodyPr wrap="square" lIns="0" tIns="0" rIns="0" bIns="0" rtlCol="0" anchor="ctr"/>
-          <a:lstStyle/>
-          <a:p>
-            <a:pPr indent="0" marL="0">
-              <a:buNone/>
-            </a:pPr>
-            <a:r>
-              <a:rPr lang="en-US" sz="1050" dirty="0">
-                <a:solidFill>
-                  <a:srgbClr val="6B7480"/>
-                </a:solidFill>
-                <a:latin typeface="Calibri" pitchFamily="34" charset="0"/>
-                <a:ea typeface="Calibri" pitchFamily="34" charset="-122"/>
-                <a:cs typeface="Calibri" pitchFamily="34" charset="-120"/>
-              </a:rPr>
-              <a:t>сигнал в игру</a:t>
-            </a:r>
-            <a:endParaRPr lang="en-US" sz="1050" dirty="0"/>
-          </a:p>
-        </p:txBody>
-      </p:sp>
-      <p:sp>
-        <p:nvSpPr>
-          <p:cNvPr id="30" name="Shape 24"/>
-          <p:cNvSpPr/>
-          <p:nvPr/>
-        </p:nvSpPr>
-        <p:spPr>
-          <a:xfrm>
-            <a:off x="640080" y="3931920"/>
-            <a:ext cx="3474720" cy="1828800"/>
-          </a:xfrm>
-          <a:prstGeom prst="roundRect">
-            <a:avLst>
-              <a:gd name="adj" fmla="val 4500"/>
-            </a:avLst>
-          </a:prstGeom>
-          <a:solidFill>
-            <a:srgbClr val="FFFFFF"/>
-          </a:solidFill>
-          <a:ln w="12700">
-            <a:solidFill>
-              <a:srgbClr val="DCE6EC"/>
-            </a:solidFill>
-            <a:prstDash val="solid"/>
-          </a:ln>
-          <a:effectLst>
-            <a:outerShdw sx="100000" sy="100000" kx="0" ky="0" algn="bl" rotWithShape="0" blurRad="88900" dist="25400" dir="5400000">
-              <a:srgbClr val="B8C9D4">
-                <a:alpha val="22000"/>
-              </a:srgbClr>
-            </a:outerShdw>
-          </a:effectLst>
-        </p:spPr>
-      </p:sp>
-      <p:sp>
-        <p:nvSpPr>
-          <p:cNvPr id="31" name="Shape 25"/>
-          <p:cNvSpPr/>
-          <p:nvPr/>
-        </p:nvSpPr>
-        <p:spPr>
-          <a:xfrm>
-            <a:off x="859536" y="4169664"/>
-            <a:ext cx="512064" cy="512064"/>
-          </a:xfrm>
-          <a:prstGeom prst="ellipse">
-            <a:avLst/>
-          </a:prstGeom>
-          <a:solidFill>
-            <a:srgbClr val="1F9BD8"/>
-          </a:solidFill>
-          <a:ln/>
-          <a:effectLst>
-            <a:outerShdw sx="100000" sy="100000" kx="0" ky="0" algn="bl" rotWithShape="0" blurRad="88900" dist="25400" dir="5400000">
-              <a:srgbClr val="B8C9D4">
-                <a:alpha val="22000"/>
-              </a:srgbClr>
-            </a:outerShdw>
-          </a:effectLst>
-        </p:spPr>
-      </p:sp>
-      <p:pic>
-        <p:nvPicPr>
-          <p:cNvPr id="32" name="Image 4" descr="icons/bolt.png">    </p:cNvPr>
+          <p:cNvPr id="25" name="Image 2" descr="icons/bolt.png"/>
           <p:cNvPicPr>
             <a:picLocks noChangeAspect="1"/>
           </p:cNvPicPr>
@@ -6176,8 +5779,8 @@
         </p:blipFill>
         <p:spPr>
           <a:xfrm>
-            <a:off x="1013155" y="4323283"/>
-            <a:ext cx="204826" cy="204826"/>
+            <a:off x="8467344" y="3666744"/>
+            <a:ext cx="219456" cy="219456"/>
           </a:xfrm>
           <a:prstGeom prst="rect">
             <a:avLst/>
@@ -6186,14 +5789,14 @@
       </p:pic>
       <p:sp>
         <p:nvSpPr>
-          <p:cNvPr id="33" name="Text 26"/>
-          <p:cNvSpPr/>
-          <p:nvPr/>
-        </p:nvSpPr>
-        <p:spPr>
-          <a:xfrm>
-            <a:off x="859536" y="4809744"/>
-            <a:ext cx="3017520" cy="411480"/>
+          <p:cNvPr id="26" name="Text 21"/>
+          <p:cNvSpPr/>
+          <p:nvPr/>
+        </p:nvSpPr>
+        <p:spPr>
+          <a:xfrm>
+            <a:off x="8302752" y="4178808"/>
+            <a:ext cx="3017520" cy="457200"/>
           </a:xfrm>
           <a:prstGeom prst="rect">
             <a:avLst/>
@@ -6205,11 +5808,11 @@
           <a:bodyPr wrap="square" lIns="0" tIns="0" rIns="0" bIns="0" rtlCol="0" anchor="ctr"/>
           <a:lstStyle/>
           <a:p>
-            <a:pPr indent="0" marL="0">
-              <a:buNone/>
-            </a:pPr>
-            <a:r>
-              <a:rPr lang="en-US" sz="1350" b="1" dirty="0">
+            <a:pPr marL="0" indent="0">
+              <a:buNone/>
+            </a:pPr>
+            <a:r>
+              <a:rPr lang="en-US" sz="1450" b="1" dirty="0">
                 <a:solidFill>
                   <a:srgbClr val="111418"/>
                 </a:solidFill>
@@ -6217,22 +5820,22 @@
                 <a:ea typeface="Calibri" pitchFamily="34" charset="-122"/>
                 <a:cs typeface="Calibri" pitchFamily="34" charset="-120"/>
               </a:rPr>
-              <a:t>Autoload Analytics</a:t>
-            </a:r>
-            <a:endParaRPr lang="en-US" sz="1350" dirty="0"/>
-          </a:p>
-        </p:txBody>
-      </p:sp>
-      <p:sp>
-        <p:nvSpPr>
-          <p:cNvPr id="34" name="Text 27"/>
-          <p:cNvSpPr/>
-          <p:nvPr/>
-        </p:nvSpPr>
-        <p:spPr>
-          <a:xfrm>
-            <a:off x="859536" y="5212080"/>
-            <a:ext cx="3063240" cy="548640"/>
+              <a:t>GDScript + быстрый цикл</a:t>
+            </a:r>
+            <a:endParaRPr lang="en-US" sz="1450" dirty="0"/>
+          </a:p>
+        </p:txBody>
+      </p:sp>
+      <p:sp>
+        <p:nvSpPr>
+          <p:cNvPr id="27" name="Text 22"/>
+          <p:cNvSpPr/>
+          <p:nvPr/>
+        </p:nvSpPr>
+        <p:spPr>
+          <a:xfrm>
+            <a:off x="8302752" y="4617720"/>
+            <a:ext cx="3017520" cy="731520"/>
           </a:xfrm>
           <a:prstGeom prst="rect">
             <a:avLst/>
@@ -6244,14 +5847,14 @@
           <a:bodyPr wrap="square" lIns="0" tIns="0" rIns="0" bIns="0" rtlCol="0" anchor="t"/>
           <a:lstStyle/>
           <a:p>
-            <a:pPr indent="0" marL="0">
+            <a:pPr marL="0" indent="0">
               <a:lnSpc>
-                <a:spcPct val="100000"/>
+                <a:spcPct val="103000"/>
               </a:lnSpc>
               <a:buNone/>
             </a:pPr>
             <a:r>
-              <a:rPr lang="en-US" sz="1150" dirty="0">
+              <a:rPr lang="en-US" sz="1200" dirty="0">
                 <a:solidFill>
                   <a:srgbClr val="33383F"/>
                 </a:solidFill>
@@ -6259,341 +5862,9 @@
                 <a:ea typeface="Calibri" pitchFamily="34" charset="-122"/>
                 <a:cs typeface="Calibri" pitchFamily="34" charset="-120"/>
               </a:rPr>
-              <a:t>единая точка: initialize · start_new_game · track · end_game</a:t>
-            </a:r>
-            <a:endParaRPr lang="en-US" sz="1150" dirty="0"/>
-          </a:p>
-        </p:txBody>
-      </p:sp>
-      <p:sp>
-        <p:nvSpPr>
-          <p:cNvPr id="35" name="Shape 28"/>
-          <p:cNvSpPr/>
-          <p:nvPr/>
-        </p:nvSpPr>
-        <p:spPr>
-          <a:xfrm>
-            <a:off x="4352544" y="3931920"/>
-            <a:ext cx="3474720" cy="1828800"/>
-          </a:xfrm>
-          <a:prstGeom prst="roundRect">
-            <a:avLst>
-              <a:gd name="adj" fmla="val 4500"/>
-            </a:avLst>
-          </a:prstGeom>
-          <a:solidFill>
-            <a:srgbClr val="FFFFFF"/>
-          </a:solidFill>
-          <a:ln w="12700">
-            <a:solidFill>
-              <a:srgbClr val="DCE6EC"/>
-            </a:solidFill>
-            <a:prstDash val="solid"/>
-          </a:ln>
-          <a:effectLst>
-            <a:outerShdw sx="100000" sy="100000" kx="0" ky="0" algn="bl" rotWithShape="0" blurRad="88900" dist="25400" dir="5400000">
-              <a:srgbClr val="B8C9D4">
-                <a:alpha val="22000"/>
-              </a:srgbClr>
-            </a:outerShdw>
-          </a:effectLst>
-        </p:spPr>
-      </p:sp>
-      <p:sp>
-        <p:nvSpPr>
-          <p:cNvPr id="36" name="Shape 29"/>
-          <p:cNvSpPr/>
-          <p:nvPr/>
-        </p:nvSpPr>
-        <p:spPr>
-          <a:xfrm>
-            <a:off x="4572000" y="4169664"/>
-            <a:ext cx="512064" cy="512064"/>
-          </a:xfrm>
-          <a:prstGeom prst="ellipse">
-            <a:avLst/>
-          </a:prstGeom>
-          <a:solidFill>
-            <a:srgbClr val="1F9BD8"/>
-          </a:solidFill>
-          <a:ln/>
-          <a:effectLst>
-            <a:outerShdw sx="100000" sy="100000" kx="0" ky="0" algn="bl" rotWithShape="0" blurRad="88900" dist="25400" dir="5400000">
-              <a:srgbClr val="B8C9D4">
-                <a:alpha val="22000"/>
-              </a:srgbClr>
-            </a:outerShdw>
-          </a:effectLst>
-        </p:spPr>
-      </p:sp>
-      <p:pic>
-        <p:nvPicPr>
-          <p:cNvPr id="37" name="Image 5" descr="icons/cloud.png">    </p:cNvPr>
-          <p:cNvPicPr>
-            <a:picLocks noChangeAspect="1"/>
-          </p:cNvPicPr>
-          <p:nvPr/>
-        </p:nvPicPr>
-        <p:blipFill>
-          <a:blip r:embed="rId6"/>
-          <a:stretch>
-            <a:fillRect/>
-          </a:stretch>
-        </p:blipFill>
-        <p:spPr>
-          <a:xfrm>
-            <a:off x="4725619" y="4323283"/>
-            <a:ext cx="204826" cy="204826"/>
-          </a:xfrm>
-          <a:prstGeom prst="rect">
-            <a:avLst/>
-          </a:prstGeom>
-        </p:spPr>
-      </p:pic>
-      <p:sp>
-        <p:nvSpPr>
-          <p:cNvPr id="38" name="Text 30"/>
-          <p:cNvSpPr/>
-          <p:nvPr/>
-        </p:nvSpPr>
-        <p:spPr>
-          <a:xfrm>
-            <a:off x="4572000" y="4809744"/>
-            <a:ext cx="3017520" cy="411480"/>
-          </a:xfrm>
-          <a:prstGeom prst="rect">
-            <a:avLst/>
-          </a:prstGeom>
-          <a:noFill/>
-          <a:ln/>
-        </p:spPr>
-        <p:txBody>
-          <a:bodyPr wrap="square" lIns="0" tIns="0" rIns="0" bIns="0" rtlCol="0" anchor="ctr"/>
-          <a:lstStyle/>
-          <a:p>
-            <a:pPr indent="0" marL="0">
-              <a:buNone/>
-            </a:pPr>
-            <a:r>
-              <a:rPr lang="en-US" sz="1350" b="1" dirty="0">
-                <a:solidFill>
-                  <a:srgbClr val="111418"/>
-                </a:solidFill>
-                <a:latin typeface="Calibri" pitchFamily="34" charset="0"/>
-                <a:ea typeface="Calibri" pitchFamily="34" charset="-122"/>
-                <a:cs typeface="Calibri" pitchFamily="34" charset="-120"/>
-              </a:rPr>
-              <a:t>Offline-буфер JSONL</a:t>
-            </a:r>
-            <a:endParaRPr lang="en-US" sz="1350" dirty="0"/>
-          </a:p>
-        </p:txBody>
-      </p:sp>
-      <p:sp>
-        <p:nvSpPr>
-          <p:cNvPr id="39" name="Text 31"/>
-          <p:cNvSpPr/>
-          <p:nvPr/>
-        </p:nvSpPr>
-        <p:spPr>
-          <a:xfrm>
-            <a:off x="4572000" y="5212080"/>
-            <a:ext cx="3063240" cy="548640"/>
-          </a:xfrm>
-          <a:prstGeom prst="rect">
-            <a:avLst/>
-          </a:prstGeom>
-          <a:noFill/>
-          <a:ln/>
-        </p:spPr>
-        <p:txBody>
-          <a:bodyPr wrap="square" lIns="0" tIns="0" rIns="0" bIns="0" rtlCol="0" anchor="t"/>
-          <a:lstStyle/>
-          <a:p>
-            <a:pPr indent="0" marL="0">
-              <a:lnSpc>
-                <a:spcPct val="100000"/>
-              </a:lnSpc>
-              <a:buNone/>
-            </a:pPr>
-            <a:r>
-              <a:rPr lang="en-US" sz="1150" dirty="0">
-                <a:solidFill>
-                  <a:srgbClr val="33383F"/>
-                </a:solidFill>
-                <a:latin typeface="Calibri" pitchFamily="34" charset="0"/>
-                <a:ea typeface="Calibri" pitchFamily="34" charset="-122"/>
-                <a:cs typeface="Calibri" pitchFamily="34" charset="-120"/>
-              </a:rPr>
-              <a:t>события не теряются без сети, отправляются при восстановлении связи</a:t>
-            </a:r>
-            <a:endParaRPr lang="en-US" sz="1150" dirty="0"/>
-          </a:p>
-        </p:txBody>
-      </p:sp>
-      <p:sp>
-        <p:nvSpPr>
-          <p:cNvPr id="40" name="Shape 32"/>
-          <p:cNvSpPr/>
-          <p:nvPr/>
-        </p:nvSpPr>
-        <p:spPr>
-          <a:xfrm>
-            <a:off x="8065008" y="3931920"/>
-            <a:ext cx="3474720" cy="1828800"/>
-          </a:xfrm>
-          <a:prstGeom prst="roundRect">
-            <a:avLst>
-              <a:gd name="adj" fmla="val 4500"/>
-            </a:avLst>
-          </a:prstGeom>
-          <a:solidFill>
-            <a:srgbClr val="FFFFFF"/>
-          </a:solidFill>
-          <a:ln w="12700">
-            <a:solidFill>
-              <a:srgbClr val="DCE6EC"/>
-            </a:solidFill>
-            <a:prstDash val="solid"/>
-          </a:ln>
-          <a:effectLst>
-            <a:outerShdw sx="100000" sy="100000" kx="0" ky="0" algn="bl" rotWithShape="0" blurRad="88900" dist="25400" dir="5400000">
-              <a:srgbClr val="B8C9D4">
-                <a:alpha val="22000"/>
-              </a:srgbClr>
-            </a:outerShdw>
-          </a:effectLst>
-        </p:spPr>
-      </p:sp>
-      <p:sp>
-        <p:nvSpPr>
-          <p:cNvPr id="41" name="Shape 33"/>
-          <p:cNvSpPr/>
-          <p:nvPr/>
-        </p:nvSpPr>
-        <p:spPr>
-          <a:xfrm>
-            <a:off x="8284464" y="4169664"/>
-            <a:ext cx="512064" cy="512064"/>
-          </a:xfrm>
-          <a:prstGeom prst="ellipse">
-            <a:avLst/>
-          </a:prstGeom>
-          <a:solidFill>
-            <a:srgbClr val="1F9BD8"/>
-          </a:solidFill>
-          <a:ln/>
-          <a:effectLst>
-            <a:outerShdw sx="100000" sy="100000" kx="0" ky="0" algn="bl" rotWithShape="0" blurRad="88900" dist="25400" dir="5400000">
-              <a:srgbClr val="B8C9D4">
-                <a:alpha val="22000"/>
-              </a:srgbClr>
-            </a:outerShdw>
-          </a:effectLst>
-        </p:spPr>
-      </p:sp>
-      <p:pic>
-        <p:nvPicPr>
-          <p:cNvPr id="42" name="Image 6" descr="icons/link.png">    </p:cNvPr>
-          <p:cNvPicPr>
-            <a:picLocks noChangeAspect="1"/>
-          </p:cNvPicPr>
-          <p:nvPr/>
-        </p:nvPicPr>
-        <p:blipFill>
-          <a:blip r:embed="rId7"/>
-          <a:stretch>
-            <a:fillRect/>
-          </a:stretch>
-        </p:blipFill>
-        <p:spPr>
-          <a:xfrm>
-            <a:off x="8438083" y="4323283"/>
-            <a:ext cx="204826" cy="204826"/>
-          </a:xfrm>
-          <a:prstGeom prst="rect">
-            <a:avLst/>
-          </a:prstGeom>
-        </p:spPr>
-      </p:pic>
-      <p:sp>
-        <p:nvSpPr>
-          <p:cNvPr id="43" name="Text 34"/>
-          <p:cNvSpPr/>
-          <p:nvPr/>
-        </p:nvSpPr>
-        <p:spPr>
-          <a:xfrm>
-            <a:off x="8284464" y="4809744"/>
-            <a:ext cx="3017520" cy="411480"/>
-          </a:xfrm>
-          <a:prstGeom prst="rect">
-            <a:avLst/>
-          </a:prstGeom>
-          <a:noFill/>
-          <a:ln/>
-        </p:spPr>
-        <p:txBody>
-          <a:bodyPr wrap="square" lIns="0" tIns="0" rIns="0" bIns="0" rtlCol="0" anchor="ctr"/>
-          <a:lstStyle/>
-          <a:p>
-            <a:pPr indent="0" marL="0">
-              <a:buNone/>
-            </a:pPr>
-            <a:r>
-              <a:rPr lang="en-US" sz="1350" b="1" dirty="0">
-                <a:solidFill>
-                  <a:srgbClr val="111418"/>
-                </a:solidFill>
-                <a:latin typeface="Calibri" pitchFamily="34" charset="0"/>
-                <a:ea typeface="Calibri" pitchFamily="34" charset="-122"/>
-                <a:cs typeface="Calibri" pitchFamily="34" charset="-120"/>
-              </a:rPr>
-              <a:t>AdaptationBridge</a:t>
-            </a:r>
-            <a:endParaRPr lang="en-US" sz="1350" dirty="0"/>
-          </a:p>
-        </p:txBody>
-      </p:sp>
-      <p:sp>
-        <p:nvSpPr>
-          <p:cNvPr id="44" name="Text 35"/>
-          <p:cNvSpPr/>
-          <p:nvPr/>
-        </p:nvSpPr>
-        <p:spPr>
-          <a:xfrm>
-            <a:off x="8284464" y="5212080"/>
-            <a:ext cx="3063240" cy="548640"/>
-          </a:xfrm>
-          <a:prstGeom prst="rect">
-            <a:avLst/>
-          </a:prstGeom>
-          <a:noFill/>
-          <a:ln/>
-        </p:spPr>
-        <p:txBody>
-          <a:bodyPr wrap="square" lIns="0" tIns="0" rIns="0" bIns="0" rtlCol="0" anchor="t"/>
-          <a:lstStyle/>
-          <a:p>
-            <a:pPr indent="0" marL="0">
-              <a:lnSpc>
-                <a:spcPct val="100000"/>
-              </a:lnSpc>
-              <a:buNone/>
-            </a:pPr>
-            <a:r>
-              <a:rPr lang="en-US" sz="1150" dirty="0">
-                <a:solidFill>
-                  <a:srgbClr val="33383F"/>
-                </a:solidFill>
-                <a:latin typeface="Calibri" pitchFamily="34" charset="0"/>
-                <a:ea typeface="Calibri" pitchFamily="34" charset="-122"/>
-                <a:cs typeface="Calibri" pitchFamily="34" charset="-120"/>
-              </a:rPr>
-              <a:t>сигнал adaptation_received → difficulty, enemy_density, loot_multiplier</a:t>
-            </a:r>
-            <a:endParaRPr lang="en-US" sz="1150" dirty="0"/>
+              <a:t>низкий порог входа, мгновенная итерация в редакторе</a:t>
+            </a:r>
+            <a:endParaRPr lang="en-US" sz="1200" dirty="0"/>
           </a:p>
         </p:txBody>
       </p:sp>
@@ -6613,6 +5884,7 @@
         <a:solidFill>
           <a:srgbClr val="FFFFFF"/>
         </a:solidFill>
+        <a:effectLst/>
       </p:bgPr>
     </p:bg>
     <p:spTree>
@@ -6650,7 +5922,7 @@
           <a:bodyPr wrap="square" lIns="0" tIns="0" rIns="0" bIns="0" rtlCol="0" anchor="ctr"/>
           <a:lstStyle/>
           <a:p>
-            <a:pPr algn="r" indent="0" marL="0">
+            <a:pPr marL="0" indent="0" algn="r">
               <a:buNone/>
             </a:pPr>
             <a:r>
@@ -6689,11 +5961,11 @@
           <a:bodyPr wrap="square" lIns="0" tIns="0" rIns="0" bIns="0" rtlCol="0" anchor="ctr"/>
           <a:lstStyle/>
           <a:p>
-            <a:pPr indent="0" marL="0">
-              <a:buNone/>
-            </a:pPr>
-            <a:r>
-              <a:rPr lang="en-US" sz="1250" b="1" spc="250" kern="0" dirty="0">
+            <a:pPr marL="0" indent="0">
+              <a:buNone/>
+            </a:pPr>
+            <a:r>
+              <a:rPr lang="en-US" sz="1250" b="1" kern="0" spc="250" dirty="0">
                 <a:solidFill>
                   <a:srgbClr val="1F9BD8"/>
                 </a:solidFill>
@@ -6728,7 +6000,7 @@
           <a:bodyPr wrap="square" lIns="0" tIns="0" rIns="0" bIns="0" rtlCol="0" anchor="ctr"/>
           <a:lstStyle/>
           <a:p>
-            <a:pPr indent="0" marL="0">
+            <a:pPr marL="0" indent="0">
               <a:buNone/>
             </a:pPr>
             <a:r>
@@ -6748,84 +6020,6 @@
       </p:sp>
       <p:sp>
         <p:nvSpPr>
-          <p:cNvPr id="5" name="Text 3"/>
-          <p:cNvSpPr/>
-          <p:nvPr/>
-        </p:nvSpPr>
-        <p:spPr>
-          <a:xfrm>
-            <a:off x="640080" y="6437376"/>
-            <a:ext cx="7315200" cy="274320"/>
-          </a:xfrm>
-          <a:prstGeom prst="rect">
-            <a:avLst/>
-          </a:prstGeom>
-          <a:noFill/>
-          <a:ln/>
-        </p:spPr>
-        <p:txBody>
-          <a:bodyPr wrap="square" lIns="0" tIns="0" rIns="0" bIns="0" rtlCol="0" anchor="ctr"/>
-          <a:lstStyle/>
-          <a:p>
-            <a:pPr indent="0" marL="0">
-              <a:buNone/>
-            </a:pPr>
-            <a:r>
-              <a:rPr lang="en-US" sz="900" dirty="0">
-                <a:solidFill>
-                  <a:srgbClr val="6B7480"/>
-                </a:solidFill>
-                <a:latin typeface="Calibri" pitchFamily="34" charset="0"/>
-                <a:ea typeface="Calibri" pitchFamily="34" charset="-122"/>
-                <a:cs typeface="Calibri" pitchFamily="34" charset="-120"/>
-              </a:rPr>
-              <a:t>адаптивный геймплей на телеметрии</a:t>
-            </a:r>
-            <a:endParaRPr lang="en-US" sz="900" dirty="0"/>
-          </a:p>
-        </p:txBody>
-      </p:sp>
-      <p:sp>
-        <p:nvSpPr>
-          <p:cNvPr id="6" name="Text 4"/>
-          <p:cNvSpPr/>
-          <p:nvPr/>
-        </p:nvSpPr>
-        <p:spPr>
-          <a:xfrm>
-            <a:off x="10728655" y="6437376"/>
-            <a:ext cx="822960" cy="274320"/>
-          </a:xfrm>
-          <a:prstGeom prst="rect">
-            <a:avLst/>
-          </a:prstGeom>
-          <a:noFill/>
-          <a:ln/>
-        </p:spPr>
-        <p:txBody>
-          <a:bodyPr wrap="square" lIns="0" tIns="0" rIns="0" bIns="0" rtlCol="0" anchor="ctr"/>
-          <a:lstStyle/>
-          <a:p>
-            <a:pPr algn="r" indent="0" marL="0">
-              <a:buNone/>
-            </a:pPr>
-            <a:r>
-              <a:rPr lang="en-US" sz="900" dirty="0">
-                <a:solidFill>
-                  <a:srgbClr val="6B7480"/>
-                </a:solidFill>
-                <a:latin typeface="Calibri" pitchFamily="34" charset="0"/>
-                <a:ea typeface="Calibri" pitchFamily="34" charset="-122"/>
-                <a:cs typeface="Calibri" pitchFamily="34" charset="-120"/>
-              </a:rPr>
-              <a:t>5 / 10</a:t>
-            </a:r>
-            <a:endParaRPr lang="en-US" sz="900" dirty="0"/>
-          </a:p>
-        </p:txBody>
-      </p:sp>
-      <p:sp>
-        <p:nvSpPr>
           <p:cNvPr id="7" name="Text 5"/>
           <p:cNvSpPr/>
           <p:nvPr/>
@@ -6845,7 +6039,7 @@
           <a:bodyPr wrap="square" lIns="0" tIns="0" rIns="0" bIns="0" rtlCol="0" anchor="ctr"/>
           <a:lstStyle/>
           <a:p>
-            <a:pPr indent="0" marL="0">
+            <a:pPr marL="0" indent="0">
               <a:lnSpc>
                 <a:spcPct val="103000"/>
               </a:lnSpc>
@@ -6892,7 +6086,7 @@
             <a:prstDash val="solid"/>
           </a:ln>
           <a:effectLst>
-            <a:outerShdw sx="100000" sy="100000" kx="0" ky="0" algn="bl" rotWithShape="0" blurRad="88900" dist="25400" dir="5400000">
+            <a:outerShdw blurRad="88900" dist="25400" dir="5400000" algn="bl" rotWithShape="0">
               <a:srgbClr val="B8C9D4">
                 <a:alpha val="22000"/>
               </a:srgbClr>
@@ -6919,7 +6113,7 @@
           </a:solidFill>
           <a:ln/>
           <a:effectLst>
-            <a:outerShdw sx="100000" sy="100000" kx="0" ky="0" algn="bl" rotWithShape="0" blurRad="88900" dist="25400" dir="5400000">
+            <a:outerShdw blurRad="88900" dist="25400" dir="5400000" algn="bl" rotWithShape="0">
               <a:srgbClr val="B8C9D4">
                 <a:alpha val="22000"/>
               </a:srgbClr>
@@ -6929,14 +6123,14 @@
       </p:sp>
       <p:pic>
         <p:nvPicPr>
-          <p:cNvPr id="10" name="Image 0" descr="icons/cloud.png">    </p:cNvPr>
+          <p:cNvPr id="10" name="Image 0" descr="icons/cloud.png"/>
           <p:cNvPicPr>
             <a:picLocks noChangeAspect="1"/>
           </p:cNvPicPr>
           <p:nvPr/>
         </p:nvPicPr>
         <p:blipFill>
-          <a:blip r:embed="rId1"/>
+          <a:blip r:embed="rId3"/>
           <a:stretch>
             <a:fillRect/>
           </a:stretch>
@@ -6972,7 +6166,7 @@
           <a:bodyPr wrap="square" lIns="0" tIns="0" rIns="0" bIns="0" rtlCol="0" anchor="ctr"/>
           <a:lstStyle/>
           <a:p>
-            <a:pPr indent="0" marL="0">
+            <a:pPr marL="0" indent="0">
               <a:buNone/>
             </a:pPr>
             <a:r>
@@ -7011,7 +6205,7 @@
           <a:bodyPr wrap="square" lIns="0" tIns="0" rIns="0" bIns="0" rtlCol="0" anchor="t"/>
           <a:lstStyle/>
           <a:p>
-            <a:pPr indent="0" marL="0">
+            <a:pPr marL="0" indent="0">
               <a:lnSpc>
                 <a:spcPct val="105000"/>
               </a:lnSpc>
@@ -7026,7 +6220,7 @@
                 <a:ea typeface="Calibri" pitchFamily="34" charset="-122"/>
                 <a:cs typeface="Calibri" pitchFamily="34" charset="-120"/>
               </a:rPr>
-              <a:t>URL ingest, размер буфера, интервал автоотправки, retry, кэш offline</a:t>
+              <a:t>URL приёма, размер буфера, интервал автоотправки, повторы, офлайн-кэш</a:t>
             </a:r>
             <a:endParaRPr lang="en-US" sz="1200" dirty="0"/>
           </a:p>
@@ -7058,7 +6252,7 @@
             <a:prstDash val="solid"/>
           </a:ln>
           <a:effectLst>
-            <a:outerShdw sx="100000" sy="100000" kx="0" ky="0" algn="bl" rotWithShape="0" blurRad="88900" dist="25400" dir="5400000">
+            <a:outerShdw blurRad="88900" dist="25400" dir="5400000" algn="bl" rotWithShape="0">
               <a:srgbClr val="B8C9D4">
                 <a:alpha val="22000"/>
               </a:srgbClr>
@@ -7085,7 +6279,7 @@
           </a:solidFill>
           <a:ln/>
           <a:effectLst>
-            <a:outerShdw sx="100000" sy="100000" kx="0" ky="0" algn="bl" rotWithShape="0" blurRad="88900" dist="25400" dir="5400000">
+            <a:outerShdw blurRad="88900" dist="25400" dir="5400000" algn="bl" rotWithShape="0">
               <a:srgbClr val="B8C9D4">
                 <a:alpha val="22000"/>
               </a:srgbClr>
@@ -7095,14 +6289,14 @@
       </p:sp>
       <p:pic>
         <p:nvPicPr>
-          <p:cNvPr id="15" name="Image 1" descr="icons/sliders.png">    </p:cNvPr>
+          <p:cNvPr id="15" name="Image 1" descr="icons/sliders.png"/>
           <p:cNvPicPr>
             <a:picLocks noChangeAspect="1"/>
           </p:cNvPicPr>
           <p:nvPr/>
         </p:nvPicPr>
         <p:blipFill>
-          <a:blip r:embed="rId2"/>
+          <a:blip r:embed="rId4"/>
           <a:stretch>
             <a:fillRect/>
           </a:stretch>
@@ -7138,7 +6332,7 @@
           <a:bodyPr wrap="square" lIns="0" tIns="0" rIns="0" bIns="0" rtlCol="0" anchor="ctr"/>
           <a:lstStyle/>
           <a:p>
-            <a:pPr indent="0" marL="0">
+            <a:pPr marL="0" indent="0">
               <a:buNone/>
             </a:pPr>
             <a:r>
@@ -7177,7 +6371,7 @@
           <a:bodyPr wrap="square" lIns="0" tIns="0" rIns="0" bIns="0" rtlCol="0" anchor="t"/>
           <a:lstStyle/>
           <a:p>
-            <a:pPr indent="0" marL="0">
+            <a:pPr marL="0" indent="0">
               <a:lnSpc>
                 <a:spcPct val="105000"/>
               </a:lnSpc>
@@ -7192,7 +6386,7 @@
                 <a:ea typeface="Calibri" pitchFamily="34" charset="-122"/>
                 <a:cs typeface="Calibri" pitchFamily="34" charset="-120"/>
               </a:rPr>
-              <a:t>события, critical points (веса), архетипы, bootstrap_actions</a:t>
+              <a:t>события, критические точки (веса), архетипы, стартовые действия</a:t>
             </a:r>
             <a:endParaRPr lang="en-US" sz="1200" dirty="0"/>
           </a:p>
@@ -7224,7 +6418,7 @@
             <a:prstDash val="solid"/>
           </a:ln>
           <a:effectLst>
-            <a:outerShdw sx="100000" sy="100000" kx="0" ky="0" algn="bl" rotWithShape="0" blurRad="88900" dist="25400" dir="5400000">
+            <a:outerShdw blurRad="88900" dist="25400" dir="5400000" algn="bl" rotWithShape="0">
               <a:srgbClr val="B8C9D4">
                 <a:alpha val="22000"/>
               </a:srgbClr>
@@ -7251,7 +6445,7 @@
           </a:solidFill>
           <a:ln/>
           <a:effectLst>
-            <a:outerShdw sx="100000" sy="100000" kx="0" ky="0" algn="bl" rotWithShape="0" blurRad="88900" dist="25400" dir="5400000">
+            <a:outerShdw blurRad="88900" dist="25400" dir="5400000" algn="bl" rotWithShape="0">
               <a:srgbClr val="B8C9D4">
                 <a:alpha val="22000"/>
               </a:srgbClr>
@@ -7261,14 +6455,14 @@
       </p:sp>
       <p:pic>
         <p:nvPicPr>
-          <p:cNvPr id="20" name="Image 2" descr="icons/document.png">    </p:cNvPr>
+          <p:cNvPr id="20" name="Image 2" descr="icons/document.png"/>
           <p:cNvPicPr>
             <a:picLocks noChangeAspect="1"/>
           </p:cNvPicPr>
           <p:nvPr/>
         </p:nvPicPr>
         <p:blipFill>
-          <a:blip r:embed="rId3"/>
+          <a:blip r:embed="rId5"/>
           <a:stretch>
             <a:fillRect/>
           </a:stretch>
@@ -7304,7 +6498,7 @@
           <a:bodyPr wrap="square" lIns="0" tIns="0" rIns="0" bIns="0" rtlCol="0" anchor="ctr"/>
           <a:lstStyle/>
           <a:p>
-            <a:pPr indent="0" marL="0">
+            <a:pPr marL="0" indent="0">
               <a:buNone/>
             </a:pPr>
             <a:r>
@@ -7343,7 +6537,7 @@
           <a:bodyPr wrap="square" lIns="0" tIns="0" rIns="0" bIns="0" rtlCol="0" anchor="t"/>
           <a:lstStyle/>
           <a:p>
-            <a:pPr indent="0" marL="0">
+            <a:pPr marL="0" indent="0">
               <a:lnSpc>
                 <a:spcPct val="105000"/>
               </a:lnSpc>
@@ -7358,7 +6552,7 @@
                 <a:ea typeface="Calibri" pitchFamily="34" charset="-122"/>
                 <a:cs typeface="Calibri" pitchFamily="34" charset="-120"/>
               </a:rPr>
-              <a:t>панель logs_viewer: что отправлено, ответы сервера, ошибки</a:t>
+              <a:t>панель логов: что отправлено, ответы сервера, ошибки</a:t>
             </a:r>
             <a:endParaRPr lang="en-US" sz="1200" dirty="0"/>
           </a:p>
@@ -7390,7 +6584,7 @@
             <a:prstDash val="solid"/>
           </a:ln>
           <a:effectLst>
-            <a:outerShdw sx="100000" sy="100000" kx="0" ky="0" algn="bl" rotWithShape="0" blurRad="88900" dist="25400" dir="5400000">
+            <a:outerShdw blurRad="88900" dist="25400" dir="5400000" algn="bl" rotWithShape="0">
               <a:srgbClr val="B8C9D4">
                 <a:alpha val="22000"/>
               </a:srgbClr>
@@ -7417,7 +6611,7 @@
           </a:solidFill>
           <a:ln/>
           <a:effectLst>
-            <a:outerShdw sx="100000" sy="100000" kx="0" ky="0" algn="bl" rotWithShape="0" blurRad="88900" dist="25400" dir="5400000">
+            <a:outerShdw blurRad="88900" dist="25400" dir="5400000" algn="bl" rotWithShape="0">
               <a:srgbClr val="B8C9D4">
                 <a:alpha val="22000"/>
               </a:srgbClr>
@@ -7427,14 +6621,14 @@
       </p:sp>
       <p:pic>
         <p:nvPicPr>
-          <p:cNvPr id="25" name="Image 3" descr="icons/check.png">    </p:cNvPr>
+          <p:cNvPr id="25" name="Image 3" descr="icons/check.png"/>
           <p:cNvPicPr>
             <a:picLocks noChangeAspect="1"/>
           </p:cNvPicPr>
           <p:nvPr/>
         </p:nvPicPr>
         <p:blipFill>
-          <a:blip r:embed="rId4"/>
+          <a:blip r:embed="rId6"/>
           <a:stretch>
             <a:fillRect/>
           </a:stretch>
@@ -7470,7 +6664,7 @@
           <a:bodyPr wrap="square" lIns="0" tIns="0" rIns="0" bIns="0" rtlCol="0" anchor="ctr"/>
           <a:lstStyle/>
           <a:p>
-            <a:pPr indent="0" marL="0">
+            <a:pPr marL="0" indent="0">
               <a:buNone/>
             </a:pPr>
             <a:r>
@@ -7509,7 +6703,7 @@
           <a:bodyPr wrap="square" lIns="0" tIns="0" rIns="0" bIns="0" rtlCol="0" anchor="t"/>
           <a:lstStyle/>
           <a:p>
-            <a:pPr indent="0" marL="0">
+            <a:pPr marL="0" indent="0">
               <a:lnSpc>
                 <a:spcPct val="105000"/>
               </a:lnSpc>
@@ -7524,7 +6718,7 @@
                 <a:ea typeface="Calibri" pitchFamily="34" charset="-122"/>
                 <a:cs typeface="Calibri" pitchFamily="34" charset="-120"/>
               </a:rPr>
-              <a:t>кнопка health-check и блок последней полученной адаптации</a:t>
+              <a:t>кнопка проверки состояния и блок последней полученной адаптации</a:t>
             </a:r>
             <a:endParaRPr lang="en-US" sz="1200" dirty="0"/>
           </a:p>
@@ -7546,6 +6740,7 @@
         <a:solidFill>
           <a:srgbClr val="FFFFFF"/>
         </a:solidFill>
+        <a:effectLst/>
       </p:bgPr>
     </p:bg>
     <p:spTree>
@@ -7583,7 +6778,7 @@
           <a:bodyPr wrap="square" lIns="0" tIns="0" rIns="0" bIns="0" rtlCol="0" anchor="ctr"/>
           <a:lstStyle/>
           <a:p>
-            <a:pPr algn="r" indent="0" marL="0">
+            <a:pPr marL="0" indent="0" algn="r">
               <a:buNone/>
             </a:pPr>
             <a:r>
@@ -7622,11 +6817,11 @@
           <a:bodyPr wrap="square" lIns="0" tIns="0" rIns="0" bIns="0" rtlCol="0" anchor="ctr"/>
           <a:lstStyle/>
           <a:p>
-            <a:pPr indent="0" marL="0">
-              <a:buNone/>
-            </a:pPr>
-            <a:r>
-              <a:rPr lang="en-US" sz="1250" b="1" spc="250" kern="0" dirty="0">
+            <a:pPr marL="0" indent="0">
+              <a:buNone/>
+            </a:pPr>
+            <a:r>
+              <a:rPr lang="en-US" sz="1250" b="1" kern="0" spc="250" dirty="0">
                 <a:solidFill>
                   <a:srgbClr val="1F9BD8"/>
                 </a:solidFill>
@@ -7661,7 +6856,7 @@
           <a:bodyPr wrap="square" lIns="0" tIns="0" rIns="0" bIns="0" rtlCol="0" anchor="ctr"/>
           <a:lstStyle/>
           <a:p>
-            <a:pPr indent="0" marL="0">
+            <a:pPr marL="0" indent="0">
               <a:buNone/>
             </a:pPr>
             <a:r>
@@ -7676,84 +6871,6 @@
               <a:t>Примеры панелей плагина</a:t>
             </a:r>
             <a:endParaRPr lang="en-US" sz="3000" dirty="0"/>
-          </a:p>
-        </p:txBody>
-      </p:sp>
-      <p:sp>
-        <p:nvSpPr>
-          <p:cNvPr id="5" name="Text 3"/>
-          <p:cNvSpPr/>
-          <p:nvPr/>
-        </p:nvSpPr>
-        <p:spPr>
-          <a:xfrm>
-            <a:off x="640080" y="6437376"/>
-            <a:ext cx="7315200" cy="274320"/>
-          </a:xfrm>
-          <a:prstGeom prst="rect">
-            <a:avLst/>
-          </a:prstGeom>
-          <a:noFill/>
-          <a:ln/>
-        </p:spPr>
-        <p:txBody>
-          <a:bodyPr wrap="square" lIns="0" tIns="0" rIns="0" bIns="0" rtlCol="0" anchor="ctr"/>
-          <a:lstStyle/>
-          <a:p>
-            <a:pPr indent="0" marL="0">
-              <a:buNone/>
-            </a:pPr>
-            <a:r>
-              <a:rPr lang="en-US" sz="900" dirty="0">
-                <a:solidFill>
-                  <a:srgbClr val="6B7480"/>
-                </a:solidFill>
-                <a:latin typeface="Calibri" pitchFamily="34" charset="0"/>
-                <a:ea typeface="Calibri" pitchFamily="34" charset="-122"/>
-                <a:cs typeface="Calibri" pitchFamily="34" charset="-120"/>
-              </a:rPr>
-              <a:t>адаптивный геймплей на телеметрии</a:t>
-            </a:r>
-            <a:endParaRPr lang="en-US" sz="900" dirty="0"/>
-          </a:p>
-        </p:txBody>
-      </p:sp>
-      <p:sp>
-        <p:nvSpPr>
-          <p:cNvPr id="6" name="Text 4"/>
-          <p:cNvSpPr/>
-          <p:nvPr/>
-        </p:nvSpPr>
-        <p:spPr>
-          <a:xfrm>
-            <a:off x="10728655" y="6437376"/>
-            <a:ext cx="822960" cy="274320"/>
-          </a:xfrm>
-          <a:prstGeom prst="rect">
-            <a:avLst/>
-          </a:prstGeom>
-          <a:noFill/>
-          <a:ln/>
-        </p:spPr>
-        <p:txBody>
-          <a:bodyPr wrap="square" lIns="0" tIns="0" rIns="0" bIns="0" rtlCol="0" anchor="ctr"/>
-          <a:lstStyle/>
-          <a:p>
-            <a:pPr algn="r" indent="0" marL="0">
-              <a:buNone/>
-            </a:pPr>
-            <a:r>
-              <a:rPr lang="en-US" sz="900" dirty="0">
-                <a:solidFill>
-                  <a:srgbClr val="6B7480"/>
-                </a:solidFill>
-                <a:latin typeface="Calibri" pitchFamily="34" charset="0"/>
-                <a:ea typeface="Calibri" pitchFamily="34" charset="-122"/>
-                <a:cs typeface="Calibri" pitchFamily="34" charset="-120"/>
-              </a:rPr>
-              <a:t>6 / 10</a:t>
-            </a:r>
-            <a:endParaRPr lang="en-US" sz="900" dirty="0"/>
           </a:p>
         </p:txBody>
       </p:sp>
@@ -7783,7 +6900,7 @@
             <a:prstDash val="solid"/>
           </a:ln>
           <a:effectLst>
-            <a:outerShdw sx="100000" sy="100000" kx="0" ky="0" algn="bl" rotWithShape="0" blurRad="88900" dist="25400" dir="5400000">
+            <a:outerShdw blurRad="88900" dist="25400" dir="5400000" algn="bl" rotWithShape="0">
               <a:srgbClr val="B8C9D4">
                 <a:alpha val="22000"/>
               </a:srgbClr>
@@ -7832,7 +6949,7 @@
           <a:bodyPr wrap="square" lIns="0" tIns="0" rIns="0" bIns="0" rtlCol="0" anchor="ctr"/>
           <a:lstStyle/>
           <a:p>
-            <a:pPr indent="0" marL="0">
+            <a:pPr marL="0" indent="0">
               <a:buNone/>
             </a:pPr>
             <a:r>
@@ -7956,7 +7073,7 @@
           <a:bodyPr wrap="square" lIns="0" tIns="0" rIns="0" bIns="0" rtlCol="0" anchor="ctr"/>
           <a:lstStyle/>
           <a:p>
-            <a:pPr indent="0" marL="0">
+            <a:pPr marL="0" indent="0">
               <a:buNone/>
             </a:pPr>
             <a:r>
@@ -7968,7 +7085,7 @@
                 <a:ea typeface="Calibri" pitchFamily="34" charset="-122"/>
                 <a:cs typeface="Calibri" pitchFamily="34" charset="-120"/>
               </a:rPr>
-              <a:t>URL ingest</a:t>
+              <a:t>URL приёма</a:t>
             </a:r>
             <a:endParaRPr lang="en-US" sz="1150" dirty="0"/>
           </a:p>
@@ -7995,7 +7112,7 @@
           <a:bodyPr wrap="square" lIns="0" tIns="0" rIns="0" bIns="0" rtlCol="0" anchor="ctr"/>
           <a:lstStyle/>
           <a:p>
-            <a:pPr indent="0" marL="0">
+            <a:pPr marL="0" indent="0">
               <a:buNone/>
             </a:pPr>
             <a:r>
@@ -8059,9 +7176,20 @@
           <a:bodyPr wrap="square" lIns="0" tIns="0" rIns="0" bIns="0" rtlCol="0" anchor="ctr"/>
           <a:lstStyle/>
           <a:p>
-            <a:pPr indent="0" marL="0">
-              <a:buNone/>
-            </a:pPr>
+            <a:pPr marL="0" indent="0">
+              <a:buNone/>
+            </a:pPr>
+            <a:r>
+              <a:rPr lang="en-US" sz="1150" dirty="0" err="1">
+                <a:solidFill>
+                  <a:srgbClr val="6B7480"/>
+                </a:solidFill>
+                <a:latin typeface="Calibri" pitchFamily="34" charset="0"/>
+                <a:ea typeface="Calibri" pitchFamily="34" charset="-122"/>
+                <a:cs typeface="Calibri" pitchFamily="34" charset="-120"/>
+              </a:rPr>
+              <a:t>Размер</a:t>
+            </a:r>
             <a:r>
               <a:rPr lang="en-US" sz="1150" dirty="0">
                 <a:solidFill>
@@ -8071,7 +7199,18 @@
                 <a:ea typeface="Calibri" pitchFamily="34" charset="-122"/>
                 <a:cs typeface="Calibri" pitchFamily="34" charset="-120"/>
               </a:rPr>
-              <a:t>Размер батча</a:t>
+              <a:t> </a:t>
+            </a:r>
+            <a:r>
+              <a:rPr lang="ru-RU" sz="1150" dirty="0">
+                <a:solidFill>
+                  <a:srgbClr val="6B7480"/>
+                </a:solidFill>
+                <a:latin typeface="Calibri" pitchFamily="34" charset="0"/>
+                <a:ea typeface="Calibri" pitchFamily="34" charset="-122"/>
+                <a:cs typeface="Calibri" pitchFamily="34" charset="-120"/>
+              </a:rPr>
+              <a:t>буфера</a:t>
             </a:r>
             <a:endParaRPr lang="en-US" sz="1150" dirty="0"/>
           </a:p>
@@ -8098,7 +7237,7 @@
           <a:bodyPr wrap="square" lIns="0" tIns="0" rIns="0" bIns="0" rtlCol="0" anchor="ctr"/>
           <a:lstStyle/>
           <a:p>
-            <a:pPr indent="0" marL="0">
+            <a:pPr marL="0" indent="0">
               <a:buNone/>
             </a:pPr>
             <a:r>
@@ -8162,7 +7301,7 @@
           <a:bodyPr wrap="square" lIns="0" tIns="0" rIns="0" bIns="0" rtlCol="0" anchor="ctr"/>
           <a:lstStyle/>
           <a:p>
-            <a:pPr indent="0" marL="0">
+            <a:pPr marL="0" indent="0">
               <a:buNone/>
             </a:pPr>
             <a:r>
@@ -8201,7 +7340,7 @@
           <a:bodyPr wrap="square" lIns="0" tIns="0" rIns="0" bIns="0" rtlCol="0" anchor="ctr"/>
           <a:lstStyle/>
           <a:p>
-            <a:pPr indent="0" marL="0">
+            <a:pPr marL="0" indent="0">
               <a:buNone/>
             </a:pPr>
             <a:r>
@@ -8265,7 +7404,7 @@
           <a:bodyPr wrap="square" lIns="0" tIns="0" rIns="0" bIns="0" rtlCol="0" anchor="ctr"/>
           <a:lstStyle/>
           <a:p>
-            <a:pPr indent="0" marL="0">
+            <a:pPr marL="0" indent="0">
               <a:buNone/>
             </a:pPr>
             <a:r>
@@ -8277,7 +7416,7 @@
                 <a:ea typeface="Calibri" pitchFamily="34" charset="-122"/>
                 <a:cs typeface="Calibri" pitchFamily="34" charset="-120"/>
               </a:rPr>
-              <a:t>Retry</a:t>
+              <a:t>Повторы</a:t>
             </a:r>
             <a:endParaRPr lang="en-US" sz="1150" dirty="0"/>
           </a:p>
@@ -8304,7 +7443,7 @@
           <a:bodyPr wrap="square" lIns="0" tIns="0" rIns="0" bIns="0" rtlCol="0" anchor="ctr"/>
           <a:lstStyle/>
           <a:p>
-            <a:pPr indent="0" marL="0">
+            <a:pPr marL="0" indent="0">
               <a:buNone/>
             </a:pPr>
             <a:r>
@@ -8368,7 +7507,7 @@
           <a:bodyPr wrap="square" lIns="0" tIns="0" rIns="0" bIns="0" rtlCol="0" anchor="ctr"/>
           <a:lstStyle/>
           <a:p>
-            <a:pPr indent="0" marL="0">
+            <a:pPr marL="0" indent="0">
               <a:buNone/>
             </a:pPr>
             <a:r>
@@ -8380,7 +7519,7 @@
                 <a:ea typeface="Calibri" pitchFamily="34" charset="-122"/>
                 <a:cs typeface="Calibri" pitchFamily="34" charset="-120"/>
               </a:rPr>
-              <a:t>Offline-кэш</a:t>
+              <a:t>Офлайн-кэш</a:t>
             </a:r>
             <a:endParaRPr lang="en-US" sz="1150" dirty="0"/>
           </a:p>
@@ -8407,7 +7546,7 @@
           <a:bodyPr wrap="square" lIns="0" tIns="0" rIns="0" bIns="0" rtlCol="0" anchor="ctr"/>
           <a:lstStyle/>
           <a:p>
-            <a:pPr indent="0" marL="0">
+            <a:pPr marL="0" indent="0">
               <a:buNone/>
             </a:pPr>
             <a:r>
@@ -8451,7 +7590,7 @@
             <a:prstDash val="solid"/>
           </a:ln>
           <a:effectLst>
-            <a:outerShdw sx="100000" sy="100000" kx="0" ky="0" algn="bl" rotWithShape="0" blurRad="88900" dist="25400" dir="5400000">
+            <a:outerShdw blurRad="88900" dist="25400" dir="5400000" algn="bl" rotWithShape="0">
               <a:srgbClr val="B8C9D4">
                 <a:alpha val="22000"/>
               </a:srgbClr>
@@ -8500,7 +7639,7 @@
           <a:bodyPr wrap="square" lIns="0" tIns="0" rIns="0" bIns="0" rtlCol="0" anchor="ctr"/>
           <a:lstStyle/>
           <a:p>
-            <a:pPr indent="0" marL="0">
+            <a:pPr marL="0" indent="0">
               <a:buNone/>
             </a:pPr>
             <a:r>
@@ -8599,7 +7738,7 @@
           <a:bodyPr wrap="square" lIns="0" tIns="0" rIns="0" bIns="0" rtlCol="0" anchor="ctr"/>
           <a:lstStyle/>
           <a:p>
-            <a:pPr indent="0" marL="0">
+            <a:pPr marL="0" indent="0">
               <a:buNone/>
             </a:pPr>
             <a:r>
@@ -8665,11 +7804,11 @@
           <a:bodyPr wrap="square" lIns="0" tIns="0" rIns="0" bIns="0" rtlCol="0" anchor="ctr"/>
           <a:lstStyle/>
           <a:p>
-            <a:pPr indent="0" marL="0">
-              <a:buNone/>
-            </a:pPr>
-            <a:r>
-              <a:rPr lang="en-US" sz="1100" dirty="0">
+            <a:pPr marL="0" indent="0">
+              <a:buNone/>
+            </a:pPr>
+            <a:r>
+              <a:rPr lang="ru-RU" sz="1100" dirty="0">
                 <a:solidFill>
                   <a:srgbClr val="0B5E88"/>
                 </a:solidFill>
@@ -8677,7 +7816,7 @@
                 <a:ea typeface="Calibri" pitchFamily="34" charset="-122"/>
                 <a:cs typeface="Calibri" pitchFamily="34" charset="-120"/>
               </a:rPr>
-              <a:t>explorer</a:t>
+              <a:t>Исследователь</a:t>
             </a:r>
             <a:endParaRPr lang="en-US" sz="1100" dirty="0"/>
           </a:p>
@@ -8731,19 +7870,18 @@
           <a:bodyPr wrap="square" lIns="0" tIns="0" rIns="0" bIns="0" rtlCol="0" anchor="ctr"/>
           <a:lstStyle/>
           <a:p>
-            <a:pPr indent="0" marL="0">
-              <a:buNone/>
-            </a:pPr>
-            <a:r>
-              <a:rPr lang="en-US" sz="1100" dirty="0">
+            <a:pPr marL="0" indent="0">
+              <a:buNone/>
+            </a:pPr>
+            <a:r>
+              <a:rPr lang="ru-RU" sz="1100" dirty="0">
                 <a:solidFill>
                   <a:srgbClr val="0B5E88"/>
                 </a:solidFill>
                 <a:latin typeface="Calibri" pitchFamily="34" charset="0"/>
-                <a:ea typeface="Calibri" pitchFamily="34" charset="-122"/>
-                <a:cs typeface="Calibri" pitchFamily="34" charset="-120"/>
-              </a:rPr>
-              <a:t>achiever</a:t>
+                <a:cs typeface="Calibri" pitchFamily="34" charset="-120"/>
+              </a:rPr>
+              <a:t>Собиратель</a:t>
             </a:r>
             <a:endParaRPr lang="en-US" sz="1100" dirty="0"/>
           </a:p>
@@ -8797,19 +7935,18 @@
           <a:bodyPr wrap="square" lIns="0" tIns="0" rIns="0" bIns="0" rtlCol="0" anchor="ctr"/>
           <a:lstStyle/>
           <a:p>
-            <a:pPr indent="0" marL="0">
-              <a:buNone/>
-            </a:pPr>
-            <a:r>
-              <a:rPr lang="en-US" sz="1100" dirty="0">
+            <a:pPr marL="0" indent="0">
+              <a:buNone/>
+            </a:pPr>
+            <a:r>
+              <a:rPr lang="ru-RU" sz="1100" dirty="0">
                 <a:solidFill>
                   <a:srgbClr val="0B5E88"/>
                 </a:solidFill>
                 <a:latin typeface="Calibri" pitchFamily="34" charset="0"/>
-                <a:ea typeface="Calibri" pitchFamily="34" charset="-122"/>
-                <a:cs typeface="Calibri" pitchFamily="34" charset="-120"/>
-              </a:rPr>
-              <a:t>socializer</a:t>
+                <a:cs typeface="Calibri" pitchFamily="34" charset="-120"/>
+              </a:rPr>
+              <a:t>Коммуникант</a:t>
             </a:r>
             <a:endParaRPr lang="en-US" sz="1100" dirty="0"/>
           </a:p>
@@ -8863,19 +8000,18 @@
           <a:bodyPr wrap="square" lIns="0" tIns="0" rIns="0" bIns="0" rtlCol="0" anchor="ctr"/>
           <a:lstStyle/>
           <a:p>
-            <a:pPr indent="0" marL="0">
-              <a:buNone/>
-            </a:pPr>
-            <a:r>
-              <a:rPr lang="en-US" sz="1100" dirty="0">
+            <a:pPr marL="0" indent="0">
+              <a:buNone/>
+            </a:pPr>
+            <a:r>
+              <a:rPr lang="ru-RU" sz="1100" dirty="0">
                 <a:solidFill>
                   <a:srgbClr val="0B5E88"/>
                 </a:solidFill>
                 <a:latin typeface="Calibri" pitchFamily="34" charset="0"/>
-                <a:ea typeface="Calibri" pitchFamily="34" charset="-122"/>
-                <a:cs typeface="Calibri" pitchFamily="34" charset="-120"/>
-              </a:rPr>
-              <a:t>killer</a:t>
+                <a:cs typeface="Calibri" pitchFamily="34" charset="-120"/>
+              </a:rPr>
+              <a:t>Боец</a:t>
             </a:r>
             <a:endParaRPr lang="en-US" sz="1100" dirty="0"/>
           </a:p>
@@ -8902,7 +8038,7 @@
           <a:bodyPr wrap="square" lIns="0" tIns="0" rIns="0" bIns="0" rtlCol="0" anchor="ctr"/>
           <a:lstStyle/>
           <a:p>
-            <a:pPr indent="0" marL="0">
+            <a:pPr marL="0" indent="0">
               <a:buNone/>
             </a:pPr>
             <a:r>
@@ -8914,7 +8050,7 @@
                 <a:ea typeface="Calibri" pitchFamily="34" charset="-122"/>
                 <a:cs typeface="Calibri" pitchFamily="34" charset="-120"/>
               </a:rPr>
-              <a:t>Critical points</a:t>
+              <a:t>Критические точки</a:t>
             </a:r>
             <a:endParaRPr lang="en-US" sz="1150" dirty="0"/>
           </a:p>
@@ -8966,7 +8102,7 @@
           <a:bodyPr wrap="square" lIns="0" tIns="0" rIns="0" bIns="0" rtlCol="0" anchor="ctr"/>
           <a:lstStyle/>
           <a:p>
-            <a:pPr indent="0" marL="0">
+            <a:pPr marL="0" indent="0">
               <a:buNone/>
             </a:pPr>
             <a:r>
@@ -9005,7 +8141,7 @@
           <a:bodyPr wrap="square" lIns="0" tIns="0" rIns="0" bIns="0" rtlCol="0" anchor="ctr"/>
           <a:lstStyle/>
           <a:p>
-            <a:pPr indent="0" marL="0">
+            <a:pPr marL="0" indent="0">
               <a:buNone/>
             </a:pPr>
             <a:r>
@@ -9069,7 +8205,7 @@
           <a:bodyPr wrap="square" lIns="0" tIns="0" rIns="0" bIns="0" rtlCol="0" anchor="ctr"/>
           <a:lstStyle/>
           <a:p>
-            <a:pPr indent="0" marL="0">
+            <a:pPr marL="0" indent="0">
               <a:buNone/>
             </a:pPr>
             <a:r>
@@ -9108,7 +8244,7 @@
           <a:bodyPr wrap="square" lIns="0" tIns="0" rIns="0" bIns="0" rtlCol="0" anchor="ctr"/>
           <a:lstStyle/>
           <a:p>
-            <a:pPr indent="0" marL="0">
+            <a:pPr marL="0" indent="0">
               <a:buNone/>
             </a:pPr>
             <a:r>
@@ -9172,7 +8308,7 @@
           <a:bodyPr wrap="square" lIns="0" tIns="0" rIns="0" bIns="0" rtlCol="0" anchor="ctr"/>
           <a:lstStyle/>
           <a:p>
-            <a:pPr indent="0" marL="0">
+            <a:pPr marL="0" indent="0">
               <a:buNone/>
             </a:pPr>
             <a:r>
@@ -9211,7 +8347,7 @@
           <a:bodyPr wrap="square" lIns="0" tIns="0" rIns="0" bIns="0" rtlCol="0" anchor="ctr"/>
           <a:lstStyle/>
           <a:p>
-            <a:pPr indent="0" marL="0">
+            <a:pPr marL="0" indent="0">
               <a:buNone/>
             </a:pPr>
             <a:r>
@@ -9245,6 +8381,7 @@
         <a:solidFill>
           <a:srgbClr val="FFFFFF"/>
         </a:solidFill>
+        <a:effectLst/>
       </p:bgPr>
     </p:bg>
     <p:spTree>
@@ -9282,7 +8419,7 @@
           <a:bodyPr wrap="square" lIns="0" tIns="0" rIns="0" bIns="0" rtlCol="0" anchor="ctr"/>
           <a:lstStyle/>
           <a:p>
-            <a:pPr algn="r" indent="0" marL="0">
+            <a:pPr marL="0" indent="0" algn="r">
               <a:buNone/>
             </a:pPr>
             <a:r>
@@ -9321,11 +8458,11 @@
           <a:bodyPr wrap="square" lIns="0" tIns="0" rIns="0" bIns="0" rtlCol="0" anchor="ctr"/>
           <a:lstStyle/>
           <a:p>
-            <a:pPr indent="0" marL="0">
-              <a:buNone/>
-            </a:pPr>
-            <a:r>
-              <a:rPr lang="en-US" sz="1250" b="1" spc="250" kern="0" dirty="0">
+            <a:pPr marL="0" indent="0">
+              <a:buNone/>
+            </a:pPr>
+            <a:r>
+              <a:rPr lang="en-US" sz="1250" b="1" kern="0" spc="250" dirty="0">
                 <a:solidFill>
                   <a:srgbClr val="1F9BD8"/>
                 </a:solidFill>
@@ -9360,7 +8497,7 @@
           <a:bodyPr wrap="square" lIns="0" tIns="0" rIns="0" bIns="0" rtlCol="0" anchor="ctr"/>
           <a:lstStyle/>
           <a:p>
-            <a:pPr indent="0" marL="0">
+            <a:pPr marL="0" indent="0">
               <a:buNone/>
             </a:pPr>
             <a:r>
@@ -9375,84 +8512,6 @@
               <a:t>JSON для отправки на сервер</a:t>
             </a:r>
             <a:endParaRPr lang="en-US" sz="3000" dirty="0"/>
-          </a:p>
-        </p:txBody>
-      </p:sp>
-      <p:sp>
-        <p:nvSpPr>
-          <p:cNvPr id="5" name="Text 3"/>
-          <p:cNvSpPr/>
-          <p:nvPr/>
-        </p:nvSpPr>
-        <p:spPr>
-          <a:xfrm>
-            <a:off x="640080" y="6437376"/>
-            <a:ext cx="7315200" cy="274320"/>
-          </a:xfrm>
-          <a:prstGeom prst="rect">
-            <a:avLst/>
-          </a:prstGeom>
-          <a:noFill/>
-          <a:ln/>
-        </p:spPr>
-        <p:txBody>
-          <a:bodyPr wrap="square" lIns="0" tIns="0" rIns="0" bIns="0" rtlCol="0" anchor="ctr"/>
-          <a:lstStyle/>
-          <a:p>
-            <a:pPr indent="0" marL="0">
-              <a:buNone/>
-            </a:pPr>
-            <a:r>
-              <a:rPr lang="en-US" sz="900" dirty="0">
-                <a:solidFill>
-                  <a:srgbClr val="6B7480"/>
-                </a:solidFill>
-                <a:latin typeface="Calibri" pitchFamily="34" charset="0"/>
-                <a:ea typeface="Calibri" pitchFamily="34" charset="-122"/>
-                <a:cs typeface="Calibri" pitchFamily="34" charset="-120"/>
-              </a:rPr>
-              <a:t>адаптивный геймплей на телеметрии</a:t>
-            </a:r>
-            <a:endParaRPr lang="en-US" sz="900" dirty="0"/>
-          </a:p>
-        </p:txBody>
-      </p:sp>
-      <p:sp>
-        <p:nvSpPr>
-          <p:cNvPr id="6" name="Text 4"/>
-          <p:cNvSpPr/>
-          <p:nvPr/>
-        </p:nvSpPr>
-        <p:spPr>
-          <a:xfrm>
-            <a:off x="10728655" y="6437376"/>
-            <a:ext cx="822960" cy="274320"/>
-          </a:xfrm>
-          <a:prstGeom prst="rect">
-            <a:avLst/>
-          </a:prstGeom>
-          <a:noFill/>
-          <a:ln/>
-        </p:spPr>
-        <p:txBody>
-          <a:bodyPr wrap="square" lIns="0" tIns="0" rIns="0" bIns="0" rtlCol="0" anchor="ctr"/>
-          <a:lstStyle/>
-          <a:p>
-            <a:pPr algn="r" indent="0" marL="0">
-              <a:buNone/>
-            </a:pPr>
-            <a:r>
-              <a:rPr lang="en-US" sz="900" dirty="0">
-                <a:solidFill>
-                  <a:srgbClr val="6B7480"/>
-                </a:solidFill>
-                <a:latin typeface="Calibri" pitchFamily="34" charset="0"/>
-                <a:ea typeface="Calibri" pitchFamily="34" charset="-122"/>
-                <a:cs typeface="Calibri" pitchFamily="34" charset="-120"/>
-              </a:rPr>
-              <a:t>7 / 10</a:t>
-            </a:r>
-            <a:endParaRPr lang="en-US" sz="900" dirty="0"/>
           </a:p>
         </p:txBody>
       </p:sp>
@@ -9477,7 +8536,7 @@
           </a:solidFill>
           <a:ln/>
           <a:effectLst>
-            <a:outerShdw sx="100000" sy="100000" kx="0" ky="0" algn="bl" rotWithShape="0" blurRad="88900" dist="25400" dir="5400000">
+            <a:outerShdw blurRad="88900" dist="25400" dir="5400000" algn="bl" rotWithShape="0">
               <a:srgbClr val="B8C9D4">
                 <a:alpha val="22000"/>
               </a:srgbClr>
@@ -9506,7 +8565,7 @@
           <a:bodyPr wrap="square" lIns="0" tIns="0" rIns="0" bIns="0" rtlCol="0" anchor="ctr"/>
           <a:lstStyle/>
           <a:p>
-            <a:pPr indent="0" marL="0">
+            <a:pPr marL="0" indent="0">
               <a:buNone/>
             </a:pPr>
             <a:r>
@@ -9545,7 +8604,7 @@
           <a:bodyPr wrap="square" lIns="0" tIns="0" rIns="0" bIns="0" rtlCol="0" anchor="t"/>
           <a:lstStyle/>
           <a:p>
-            <a:pPr indent="0" marL="0">
+            <a:pPr marL="0" indent="0">
               <a:lnSpc>
                 <a:spcPct val="112000"/>
               </a:lnSpc>
@@ -9565,7 +8624,7 @@
             <a:endParaRPr lang="en-US" sz="1150" dirty="0"/>
           </a:p>
           <a:p>
-            <a:pPr indent="0" marL="0">
+            <a:pPr marL="0" indent="0">
               <a:lnSpc>
                 <a:spcPct val="112000"/>
               </a:lnSpc>
@@ -9585,7 +8644,7 @@
             <a:endParaRPr lang="en-US" sz="1150" dirty="0"/>
           </a:p>
           <a:p>
-            <a:pPr indent="0" marL="0">
+            <a:pPr marL="0" indent="0">
               <a:lnSpc>
                 <a:spcPct val="112000"/>
               </a:lnSpc>
@@ -9605,7 +8664,7 @@
             <a:endParaRPr lang="en-US" sz="1150" dirty="0"/>
           </a:p>
           <a:p>
-            <a:pPr indent="0" marL="0">
+            <a:pPr marL="0" indent="0">
               <a:lnSpc>
                 <a:spcPct val="112000"/>
               </a:lnSpc>
@@ -9625,7 +8684,7 @@
             <a:endParaRPr lang="en-US" sz="1150" dirty="0"/>
           </a:p>
           <a:p>
-            <a:pPr indent="0" marL="0">
+            <a:pPr marL="0" indent="0">
               <a:lnSpc>
                 <a:spcPct val="112000"/>
               </a:lnSpc>
@@ -9645,7 +8704,7 @@
             <a:endParaRPr lang="en-US" sz="1150" dirty="0"/>
           </a:p>
           <a:p>
-            <a:pPr indent="0" marL="0">
+            <a:pPr marL="0" indent="0">
               <a:lnSpc>
                 <a:spcPct val="112000"/>
               </a:lnSpc>
@@ -9665,7 +8724,7 @@
             <a:endParaRPr lang="en-US" sz="1150" dirty="0"/>
           </a:p>
           <a:p>
-            <a:pPr indent="0" marL="0">
+            <a:pPr marL="0" indent="0">
               <a:lnSpc>
                 <a:spcPct val="112000"/>
               </a:lnSpc>
@@ -9685,7 +8744,7 @@
             <a:endParaRPr lang="en-US" sz="1150" dirty="0"/>
           </a:p>
           <a:p>
-            <a:pPr indent="0" marL="0">
+            <a:pPr marL="0" indent="0">
               <a:lnSpc>
                 <a:spcPct val="112000"/>
               </a:lnSpc>
@@ -9705,7 +8764,7 @@
             <a:endParaRPr lang="en-US" sz="1150" dirty="0"/>
           </a:p>
           <a:p>
-            <a:pPr indent="0" marL="0">
+            <a:pPr marL="0" indent="0">
               <a:lnSpc>
                 <a:spcPct val="112000"/>
               </a:lnSpc>
@@ -9725,7 +8784,7 @@
             <a:endParaRPr lang="en-US" sz="1150" dirty="0"/>
           </a:p>
           <a:p>
-            <a:pPr indent="0" marL="0">
+            <a:pPr marL="0" indent="0">
               <a:lnSpc>
                 <a:spcPct val="112000"/>
               </a:lnSpc>
@@ -9745,7 +8804,7 @@
             <a:endParaRPr lang="en-US" sz="1150" dirty="0"/>
           </a:p>
           <a:p>
-            <a:pPr indent="0" marL="0">
+            <a:pPr marL="0" indent="0">
               <a:lnSpc>
                 <a:spcPct val="112000"/>
               </a:lnSpc>
@@ -9765,7 +8824,7 @@
             <a:endParaRPr lang="en-US" sz="1150" dirty="0"/>
           </a:p>
           <a:p>
-            <a:pPr indent="0" marL="0">
+            <a:pPr marL="0" indent="0">
               <a:lnSpc>
                 <a:spcPct val="112000"/>
               </a:lnSpc>
@@ -9785,7 +8844,7 @@
             <a:endParaRPr lang="en-US" sz="1150" dirty="0"/>
           </a:p>
           <a:p>
-            <a:pPr indent="0" marL="0">
+            <a:pPr marL="0" indent="0">
               <a:lnSpc>
                 <a:spcPct val="112000"/>
               </a:lnSpc>
@@ -9805,7 +8864,7 @@
             <a:endParaRPr lang="en-US" sz="1150" dirty="0"/>
           </a:p>
           <a:p>
-            <a:pPr indent="0" marL="0">
+            <a:pPr marL="0" indent="0">
               <a:lnSpc>
                 <a:spcPct val="112000"/>
               </a:lnSpc>
@@ -9825,7 +8884,7 @@
             <a:endParaRPr lang="en-US" sz="1150" dirty="0"/>
           </a:p>
           <a:p>
-            <a:pPr indent="0" marL="0">
+            <a:pPr marL="0" indent="0">
               <a:lnSpc>
                 <a:spcPct val="112000"/>
               </a:lnSpc>
@@ -9872,7 +8931,7 @@
             <a:prstDash val="solid"/>
           </a:ln>
           <a:effectLst>
-            <a:outerShdw sx="100000" sy="100000" kx="0" ky="0" algn="bl" rotWithShape="0" blurRad="88900" dist="25400" dir="5400000">
+            <a:outerShdw blurRad="88900" dist="25400" dir="5400000" algn="bl" rotWithShape="0">
               <a:srgbClr val="B8C9D4">
                 <a:alpha val="22000"/>
               </a:srgbClr>
@@ -9899,7 +8958,7 @@
           </a:solidFill>
           <a:ln/>
           <a:effectLst>
-            <a:outerShdw sx="100000" sy="100000" kx="0" ky="0" algn="bl" rotWithShape="0" blurRad="88900" dist="25400" dir="5400000">
+            <a:outerShdw blurRad="88900" dist="25400" dir="5400000" algn="bl" rotWithShape="0">
               <a:srgbClr val="B8C9D4">
                 <a:alpha val="22000"/>
               </a:srgbClr>
@@ -9909,14 +8968,14 @@
       </p:sp>
       <p:pic>
         <p:nvPicPr>
-          <p:cNvPr id="12" name="Image 0" descr="icons/flow.png">    </p:cNvPr>
+          <p:cNvPr id="12" name="Image 0" descr="icons/flow.png"/>
           <p:cNvPicPr>
             <a:picLocks noChangeAspect="1"/>
           </p:cNvPicPr>
           <p:nvPr/>
         </p:nvPicPr>
         <p:blipFill>
-          <a:blip r:embed="rId1"/>
+          <a:blip r:embed="rId3"/>
           <a:stretch>
             <a:fillRect/>
           </a:stretch>
@@ -9952,7 +9011,7 @@
           <a:bodyPr wrap="square" lIns="0" tIns="0" rIns="0" bIns="0" rtlCol="0" anchor="ctr"/>
           <a:lstStyle/>
           <a:p>
-            <a:pPr indent="0" marL="0">
+            <a:pPr marL="0" indent="0">
               <a:buNone/>
             </a:pPr>
             <a:r>
@@ -9991,13 +9050,24 @@
           <a:bodyPr wrap="square" lIns="0" tIns="0" rIns="0" bIns="0" rtlCol="0" anchor="t"/>
           <a:lstStyle/>
           <a:p>
-            <a:pPr indent="0" marL="0">
+            <a:pPr marL="0" indent="0">
               <a:lnSpc>
                 <a:spcPct val="100000"/>
               </a:lnSpc>
               <a:buNone/>
             </a:pPr>
             <a:r>
+              <a:rPr lang="ru-RU" sz="1150" dirty="0">
+                <a:solidFill>
+                  <a:srgbClr val="33383F"/>
+                </a:solidFill>
+                <a:latin typeface="Calibri" pitchFamily="34" charset="0"/>
+                <a:ea typeface="Calibri" pitchFamily="34" charset="-122"/>
+                <a:cs typeface="Calibri" pitchFamily="34" charset="-120"/>
+              </a:rPr>
+              <a:t>Буфер</a:t>
+            </a:r>
+            <a:r>
               <a:rPr lang="en-US" sz="1150" dirty="0">
                 <a:solidFill>
                   <a:srgbClr val="33383F"/>
@@ -10006,7 +9076,7 @@
                 <a:ea typeface="Calibri" pitchFamily="34" charset="-122"/>
                 <a:cs typeface="Calibri" pitchFamily="34" charset="-120"/>
               </a:rPr>
-              <a:t>батч событий: id сессии, игрока, имя, время, parameters для ML</a:t>
+              <a:t> событий: id сессии, игрока, имя, время, parameters для ML</a:t>
             </a:r>
             <a:endParaRPr lang="en-US" sz="1150" dirty="0"/>
           </a:p>
@@ -10038,7 +9108,7 @@
             <a:prstDash val="solid"/>
           </a:ln>
           <a:effectLst>
-            <a:outerShdw sx="100000" sy="100000" kx="0" ky="0" algn="bl" rotWithShape="0" blurRad="88900" dist="25400" dir="5400000">
+            <a:outerShdw blurRad="88900" dist="25400" dir="5400000" algn="bl" rotWithShape="0">
               <a:srgbClr val="B8C9D4">
                 <a:alpha val="22000"/>
               </a:srgbClr>
@@ -10065,7 +9135,7 @@
           </a:solidFill>
           <a:ln/>
           <a:effectLst>
-            <a:outerShdw sx="100000" sy="100000" kx="0" ky="0" algn="bl" rotWithShape="0" blurRad="88900" dist="25400" dir="5400000">
+            <a:outerShdw blurRad="88900" dist="25400" dir="5400000" algn="bl" rotWithShape="0">
               <a:srgbClr val="B8C9D4">
                 <a:alpha val="22000"/>
               </a:srgbClr>
@@ -10075,14 +9145,14 @@
       </p:sp>
       <p:pic>
         <p:nvPicPr>
-          <p:cNvPr id="17" name="Image 1" descr="icons/sliders.png">    </p:cNvPr>
+          <p:cNvPr id="17" name="Image 1" descr="icons/sliders.png"/>
           <p:cNvPicPr>
             <a:picLocks noChangeAspect="1"/>
           </p:cNvPicPr>
           <p:nvPr/>
         </p:nvPicPr>
         <p:blipFill>
-          <a:blip r:embed="rId2"/>
+          <a:blip r:embed="rId4"/>
           <a:stretch>
             <a:fillRect/>
           </a:stretch>
@@ -10118,7 +9188,7 @@
           <a:bodyPr wrap="square" lIns="0" tIns="0" rIns="0" bIns="0" rtlCol="0" anchor="ctr"/>
           <a:lstStyle/>
           <a:p>
-            <a:pPr indent="0" marL="0">
+            <a:pPr marL="0" indent="0">
               <a:buNone/>
             </a:pPr>
             <a:r>
@@ -10157,7 +9227,7 @@
           <a:bodyPr wrap="square" lIns="0" tIns="0" rIns="0" bIns="0" rtlCol="0" anchor="t"/>
           <a:lstStyle/>
           <a:p>
-            <a:pPr indent="0" marL="0">
+            <a:pPr marL="0" indent="0">
               <a:lnSpc>
                 <a:spcPct val="100000"/>
               </a:lnSpc>
@@ -10172,7 +9242,73 @@
                 <a:ea typeface="Calibri" pitchFamily="34" charset="-122"/>
                 <a:cs typeface="Calibri" pitchFamily="34" charset="-120"/>
               </a:rPr>
-              <a:t>critical_points и archetypes из профиля; model_mode = cloud</a:t>
+              <a:t>critical_points и archetypes </a:t>
+            </a:r>
+            <a:r>
+              <a:rPr lang="ru-RU" sz="1150" dirty="0">
+                <a:solidFill>
+                  <a:srgbClr val="33383F"/>
+                </a:solidFill>
+                <a:latin typeface="Calibri" pitchFamily="34" charset="0"/>
+                <a:ea typeface="Calibri" pitchFamily="34" charset="-122"/>
+                <a:cs typeface="Calibri" pitchFamily="34" charset="-120"/>
+              </a:rPr>
+              <a:t>берутся </a:t>
+            </a:r>
+            <a:r>
+              <a:rPr lang="en-US" sz="1150" dirty="0" err="1">
+                <a:solidFill>
+                  <a:srgbClr val="33383F"/>
+                </a:solidFill>
+                <a:latin typeface="Calibri" pitchFamily="34" charset="0"/>
+                <a:ea typeface="Calibri" pitchFamily="34" charset="-122"/>
+                <a:cs typeface="Calibri" pitchFamily="34" charset="-120"/>
+              </a:rPr>
+              <a:t>из</a:t>
+            </a:r>
+            <a:r>
+              <a:rPr lang="en-US" sz="1150" dirty="0">
+                <a:solidFill>
+                  <a:srgbClr val="33383F"/>
+                </a:solidFill>
+                <a:latin typeface="Calibri" pitchFamily="34" charset="0"/>
+                <a:ea typeface="Calibri" pitchFamily="34" charset="-122"/>
+                <a:cs typeface="Calibri" pitchFamily="34" charset="-120"/>
+              </a:rPr>
+              <a:t> </a:t>
+            </a:r>
+            <a:r>
+              <a:rPr lang="en-US" sz="1150" dirty="0" err="1">
+                <a:solidFill>
+                  <a:srgbClr val="33383F"/>
+                </a:solidFill>
+                <a:latin typeface="Calibri" pitchFamily="34" charset="0"/>
+                <a:ea typeface="Calibri" pitchFamily="34" charset="-122"/>
+                <a:cs typeface="Calibri" pitchFamily="34" charset="-120"/>
+              </a:rPr>
+              <a:t>профиля</a:t>
+            </a:r>
+            <a:r>
+              <a:rPr lang="ru-RU" sz="1150" dirty="0">
+                <a:solidFill>
+                  <a:srgbClr val="33383F"/>
+                </a:solidFill>
+                <a:latin typeface="Calibri" pitchFamily="34" charset="0"/>
+                <a:ea typeface="Calibri" pitchFamily="34" charset="-122"/>
+                <a:cs typeface="Calibri" pitchFamily="34" charset="-120"/>
+              </a:rPr>
+              <a:t> </a:t>
+            </a:r>
+            <a:r>
+              <a:rPr lang="en-US" sz="1150" dirty="0">
+                <a:solidFill>
+                  <a:srgbClr val="33383F"/>
+                </a:solidFill>
+                <a:latin typeface="Calibri" pitchFamily="34" charset="0"/>
+                <a:ea typeface="Calibri" pitchFamily="34" charset="-122"/>
+                <a:cs typeface="Calibri" pitchFamily="34" charset="-120"/>
+              </a:rPr>
+              <a:t>; model_mode = cloud</a:t>
             </a:r>
             <a:endParaRPr lang="en-US" sz="1150" dirty="0"/>
           </a:p>
@@ -10204,7 +9340,7 @@
             <a:prstDash val="solid"/>
           </a:ln>
           <a:effectLst>
-            <a:outerShdw sx="100000" sy="100000" kx="0" ky="0" algn="bl" rotWithShape="0" blurRad="88900" dist="25400" dir="5400000">
+            <a:outerShdw blurRad="88900" dist="25400" dir="5400000" algn="bl" rotWithShape="0">
               <a:srgbClr val="B8C9D4">
                 <a:alpha val="22000"/>
               </a:srgbClr>
@@ -10231,7 +9367,7 @@
           </a:solidFill>
           <a:ln/>
           <a:effectLst>
-            <a:outerShdw sx="100000" sy="100000" kx="0" ky="0" algn="bl" rotWithShape="0" blurRad="88900" dist="25400" dir="5400000">
+            <a:outerShdw blurRad="88900" dist="25400" dir="5400000" algn="bl" rotWithShape="0">
               <a:srgbClr val="B8C9D4">
                 <a:alpha val="22000"/>
               </a:srgbClr>
@@ -10241,14 +9377,14 @@
       </p:sp>
       <p:pic>
         <p:nvPicPr>
-          <p:cNvPr id="22" name="Image 2" descr="icons/bolt.png">    </p:cNvPr>
+          <p:cNvPr id="22" name="Image 2" descr="icons/bolt.png"/>
           <p:cNvPicPr>
             <a:picLocks noChangeAspect="1"/>
           </p:cNvPicPr>
           <p:nvPr/>
         </p:nvPicPr>
         <p:blipFill>
-          <a:blip r:embed="rId3"/>
+          <a:blip r:embed="rId5"/>
           <a:stretch>
             <a:fillRect/>
           </a:stretch>
@@ -10284,7 +9420,7 @@
           <a:bodyPr wrap="square" lIns="0" tIns="0" rIns="0" bIns="0" rtlCol="0" anchor="ctr"/>
           <a:lstStyle/>
           <a:p>
-            <a:pPr indent="0" marL="0">
+            <a:pPr marL="0" indent="0">
               <a:buNone/>
             </a:pPr>
             <a:r>
@@ -10323,13 +9459,35 @@
           <a:bodyPr wrap="square" lIns="0" tIns="0" rIns="0" bIns="0" rtlCol="0" anchor="t"/>
           <a:lstStyle/>
           <a:p>
-            <a:pPr indent="0" marL="0">
+            <a:pPr marL="0" indent="0">
               <a:lnSpc>
                 <a:spcPct val="100000"/>
               </a:lnSpc>
               <a:buNone/>
             </a:pPr>
             <a:r>
+              <a:rPr lang="ru-RU" sz="1150" dirty="0">
+                <a:solidFill>
+                  <a:srgbClr val="33383F"/>
+                </a:solidFill>
+                <a:latin typeface="Calibri" pitchFamily="34" charset="0"/>
+                <a:ea typeface="Calibri" pitchFamily="34" charset="-122"/>
+                <a:cs typeface="Calibri" pitchFamily="34" charset="-120"/>
+              </a:rPr>
+              <a:t>П</a:t>
+            </a:r>
+            <a:r>
+              <a:rPr lang="en-US" sz="1150" dirty="0" err="1">
+                <a:solidFill>
+                  <a:srgbClr val="33383F"/>
+                </a:solidFill>
+                <a:latin typeface="Calibri" pitchFamily="34" charset="0"/>
+                <a:ea typeface="Calibri" pitchFamily="34" charset="-122"/>
+                <a:cs typeface="Calibri" pitchFamily="34" charset="-120"/>
+              </a:rPr>
+              <a:t>лагин</a:t>
+            </a:r>
+            <a:r>
               <a:rPr lang="en-US" sz="1150" dirty="0">
                 <a:solidFill>
                   <a:srgbClr val="33383F"/>
@@ -10338,7 +9496,7 @@
                 <a:ea typeface="Calibri" pitchFamily="34" charset="-122"/>
                 <a:cs typeface="Calibri" pitchFamily="34" charset="-120"/>
               </a:rPr>
-              <a:t>плагин сам подставляет session_id, timestamp, game_time, state</a:t>
+              <a:t> сам подставляет session_id, timestamp, game_time, state</a:t>
             </a:r>
             <a:endParaRPr lang="en-US" sz="1150" dirty="0"/>
           </a:p>
@@ -10360,6 +9518,7 @@
         <a:solidFill>
           <a:srgbClr val="FFFFFF"/>
         </a:solidFill>
+        <a:effectLst/>
       </p:bgPr>
     </p:bg>
     <p:spTree>
@@ -10397,7 +9556,7 @@
           <a:bodyPr wrap="square" lIns="0" tIns="0" rIns="0" bIns="0" rtlCol="0" anchor="ctr"/>
           <a:lstStyle/>
           <a:p>
-            <a:pPr algn="r" indent="0" marL="0">
+            <a:pPr marL="0" indent="0" algn="r">
               <a:buNone/>
             </a:pPr>
             <a:r>
@@ -10436,11 +9595,11 @@
           <a:bodyPr wrap="square" lIns="0" tIns="0" rIns="0" bIns="0" rtlCol="0" anchor="ctr"/>
           <a:lstStyle/>
           <a:p>
-            <a:pPr indent="0" marL="0">
-              <a:buNone/>
-            </a:pPr>
-            <a:r>
-              <a:rPr lang="en-US" sz="1250" b="1" spc="250" kern="0" dirty="0">
+            <a:pPr marL="0" indent="0">
+              <a:buNone/>
+            </a:pPr>
+            <a:r>
+              <a:rPr lang="en-US" sz="1250" b="1" kern="0" spc="250" dirty="0">
                 <a:solidFill>
                   <a:srgbClr val="1F9BD8"/>
                 </a:solidFill>
@@ -10475,7 +9634,7 @@
           <a:bodyPr wrap="square" lIns="0" tIns="0" rIns="0" bIns="0" rtlCol="0" anchor="ctr"/>
           <a:lstStyle/>
           <a:p>
-            <a:pPr indent="0" marL="0">
+            <a:pPr marL="0" indent="0">
               <a:buNone/>
             </a:pPr>
             <a:r>
@@ -10490,84 +9649,6 @@
               <a:t>Интеграция в большие проекты</a:t>
             </a:r>
             <a:endParaRPr lang="en-US" sz="3000" dirty="0"/>
-          </a:p>
-        </p:txBody>
-      </p:sp>
-      <p:sp>
-        <p:nvSpPr>
-          <p:cNvPr id="5" name="Text 3"/>
-          <p:cNvSpPr/>
-          <p:nvPr/>
-        </p:nvSpPr>
-        <p:spPr>
-          <a:xfrm>
-            <a:off x="640080" y="6437376"/>
-            <a:ext cx="7315200" cy="274320"/>
-          </a:xfrm>
-          <a:prstGeom prst="rect">
-            <a:avLst/>
-          </a:prstGeom>
-          <a:noFill/>
-          <a:ln/>
-        </p:spPr>
-        <p:txBody>
-          <a:bodyPr wrap="square" lIns="0" tIns="0" rIns="0" bIns="0" rtlCol="0" anchor="ctr"/>
-          <a:lstStyle/>
-          <a:p>
-            <a:pPr indent="0" marL="0">
-              <a:buNone/>
-            </a:pPr>
-            <a:r>
-              <a:rPr lang="en-US" sz="900" dirty="0">
-                <a:solidFill>
-                  <a:srgbClr val="6B7480"/>
-                </a:solidFill>
-                <a:latin typeface="Calibri" pitchFamily="34" charset="0"/>
-                <a:ea typeface="Calibri" pitchFamily="34" charset="-122"/>
-                <a:cs typeface="Calibri" pitchFamily="34" charset="-120"/>
-              </a:rPr>
-              <a:t>адаптивный геймплей на телеметрии</a:t>
-            </a:r>
-            <a:endParaRPr lang="en-US" sz="900" dirty="0"/>
-          </a:p>
-        </p:txBody>
-      </p:sp>
-      <p:sp>
-        <p:nvSpPr>
-          <p:cNvPr id="6" name="Text 4"/>
-          <p:cNvSpPr/>
-          <p:nvPr/>
-        </p:nvSpPr>
-        <p:spPr>
-          <a:xfrm>
-            <a:off x="10728655" y="6437376"/>
-            <a:ext cx="822960" cy="274320"/>
-          </a:xfrm>
-          <a:prstGeom prst="rect">
-            <a:avLst/>
-          </a:prstGeom>
-          <a:noFill/>
-          <a:ln/>
-        </p:spPr>
-        <p:txBody>
-          <a:bodyPr wrap="square" lIns="0" tIns="0" rIns="0" bIns="0" rtlCol="0" anchor="ctr"/>
-          <a:lstStyle/>
-          <a:p>
-            <a:pPr algn="r" indent="0" marL="0">
-              <a:buNone/>
-            </a:pPr>
-            <a:r>
-              <a:rPr lang="en-US" sz="900" dirty="0">
-                <a:solidFill>
-                  <a:srgbClr val="6B7480"/>
-                </a:solidFill>
-                <a:latin typeface="Calibri" pitchFamily="34" charset="0"/>
-                <a:ea typeface="Calibri" pitchFamily="34" charset="-122"/>
-                <a:cs typeface="Calibri" pitchFamily="34" charset="-120"/>
-              </a:rPr>
-              <a:t>8 / 10</a:t>
-            </a:r>
-            <a:endParaRPr lang="en-US" sz="900" dirty="0"/>
           </a:p>
         </p:txBody>
       </p:sp>
@@ -10597,7 +9678,7 @@
             <a:prstDash val="solid"/>
           </a:ln>
           <a:effectLst>
-            <a:outerShdw sx="100000" sy="100000" kx="0" ky="0" algn="bl" rotWithShape="0" blurRad="88900" dist="25400" dir="5400000">
+            <a:outerShdw blurRad="88900" dist="25400" dir="5400000" algn="bl" rotWithShape="0">
               <a:srgbClr val="B8C9D4">
                 <a:alpha val="22000"/>
               </a:srgbClr>
@@ -10624,7 +9705,7 @@
           </a:solidFill>
           <a:ln/>
           <a:effectLst>
-            <a:outerShdw sx="100000" sy="100000" kx="0" ky="0" algn="bl" rotWithShape="0" blurRad="88900" dist="25400" dir="5400000">
+            <a:outerShdw blurRad="88900" dist="25400" dir="5400000" algn="bl" rotWithShape="0">
               <a:srgbClr val="B8C9D4">
                 <a:alpha val="22000"/>
               </a:srgbClr>
@@ -10634,14 +9715,14 @@
       </p:sp>
       <p:pic>
         <p:nvPicPr>
-          <p:cNvPr id="9" name="Image 0" descr="icons/puzzle.png">    </p:cNvPr>
+          <p:cNvPr id="9" name="Image 0" descr="icons/puzzle.png"/>
           <p:cNvPicPr>
             <a:picLocks noChangeAspect="1"/>
           </p:cNvPicPr>
           <p:nvPr/>
         </p:nvPicPr>
         <p:blipFill>
-          <a:blip r:embed="rId1"/>
+          <a:blip r:embed="rId3"/>
           <a:stretch>
             <a:fillRect/>
           </a:stretch>
@@ -10677,7 +9758,7 @@
           <a:bodyPr wrap="square" lIns="0" tIns="0" rIns="0" bIns="0" rtlCol="0" anchor="ctr"/>
           <a:lstStyle/>
           <a:p>
-            <a:pPr indent="0" marL="0">
+            <a:pPr marL="0" indent="0">
               <a:buNone/>
             </a:pPr>
             <a:r>
@@ -10716,7 +9797,7 @@
           <a:bodyPr wrap="square" lIns="0" tIns="0" rIns="0" bIns="0" rtlCol="0" anchor="t"/>
           <a:lstStyle/>
           <a:p>
-            <a:pPr indent="0" marL="0">
+            <a:pPr marL="0" indent="0">
               <a:lnSpc>
                 <a:spcPct val="103000"/>
               </a:lnSpc>
@@ -10763,7 +9844,7 @@
             <a:prstDash val="solid"/>
           </a:ln>
           <a:effectLst>
-            <a:outerShdw sx="100000" sy="100000" kx="0" ky="0" algn="bl" rotWithShape="0" blurRad="88900" dist="25400" dir="5400000">
+            <a:outerShdw blurRad="88900" dist="25400" dir="5400000" algn="bl" rotWithShape="0">
               <a:srgbClr val="B8C9D4">
                 <a:alpha val="22000"/>
               </a:srgbClr>
@@ -10790,7 +9871,7 @@
           </a:solidFill>
           <a:ln/>
           <a:effectLst>
-            <a:outerShdw sx="100000" sy="100000" kx="0" ky="0" algn="bl" rotWithShape="0" blurRad="88900" dist="25400" dir="5400000">
+            <a:outerShdw blurRad="88900" dist="25400" dir="5400000" algn="bl" rotWithShape="0">
               <a:srgbClr val="B8C9D4">
                 <a:alpha val="22000"/>
               </a:srgbClr>
@@ -10800,14 +9881,14 @@
       </p:sp>
       <p:pic>
         <p:nvPicPr>
-          <p:cNvPr id="14" name="Image 1" descr="icons/bolt.png">    </p:cNvPr>
+          <p:cNvPr id="14" name="Image 1" descr="icons/bolt.png"/>
           <p:cNvPicPr>
             <a:picLocks noChangeAspect="1"/>
           </p:cNvPicPr>
           <p:nvPr/>
         </p:nvPicPr>
         <p:blipFill>
-          <a:blip r:embed="rId2"/>
+          <a:blip r:embed="rId4"/>
           <a:stretch>
             <a:fillRect/>
           </a:stretch>
@@ -10843,7 +9924,7 @@
           <a:bodyPr wrap="square" lIns="0" tIns="0" rIns="0" bIns="0" rtlCol="0" anchor="ctr"/>
           <a:lstStyle/>
           <a:p>
-            <a:pPr indent="0" marL="0">
+            <a:pPr marL="0" indent="0">
               <a:buNone/>
             </a:pPr>
             <a:r>
@@ -10882,7 +9963,7 @@
           <a:bodyPr wrap="square" lIns="0" tIns="0" rIns="0" bIns="0" rtlCol="0" anchor="t"/>
           <a:lstStyle/>
           <a:p>
-            <a:pPr indent="0" marL="0">
+            <a:pPr marL="0" indent="0">
               <a:lnSpc>
                 <a:spcPct val="103000"/>
               </a:lnSpc>
@@ -10929,7 +10010,7 @@
             <a:prstDash val="solid"/>
           </a:ln>
           <a:effectLst>
-            <a:outerShdw sx="100000" sy="100000" kx="0" ky="0" algn="bl" rotWithShape="0" blurRad="88900" dist="25400" dir="5400000">
+            <a:outerShdw blurRad="88900" dist="25400" dir="5400000" algn="bl" rotWithShape="0">
               <a:srgbClr val="B8C9D4">
                 <a:alpha val="22000"/>
               </a:srgbClr>
@@ -10956,7 +10037,7 @@
           </a:solidFill>
           <a:ln/>
           <a:effectLst>
-            <a:outerShdw sx="100000" sy="100000" kx="0" ky="0" algn="bl" rotWithShape="0" blurRad="88900" dist="25400" dir="5400000">
+            <a:outerShdw blurRad="88900" dist="25400" dir="5400000" algn="bl" rotWithShape="0">
               <a:srgbClr val="B8C9D4">
                 <a:alpha val="22000"/>
               </a:srgbClr>
@@ -10966,14 +10047,14 @@
       </p:sp>
       <p:pic>
         <p:nvPicPr>
-          <p:cNvPr id="19" name="Image 2" descr="icons/cloud.png">    </p:cNvPr>
+          <p:cNvPr id="19" name="Image 2" descr="icons/cloud.png"/>
           <p:cNvPicPr>
             <a:picLocks noChangeAspect="1"/>
           </p:cNvPicPr>
           <p:nvPr/>
         </p:nvPicPr>
         <p:blipFill>
-          <a:blip r:embed="rId3"/>
+          <a:blip r:embed="rId5"/>
           <a:stretch>
             <a:fillRect/>
           </a:stretch>
@@ -11009,7 +10090,7 @@
           <a:bodyPr wrap="square" lIns="0" tIns="0" rIns="0" bIns="0" rtlCol="0" anchor="ctr"/>
           <a:lstStyle/>
           <a:p>
-            <a:pPr indent="0" marL="0">
+            <a:pPr marL="0" indent="0">
               <a:buNone/>
             </a:pPr>
             <a:r>
@@ -11048,7 +10129,7 @@
           <a:bodyPr wrap="square" lIns="0" tIns="0" rIns="0" bIns="0" rtlCol="0" anchor="t"/>
           <a:lstStyle/>
           <a:p>
-            <a:pPr indent="0" marL="0">
+            <a:pPr marL="0" indent="0">
               <a:lnSpc>
                 <a:spcPct val="103000"/>
               </a:lnSpc>
@@ -11063,7 +10144,7 @@
                 <a:ea typeface="Calibri" pitchFamily="34" charset="-122"/>
                 <a:cs typeface="Calibri" pitchFamily="34" charset="-120"/>
               </a:rPr>
-              <a:t>батчи, retry и offline-очередь выдерживают нестабильное соединение</a:t>
+              <a:t>батчи, повторы и офлайн-очередь выдерживают нестабильное соединение</a:t>
             </a:r>
             <a:endParaRPr lang="en-US" sz="1150" dirty="0"/>
           </a:p>
@@ -11095,7 +10176,7 @@
             <a:prstDash val="solid"/>
           </a:ln>
           <a:effectLst>
-            <a:outerShdw sx="100000" sy="100000" kx="0" ky="0" algn="bl" rotWithShape="0" blurRad="88900" dist="25400" dir="5400000">
+            <a:outerShdw blurRad="88900" dist="25400" dir="5400000" algn="bl" rotWithShape="0">
               <a:srgbClr val="B8C9D4">
                 <a:alpha val="22000"/>
               </a:srgbClr>
@@ -11122,7 +10203,7 @@
           </a:solidFill>
           <a:ln/>
           <a:effectLst>
-            <a:outerShdw sx="100000" sy="100000" kx="0" ky="0" algn="bl" rotWithShape="0" blurRad="88900" dist="25400" dir="5400000">
+            <a:outerShdw blurRad="88900" dist="25400" dir="5400000" algn="bl" rotWithShape="0">
               <a:srgbClr val="B8C9D4">
                 <a:alpha val="22000"/>
               </a:srgbClr>
@@ -11132,14 +10213,14 @@
       </p:sp>
       <p:pic>
         <p:nvPicPr>
-          <p:cNvPr id="24" name="Image 3" descr="icons/sliders.png">    </p:cNvPr>
+          <p:cNvPr id="24" name="Image 3" descr="icons/sliders.png"/>
           <p:cNvPicPr>
             <a:picLocks noChangeAspect="1"/>
           </p:cNvPicPr>
           <p:nvPr/>
         </p:nvPicPr>
         <p:blipFill>
-          <a:blip r:embed="rId4"/>
+          <a:blip r:embed="rId6"/>
           <a:stretch>
             <a:fillRect/>
           </a:stretch>
@@ -11175,7 +10256,7 @@
           <a:bodyPr wrap="square" lIns="0" tIns="0" rIns="0" bIns="0" rtlCol="0" anchor="ctr"/>
           <a:lstStyle/>
           <a:p>
-            <a:pPr indent="0" marL="0">
+            <a:pPr marL="0" indent="0">
               <a:buNone/>
             </a:pPr>
             <a:r>
@@ -11214,7 +10295,7 @@
           <a:bodyPr wrap="square" lIns="0" tIns="0" rIns="0" bIns="0" rtlCol="0" anchor="t"/>
           <a:lstStyle/>
           <a:p>
-            <a:pPr indent="0" marL="0">
+            <a:pPr marL="0" indent="0">
               <a:lnSpc>
                 <a:spcPct val="103000"/>
               </a:lnSpc>
@@ -11261,7 +10342,7 @@
             <a:prstDash val="solid"/>
           </a:ln>
           <a:effectLst>
-            <a:outerShdw sx="100000" sy="100000" kx="0" ky="0" algn="bl" rotWithShape="0" blurRad="88900" dist="25400" dir="5400000">
+            <a:outerShdw blurRad="88900" dist="25400" dir="5400000" algn="bl" rotWithShape="0">
               <a:srgbClr val="B8C9D4">
                 <a:alpha val="22000"/>
               </a:srgbClr>
@@ -11290,7 +10371,7 @@
           <a:bodyPr wrap="square" lIns="0" tIns="0" rIns="0" bIns="0" rtlCol="0" anchor="ctr"/>
           <a:lstStyle/>
           <a:p>
-            <a:pPr indent="0" marL="0">
+            <a:pPr marL="0" indent="0">
               <a:lnSpc>
                 <a:spcPct val="100000"/>
               </a:lnSpc>
@@ -11307,12 +10388,6 @@
               </a:rPr>
               <a:t>Основа масштабируемости:  </a:t>
             </a:r>
-            <a:pPr indent="0" marL="0">
-              <a:lnSpc>
-                <a:spcPct val="100000"/>
-              </a:lnSpc>
-              <a:buNone/>
-            </a:pPr>
             <a:r>
               <a:rPr lang="en-US" sz="1300" dirty="0">
                 <a:solidFill>
@@ -11322,7 +10397,7 @@
                 <a:ea typeface="Calibri" pitchFamily="34" charset="-122"/>
                 <a:cs typeface="Calibri" pitchFamily="34" charset="-120"/>
               </a:rPr>
-              <a:t>плагин слабо связан с игрой (autoload + сигналы), вся тяжёлая логика — на сервере. Игра остаётся лёгкой и не зависит от размера проекта.</a:t>
+              <a:t>плагин слабо связан с игрой (автозагрузка + сигналы), вся тяжёлая логика — на сервере. Игра остаётся лёгкой и не зависит от размера проекта.</a:t>
             </a:r>
             <a:endParaRPr lang="en-US" sz="1300" dirty="0"/>
           </a:p>
@@ -11344,6 +10419,7 @@
         <a:solidFill>
           <a:srgbClr val="FFFFFF"/>
         </a:solidFill>
+        <a:effectLst/>
       </p:bgPr>
     </p:bg>
     <p:spTree>
@@ -11381,7 +10457,7 @@
           <a:bodyPr wrap="square" lIns="0" tIns="0" rIns="0" bIns="0" rtlCol="0" anchor="ctr"/>
           <a:lstStyle/>
           <a:p>
-            <a:pPr algn="r" indent="0" marL="0">
+            <a:pPr marL="0" indent="0" algn="r">
               <a:buNone/>
             </a:pPr>
             <a:r>
@@ -11420,11 +10496,11 @@
           <a:bodyPr wrap="square" lIns="0" tIns="0" rIns="0" bIns="0" rtlCol="0" anchor="ctr"/>
           <a:lstStyle/>
           <a:p>
-            <a:pPr indent="0" marL="0">
-              <a:buNone/>
-            </a:pPr>
-            <a:r>
-              <a:rPr lang="en-US" sz="1250" b="1" spc="250" kern="0" dirty="0">
+            <a:pPr marL="0" indent="0">
+              <a:buNone/>
+            </a:pPr>
+            <a:r>
+              <a:rPr lang="en-US" sz="1250" b="1" kern="0" spc="250" dirty="0">
                 <a:solidFill>
                   <a:srgbClr val="1F9BD8"/>
                 </a:solidFill>
@@ -11459,7 +10535,7 @@
           <a:bodyPr wrap="square" lIns="0" tIns="0" rIns="0" bIns="0" rtlCol="0" anchor="ctr"/>
           <a:lstStyle/>
           <a:p>
-            <a:pPr indent="0" marL="0">
+            <a:pPr marL="0" indent="0">
               <a:buNone/>
             </a:pPr>
             <a:r>
@@ -11474,84 +10550,6 @@
               <a:t>Заделы на будущее</a:t>
             </a:r>
             <a:endParaRPr lang="en-US" sz="3000" dirty="0"/>
-          </a:p>
-        </p:txBody>
-      </p:sp>
-      <p:sp>
-        <p:nvSpPr>
-          <p:cNvPr id="5" name="Text 3"/>
-          <p:cNvSpPr/>
-          <p:nvPr/>
-        </p:nvSpPr>
-        <p:spPr>
-          <a:xfrm>
-            <a:off x="640080" y="6437376"/>
-            <a:ext cx="7315200" cy="274320"/>
-          </a:xfrm>
-          <a:prstGeom prst="rect">
-            <a:avLst/>
-          </a:prstGeom>
-          <a:noFill/>
-          <a:ln/>
-        </p:spPr>
-        <p:txBody>
-          <a:bodyPr wrap="square" lIns="0" tIns="0" rIns="0" bIns="0" rtlCol="0" anchor="ctr"/>
-          <a:lstStyle/>
-          <a:p>
-            <a:pPr indent="0" marL="0">
-              <a:buNone/>
-            </a:pPr>
-            <a:r>
-              <a:rPr lang="en-US" sz="900" dirty="0">
-                <a:solidFill>
-                  <a:srgbClr val="6B7480"/>
-                </a:solidFill>
-                <a:latin typeface="Calibri" pitchFamily="34" charset="0"/>
-                <a:ea typeface="Calibri" pitchFamily="34" charset="-122"/>
-                <a:cs typeface="Calibri" pitchFamily="34" charset="-120"/>
-              </a:rPr>
-              <a:t>адаптивный геймплей на телеметрии</a:t>
-            </a:r>
-            <a:endParaRPr lang="en-US" sz="900" dirty="0"/>
-          </a:p>
-        </p:txBody>
-      </p:sp>
-      <p:sp>
-        <p:nvSpPr>
-          <p:cNvPr id="6" name="Text 4"/>
-          <p:cNvSpPr/>
-          <p:nvPr/>
-        </p:nvSpPr>
-        <p:spPr>
-          <a:xfrm>
-            <a:off x="10728655" y="6437376"/>
-            <a:ext cx="822960" cy="274320"/>
-          </a:xfrm>
-          <a:prstGeom prst="rect">
-            <a:avLst/>
-          </a:prstGeom>
-          <a:noFill/>
-          <a:ln/>
-        </p:spPr>
-        <p:txBody>
-          <a:bodyPr wrap="square" lIns="0" tIns="0" rIns="0" bIns="0" rtlCol="0" anchor="ctr"/>
-          <a:lstStyle/>
-          <a:p>
-            <a:pPr algn="r" indent="0" marL="0">
-              <a:buNone/>
-            </a:pPr>
-            <a:r>
-              <a:rPr lang="en-US" sz="900" dirty="0">
-                <a:solidFill>
-                  <a:srgbClr val="6B7480"/>
-                </a:solidFill>
-                <a:latin typeface="Calibri" pitchFamily="34" charset="0"/>
-                <a:ea typeface="Calibri" pitchFamily="34" charset="-122"/>
-                <a:cs typeface="Calibri" pitchFamily="34" charset="-120"/>
-              </a:rPr>
-              <a:t>9 / 10</a:t>
-            </a:r>
-            <a:endParaRPr lang="en-US" sz="900" dirty="0"/>
           </a:p>
         </p:txBody>
       </p:sp>
@@ -11601,7 +10599,7 @@
           </a:solidFill>
           <a:ln/>
           <a:effectLst>
-            <a:outerShdw sx="100000" sy="100000" kx="0" ky="0" algn="bl" rotWithShape="0" blurRad="88900" dist="25400" dir="5400000">
+            <a:outerShdw blurRad="88900" dist="25400" dir="5400000" algn="bl" rotWithShape="0">
               <a:srgbClr val="B8C9D4">
                 <a:alpha val="22000"/>
               </a:srgbClr>
@@ -11611,325 +10609,7 @@
       </p:sp>
       <p:pic>
         <p:nvPicPr>
-          <p:cNvPr id="9" name="Image 0" descr="icons/store.png">    </p:cNvPr>
-          <p:cNvPicPr>
-            <a:picLocks noChangeAspect="1"/>
-          </p:cNvPicPr>
-          <p:nvPr/>
-        </p:nvPicPr>
-        <p:blipFill>
-          <a:blip r:embed="rId1"/>
-          <a:stretch>
-            <a:fillRect/>
-          </a:stretch>
-        </p:blipFill>
-        <p:spPr>
-          <a:xfrm>
-            <a:off x="1029614" y="2209190"/>
-            <a:ext cx="226771" cy="226771"/>
-          </a:xfrm>
-          <a:prstGeom prst="rect">
-            <a:avLst/>
-          </a:prstGeom>
-        </p:spPr>
-      </p:pic>
-      <p:sp>
-        <p:nvSpPr>
-          <p:cNvPr id="10" name="Text 7"/>
-          <p:cNvSpPr/>
-          <p:nvPr/>
-        </p:nvSpPr>
-        <p:spPr>
-          <a:xfrm>
-            <a:off x="1664208" y="1947672"/>
-            <a:ext cx="4023360" cy="365760"/>
-          </a:xfrm>
-          <a:prstGeom prst="rect">
-            <a:avLst/>
-          </a:prstGeom>
-          <a:noFill/>
-          <a:ln/>
-        </p:spPr>
-        <p:txBody>
-          <a:bodyPr wrap="square" lIns="0" tIns="0" rIns="0" bIns="0" rtlCol="0" anchor="ctr"/>
-          <a:lstStyle/>
-          <a:p>
-            <a:pPr indent="0" marL="0">
-              <a:buNone/>
-            </a:pPr>
-            <a:r>
-              <a:rPr lang="en-US" sz="1450" b="1" dirty="0">
-                <a:solidFill>
-                  <a:srgbClr val="111418"/>
-                </a:solidFill>
-                <a:latin typeface="Calibri" pitchFamily="34" charset="0"/>
-                <a:ea typeface="Calibri" pitchFamily="34" charset="-122"/>
-                <a:cs typeface="Calibri" pitchFamily="34" charset="-120"/>
-              </a:rPr>
-              <a:t>Публикация в Asset Library</a:t>
-            </a:r>
-            <a:endParaRPr lang="en-US" sz="1450" dirty="0"/>
-          </a:p>
-        </p:txBody>
-      </p:sp>
-      <p:sp>
-        <p:nvSpPr>
-          <p:cNvPr id="11" name="Text 8"/>
-          <p:cNvSpPr/>
-          <p:nvPr/>
-        </p:nvSpPr>
-        <p:spPr>
-          <a:xfrm>
-            <a:off x="1664208" y="2313432"/>
-            <a:ext cx="4023360" cy="502920"/>
-          </a:xfrm>
-          <a:prstGeom prst="rect">
-            <a:avLst/>
-          </a:prstGeom>
-          <a:noFill/>
-          <a:ln/>
-        </p:spPr>
-        <p:txBody>
-          <a:bodyPr wrap="square" lIns="0" tIns="0" rIns="0" bIns="0" rtlCol="0" anchor="t"/>
-          <a:lstStyle/>
-          <a:p>
-            <a:pPr indent="0" marL="0">
-              <a:lnSpc>
-                <a:spcPct val="100000"/>
-              </a:lnSpc>
-              <a:buNone/>
-            </a:pPr>
-            <a:r>
-              <a:rPr lang="en-US" sz="1150" dirty="0">
-                <a:solidFill>
-                  <a:srgbClr val="33383F"/>
-                </a:solidFill>
-                <a:latin typeface="Calibri" pitchFamily="34" charset="0"/>
-                <a:ea typeface="Calibri" pitchFamily="34" charset="-122"/>
-                <a:cs typeface="Calibri" pitchFamily="34" charset="-120"/>
-              </a:rPr>
-              <a:t>оформление аддона для официального магазина ассетов Godot</a:t>
-            </a:r>
-            <a:endParaRPr lang="en-US" sz="1150" dirty="0"/>
-          </a:p>
-        </p:txBody>
-      </p:sp>
-      <p:sp>
-        <p:nvSpPr>
-          <p:cNvPr id="12" name="Shape 9"/>
-          <p:cNvSpPr/>
-          <p:nvPr/>
-        </p:nvSpPr>
-        <p:spPr>
-          <a:xfrm>
-            <a:off x="640080" y="3063240"/>
-            <a:ext cx="5212080" cy="1078992"/>
-          </a:xfrm>
-          <a:prstGeom prst="roundRect">
-            <a:avLst>
-              <a:gd name="adj" fmla="val 6780"/>
-            </a:avLst>
-          </a:prstGeom>
-          <a:solidFill>
-            <a:srgbClr val="F4FAFD"/>
-          </a:solidFill>
-          <a:ln w="12700">
-            <a:solidFill>
-              <a:srgbClr val="DCE6EC"/>
-            </a:solidFill>
-            <a:prstDash val="solid"/>
-          </a:ln>
-        </p:spPr>
-      </p:sp>
-      <p:sp>
-        <p:nvSpPr>
-          <p:cNvPr id="13" name="Shape 10"/>
-          <p:cNvSpPr/>
-          <p:nvPr/>
-        </p:nvSpPr>
-        <p:spPr>
-          <a:xfrm>
-            <a:off x="859536" y="3319272"/>
-            <a:ext cx="566928" cy="566928"/>
-          </a:xfrm>
-          <a:prstGeom prst="ellipse">
-            <a:avLst/>
-          </a:prstGeom>
-          <a:solidFill>
-            <a:srgbClr val="1F9BD8"/>
-          </a:solidFill>
-          <a:ln/>
-          <a:effectLst>
-            <a:outerShdw sx="100000" sy="100000" kx="0" ky="0" algn="bl" rotWithShape="0" blurRad="88900" dist="25400" dir="5400000">
-              <a:srgbClr val="B8C9D4">
-                <a:alpha val="22000"/>
-              </a:srgbClr>
-            </a:outerShdw>
-          </a:effectLst>
-        </p:spPr>
-      </p:sp>
-      <p:pic>
-        <p:nvPicPr>
-          <p:cNvPr id="14" name="Image 1" descr="icons/sliders.png">    </p:cNvPr>
-          <p:cNvPicPr>
-            <a:picLocks noChangeAspect="1"/>
-          </p:cNvPicPr>
-          <p:nvPr/>
-        </p:nvPicPr>
-        <p:blipFill>
-          <a:blip r:embed="rId2"/>
-          <a:stretch>
-            <a:fillRect/>
-          </a:stretch>
-        </p:blipFill>
-        <p:spPr>
-          <a:xfrm>
-            <a:off x="1029614" y="3489350"/>
-            <a:ext cx="226771" cy="226771"/>
-          </a:xfrm>
-          <a:prstGeom prst="rect">
-            <a:avLst/>
-          </a:prstGeom>
-        </p:spPr>
-      </p:pic>
-      <p:sp>
-        <p:nvSpPr>
-          <p:cNvPr id="15" name="Text 11"/>
-          <p:cNvSpPr/>
-          <p:nvPr/>
-        </p:nvSpPr>
-        <p:spPr>
-          <a:xfrm>
-            <a:off x="1664208" y="3227832"/>
-            <a:ext cx="4023360" cy="365760"/>
-          </a:xfrm>
-          <a:prstGeom prst="rect">
-            <a:avLst/>
-          </a:prstGeom>
-          <a:noFill/>
-          <a:ln/>
-        </p:spPr>
-        <p:txBody>
-          <a:bodyPr wrap="square" lIns="0" tIns="0" rIns="0" bIns="0" rtlCol="0" anchor="ctr"/>
-          <a:lstStyle/>
-          <a:p>
-            <a:pPr indent="0" marL="0">
-              <a:buNone/>
-            </a:pPr>
-            <a:r>
-              <a:rPr lang="en-US" sz="1450" b="1" dirty="0">
-                <a:solidFill>
-                  <a:srgbClr val="111418"/>
-                </a:solidFill>
-                <a:latin typeface="Calibri" pitchFamily="34" charset="0"/>
-                <a:ea typeface="Calibri" pitchFamily="34" charset="-122"/>
-                <a:cs typeface="Calibri" pitchFamily="34" charset="-120"/>
-              </a:rPr>
-              <a:t>Расширение панели</a:t>
-            </a:r>
-            <a:endParaRPr lang="en-US" sz="1450" dirty="0"/>
-          </a:p>
-        </p:txBody>
-      </p:sp>
-      <p:sp>
-        <p:nvSpPr>
-          <p:cNvPr id="16" name="Text 12"/>
-          <p:cNvSpPr/>
-          <p:nvPr/>
-        </p:nvSpPr>
-        <p:spPr>
-          <a:xfrm>
-            <a:off x="1664208" y="3593592"/>
-            <a:ext cx="4023360" cy="502920"/>
-          </a:xfrm>
-          <a:prstGeom prst="rect">
-            <a:avLst/>
-          </a:prstGeom>
-          <a:noFill/>
-          <a:ln/>
-        </p:spPr>
-        <p:txBody>
-          <a:bodyPr wrap="square" lIns="0" tIns="0" rIns="0" bIns="0" rtlCol="0" anchor="t"/>
-          <a:lstStyle/>
-          <a:p>
-            <a:pPr indent="0" marL="0">
-              <a:lnSpc>
-                <a:spcPct val="100000"/>
-              </a:lnSpc>
-              <a:buNone/>
-            </a:pPr>
-            <a:r>
-              <a:rPr lang="en-US" sz="1150" dirty="0">
-                <a:solidFill>
-                  <a:srgbClr val="33383F"/>
-                </a:solidFill>
-                <a:latin typeface="Calibri" pitchFamily="34" charset="0"/>
-                <a:ea typeface="Calibri" pitchFamily="34" charset="-122"/>
-                <a:cs typeface="Calibri" pitchFamily="34" charset="-120"/>
-              </a:rPr>
-              <a:t>визуализация воронок событий и истории адаптаций в редакторе</a:t>
-            </a:r>
-            <a:endParaRPr lang="en-US" sz="1150" dirty="0"/>
-          </a:p>
-        </p:txBody>
-      </p:sp>
-      <p:sp>
-        <p:nvSpPr>
-          <p:cNvPr id="17" name="Shape 13"/>
-          <p:cNvSpPr/>
-          <p:nvPr/>
-        </p:nvSpPr>
-        <p:spPr>
-          <a:xfrm>
-            <a:off x="640080" y="4343400"/>
-            <a:ext cx="5212080" cy="1078992"/>
-          </a:xfrm>
-          <a:prstGeom prst="roundRect">
-            <a:avLst>
-              <a:gd name="adj" fmla="val 6780"/>
-            </a:avLst>
-          </a:prstGeom>
-          <a:solidFill>
-            <a:srgbClr val="F4FAFD"/>
-          </a:solidFill>
-          <a:ln w="12700">
-            <a:solidFill>
-              <a:srgbClr val="DCE6EC"/>
-            </a:solidFill>
-            <a:prstDash val="solid"/>
-          </a:ln>
-        </p:spPr>
-      </p:sp>
-      <p:sp>
-        <p:nvSpPr>
-          <p:cNvPr id="18" name="Shape 14"/>
-          <p:cNvSpPr/>
-          <p:nvPr/>
-        </p:nvSpPr>
-        <p:spPr>
-          <a:xfrm>
-            <a:off x="859536" y="4599432"/>
-            <a:ext cx="566928" cy="566928"/>
-          </a:xfrm>
-          <a:prstGeom prst="ellipse">
-            <a:avLst/>
-          </a:prstGeom>
-          <a:solidFill>
-            <a:srgbClr val="1F9BD8"/>
-          </a:solidFill>
-          <a:ln/>
-          <a:effectLst>
-            <a:outerShdw sx="100000" sy="100000" kx="0" ky="0" algn="bl" rotWithShape="0" blurRad="88900" dist="25400" dir="5400000">
-              <a:srgbClr val="B8C9D4">
-                <a:alpha val="22000"/>
-              </a:srgbClr>
-            </a:outerShdw>
-          </a:effectLst>
-        </p:spPr>
-      </p:sp>
-      <p:pic>
-        <p:nvPicPr>
-          <p:cNvPr id="19" name="Image 2" descr="icons/check.png">    </p:cNvPr>
+          <p:cNvPr id="9" name="Image 0" descr="icons/store.png"/>
           <p:cNvPicPr>
             <a:picLocks noChangeAspect="1"/>
           </p:cNvPicPr>
@@ -11943,7 +10623,7 @@
         </p:blipFill>
         <p:spPr>
           <a:xfrm>
-            <a:off x="1029614" y="4769510"/>
+            <a:off x="1029614" y="2209190"/>
             <a:ext cx="226771" cy="226771"/>
           </a:xfrm>
           <a:prstGeom prst="rect">
@@ -11953,13 +10633,13 @@
       </p:pic>
       <p:sp>
         <p:nvSpPr>
-          <p:cNvPr id="20" name="Text 15"/>
-          <p:cNvSpPr/>
-          <p:nvPr/>
-        </p:nvSpPr>
-        <p:spPr>
-          <a:xfrm>
-            <a:off x="1664208" y="4507992"/>
+          <p:cNvPr id="10" name="Text 7"/>
+          <p:cNvSpPr/>
+          <p:nvPr/>
+        </p:nvSpPr>
+        <p:spPr>
+          <a:xfrm>
+            <a:off x="1664208" y="1947672"/>
             <a:ext cx="4023360" cy="365760"/>
           </a:xfrm>
           <a:prstGeom prst="rect">
@@ -11972,7 +10652,7 @@
           <a:bodyPr wrap="square" lIns="0" tIns="0" rIns="0" bIns="0" rtlCol="0" anchor="ctr"/>
           <a:lstStyle/>
           <a:p>
-            <a:pPr indent="0" marL="0">
+            <a:pPr marL="0" indent="0">
               <a:buNone/>
             </a:pPr>
             <a:r>
@@ -11984,7 +10664,7 @@
                 <a:ea typeface="Calibri" pitchFamily="34" charset="-122"/>
                 <a:cs typeface="Calibri" pitchFamily="34" charset="-120"/>
               </a:rPr>
-              <a:t>Авто-тесты интеграции</a:t>
+              <a:t>Публикация в Asset Library</a:t>
             </a:r>
             <a:endParaRPr lang="en-US" sz="1450" dirty="0"/>
           </a:p>
@@ -11992,13 +10672,13 @@
       </p:sp>
       <p:sp>
         <p:nvSpPr>
-          <p:cNvPr id="21" name="Text 16"/>
-          <p:cNvSpPr/>
-          <p:nvPr/>
-        </p:nvSpPr>
-        <p:spPr>
-          <a:xfrm>
-            <a:off x="1664208" y="4873752"/>
+          <p:cNvPr id="11" name="Text 8"/>
+          <p:cNvSpPr/>
+          <p:nvPr/>
+        </p:nvSpPr>
+        <p:spPr>
+          <a:xfrm>
+            <a:off x="1664208" y="2313432"/>
             <a:ext cx="4023360" cy="502920"/>
           </a:xfrm>
           <a:prstGeom prst="rect">
@@ -12011,7 +10691,7 @@
           <a:bodyPr wrap="square" lIns="0" tIns="0" rIns="0" bIns="0" rtlCol="0" anchor="t"/>
           <a:lstStyle/>
           <a:p>
-            <a:pPr indent="0" marL="0">
+            <a:pPr marL="0" indent="0">
               <a:lnSpc>
                 <a:spcPct val="100000"/>
               </a:lnSpc>
@@ -12026,7 +10706,7 @@
                 <a:ea typeface="Calibri" pitchFamily="34" charset="-122"/>
                 <a:cs typeface="Calibri" pitchFamily="34" charset="-120"/>
               </a:rPr>
-              <a:t>E2E-чеклист test_integration.gd как регрессионная проверка</a:t>
+              <a:t>оформление аддона для официального магазина ассетов Godot</a:t>
             </a:r>
             <a:endParaRPr lang="en-US" sz="1150" dirty="0"/>
           </a:p>
@@ -12034,97 +10714,61 @@
       </p:sp>
       <p:sp>
         <p:nvSpPr>
-          <p:cNvPr id="22" name="Shape 17"/>
-          <p:cNvSpPr/>
-          <p:nvPr/>
-        </p:nvSpPr>
-        <p:spPr>
-          <a:xfrm>
-            <a:off x="6766560" y="1783080"/>
-            <a:ext cx="4785055" cy="4160520"/>
+          <p:cNvPr id="12" name="Shape 9"/>
+          <p:cNvSpPr/>
+          <p:nvPr/>
+        </p:nvSpPr>
+        <p:spPr>
+          <a:xfrm>
+            <a:off x="640080" y="3063240"/>
+            <a:ext cx="5212080" cy="1078992"/>
           </a:xfrm>
           <a:prstGeom prst="roundRect">
             <a:avLst>
-              <a:gd name="adj" fmla="val 2198"/>
+              <a:gd name="adj" fmla="val 6780"/>
             </a:avLst>
           </a:prstGeom>
           <a:solidFill>
-            <a:srgbClr val="0B5E88"/>
+            <a:srgbClr val="F4FAFD"/>
+          </a:solidFill>
+          <a:ln w="12700">
+            <a:solidFill>
+              <a:srgbClr val="DCE6EC"/>
+            </a:solidFill>
+            <a:prstDash val="solid"/>
+          </a:ln>
+        </p:spPr>
+      </p:sp>
+      <p:sp>
+        <p:nvSpPr>
+          <p:cNvPr id="13" name="Shape 10"/>
+          <p:cNvSpPr/>
+          <p:nvPr/>
+        </p:nvSpPr>
+        <p:spPr>
+          <a:xfrm>
+            <a:off x="859536" y="3319272"/>
+            <a:ext cx="566928" cy="566928"/>
+          </a:xfrm>
+          <a:prstGeom prst="ellipse">
+            <a:avLst/>
+          </a:prstGeom>
+          <a:solidFill>
+            <a:srgbClr val="1F9BD8"/>
           </a:solidFill>
           <a:ln/>
           <a:effectLst>
-            <a:outerShdw sx="100000" sy="100000" kx="0" ky="0" algn="bl" rotWithShape="0" blurRad="114300" dist="38100" dir="5400000">
-              <a:srgbClr val="9FB6C4">
-                <a:alpha val="28000"/>
+            <a:outerShdw blurRad="88900" dist="25400" dir="5400000" algn="bl" rotWithShape="0">
+              <a:srgbClr val="B8C9D4">
+                <a:alpha val="22000"/>
               </a:srgbClr>
             </a:outerShdw>
           </a:effectLst>
         </p:spPr>
       </p:sp>
-      <p:sp>
-        <p:nvSpPr>
-          <p:cNvPr id="23" name="Text 18"/>
-          <p:cNvSpPr/>
-          <p:nvPr/>
-        </p:nvSpPr>
-        <p:spPr>
-          <a:xfrm>
-            <a:off x="6766560" y="2057400"/>
-            <a:ext cx="4785055" cy="274320"/>
-          </a:xfrm>
-          <a:prstGeom prst="rect">
-            <a:avLst/>
-          </a:prstGeom>
-          <a:noFill/>
-          <a:ln/>
-        </p:spPr>
-        <p:txBody>
-          <a:bodyPr wrap="square" lIns="0" tIns="0" rIns="0" bIns="0" rtlCol="0" anchor="ctr"/>
-          <a:lstStyle/>
-          <a:p>
-            <a:pPr algn="ctr" indent="0" marL="0">
-              <a:buNone/>
-            </a:pPr>
-            <a:r>
-              <a:rPr lang="en-US" sz="1200" b="1" spc="200" kern="0" dirty="0">
-                <a:solidFill>
-                  <a:srgbClr val="8FD0EE"/>
-                </a:solidFill>
-                <a:latin typeface="Calibri" pitchFamily="34" charset="0"/>
-                <a:ea typeface="Calibri" pitchFamily="34" charset="-122"/>
-                <a:cs typeface="Calibri" pitchFamily="34" charset="-120"/>
-              </a:rPr>
-              <a:t>РЕПОЗИТОРИЙ ПРОЕКТА</a:t>
-            </a:r>
-            <a:endParaRPr lang="en-US" sz="1200" dirty="0"/>
-          </a:p>
-        </p:txBody>
-      </p:sp>
-      <p:sp>
-        <p:nvSpPr>
-          <p:cNvPr id="24" name="Shape 19"/>
-          <p:cNvSpPr/>
-          <p:nvPr/>
-        </p:nvSpPr>
-        <p:spPr>
-          <a:xfrm>
-            <a:off x="7924648" y="2468880"/>
-            <a:ext cx="2468880" cy="2468880"/>
-          </a:xfrm>
-          <a:prstGeom prst="roundRect">
-            <a:avLst>
-              <a:gd name="adj" fmla="val 2963"/>
-            </a:avLst>
-          </a:prstGeom>
-          <a:solidFill>
-            <a:srgbClr val="FFFFFF"/>
-          </a:solidFill>
-          <a:ln/>
-        </p:spPr>
-      </p:sp>
       <p:pic>
         <p:nvPicPr>
-          <p:cNvPr id="25" name="Image 3" descr="qr_git.png">    </p:cNvPr>
+          <p:cNvPr id="14" name="Image 1" descr="icons/sliders.png"/>
           <p:cNvPicPr>
             <a:picLocks noChangeAspect="1"/>
           </p:cNvPicPr>
@@ -12138,6 +10782,360 @@
         </p:blipFill>
         <p:spPr>
           <a:xfrm>
+            <a:off x="1029614" y="3489350"/>
+            <a:ext cx="226771" cy="226771"/>
+          </a:xfrm>
+          <a:prstGeom prst="rect">
+            <a:avLst/>
+          </a:prstGeom>
+        </p:spPr>
+      </p:pic>
+      <p:sp>
+        <p:nvSpPr>
+          <p:cNvPr id="15" name="Text 11"/>
+          <p:cNvSpPr/>
+          <p:nvPr/>
+        </p:nvSpPr>
+        <p:spPr>
+          <a:xfrm>
+            <a:off x="1664208" y="3227832"/>
+            <a:ext cx="4023360" cy="365760"/>
+          </a:xfrm>
+          <a:prstGeom prst="rect">
+            <a:avLst/>
+          </a:prstGeom>
+          <a:noFill/>
+          <a:ln/>
+        </p:spPr>
+        <p:txBody>
+          <a:bodyPr wrap="square" lIns="0" tIns="0" rIns="0" bIns="0" rtlCol="0" anchor="ctr"/>
+          <a:lstStyle/>
+          <a:p>
+            <a:pPr marL="0" indent="0">
+              <a:buNone/>
+            </a:pPr>
+            <a:r>
+              <a:rPr lang="en-US" sz="1450" b="1" dirty="0">
+                <a:solidFill>
+                  <a:srgbClr val="111418"/>
+                </a:solidFill>
+                <a:latin typeface="Calibri" pitchFamily="34" charset="0"/>
+                <a:ea typeface="Calibri" pitchFamily="34" charset="-122"/>
+                <a:cs typeface="Calibri" pitchFamily="34" charset="-120"/>
+              </a:rPr>
+              <a:t>Расширение панели</a:t>
+            </a:r>
+            <a:endParaRPr lang="en-US" sz="1450" dirty="0"/>
+          </a:p>
+        </p:txBody>
+      </p:sp>
+      <p:sp>
+        <p:nvSpPr>
+          <p:cNvPr id="16" name="Text 12"/>
+          <p:cNvSpPr/>
+          <p:nvPr/>
+        </p:nvSpPr>
+        <p:spPr>
+          <a:xfrm>
+            <a:off x="1664208" y="3593592"/>
+            <a:ext cx="4023360" cy="502920"/>
+          </a:xfrm>
+          <a:prstGeom prst="rect">
+            <a:avLst/>
+          </a:prstGeom>
+          <a:noFill/>
+          <a:ln/>
+        </p:spPr>
+        <p:txBody>
+          <a:bodyPr wrap="square" lIns="0" tIns="0" rIns="0" bIns="0" rtlCol="0" anchor="t"/>
+          <a:lstStyle/>
+          <a:p>
+            <a:pPr marL="0" indent="0">
+              <a:lnSpc>
+                <a:spcPct val="100000"/>
+              </a:lnSpc>
+              <a:buNone/>
+            </a:pPr>
+            <a:r>
+              <a:rPr lang="en-US" sz="1150" dirty="0">
+                <a:solidFill>
+                  <a:srgbClr val="33383F"/>
+                </a:solidFill>
+                <a:latin typeface="Calibri" pitchFamily="34" charset="0"/>
+                <a:ea typeface="Calibri" pitchFamily="34" charset="-122"/>
+                <a:cs typeface="Calibri" pitchFamily="34" charset="-120"/>
+              </a:rPr>
+              <a:t>визуализация воронок событий и истории адаптаций в редакторе</a:t>
+            </a:r>
+            <a:endParaRPr lang="en-US" sz="1150" dirty="0"/>
+          </a:p>
+        </p:txBody>
+      </p:sp>
+      <p:sp>
+        <p:nvSpPr>
+          <p:cNvPr id="17" name="Shape 13"/>
+          <p:cNvSpPr/>
+          <p:nvPr/>
+        </p:nvSpPr>
+        <p:spPr>
+          <a:xfrm>
+            <a:off x="640080" y="4343400"/>
+            <a:ext cx="5212080" cy="1078992"/>
+          </a:xfrm>
+          <a:prstGeom prst="roundRect">
+            <a:avLst>
+              <a:gd name="adj" fmla="val 6780"/>
+            </a:avLst>
+          </a:prstGeom>
+          <a:solidFill>
+            <a:srgbClr val="F4FAFD"/>
+          </a:solidFill>
+          <a:ln w="12700">
+            <a:solidFill>
+              <a:srgbClr val="DCE6EC"/>
+            </a:solidFill>
+            <a:prstDash val="solid"/>
+          </a:ln>
+        </p:spPr>
+      </p:sp>
+      <p:sp>
+        <p:nvSpPr>
+          <p:cNvPr id="18" name="Shape 14"/>
+          <p:cNvSpPr/>
+          <p:nvPr/>
+        </p:nvSpPr>
+        <p:spPr>
+          <a:xfrm>
+            <a:off x="859536" y="4599432"/>
+            <a:ext cx="566928" cy="566928"/>
+          </a:xfrm>
+          <a:prstGeom prst="ellipse">
+            <a:avLst/>
+          </a:prstGeom>
+          <a:solidFill>
+            <a:srgbClr val="1F9BD8"/>
+          </a:solidFill>
+          <a:ln/>
+          <a:effectLst>
+            <a:outerShdw blurRad="88900" dist="25400" dir="5400000" algn="bl" rotWithShape="0">
+              <a:srgbClr val="B8C9D4">
+                <a:alpha val="22000"/>
+              </a:srgbClr>
+            </a:outerShdw>
+          </a:effectLst>
+        </p:spPr>
+      </p:sp>
+      <p:pic>
+        <p:nvPicPr>
+          <p:cNvPr id="19" name="Image 2" descr="icons/check.png"/>
+          <p:cNvPicPr>
+            <a:picLocks noChangeAspect="1"/>
+          </p:cNvPicPr>
+          <p:nvPr/>
+        </p:nvPicPr>
+        <p:blipFill>
+          <a:blip r:embed="rId5"/>
+          <a:stretch>
+            <a:fillRect/>
+          </a:stretch>
+        </p:blipFill>
+        <p:spPr>
+          <a:xfrm>
+            <a:off x="1029614" y="4769510"/>
+            <a:ext cx="226771" cy="226771"/>
+          </a:xfrm>
+          <a:prstGeom prst="rect">
+            <a:avLst/>
+          </a:prstGeom>
+        </p:spPr>
+      </p:pic>
+      <p:sp>
+        <p:nvSpPr>
+          <p:cNvPr id="20" name="Text 15"/>
+          <p:cNvSpPr/>
+          <p:nvPr/>
+        </p:nvSpPr>
+        <p:spPr>
+          <a:xfrm>
+            <a:off x="1664208" y="4507992"/>
+            <a:ext cx="4023360" cy="365760"/>
+          </a:xfrm>
+          <a:prstGeom prst="rect">
+            <a:avLst/>
+          </a:prstGeom>
+          <a:noFill/>
+          <a:ln/>
+        </p:spPr>
+        <p:txBody>
+          <a:bodyPr wrap="square" lIns="0" tIns="0" rIns="0" bIns="0" rtlCol="0" anchor="ctr"/>
+          <a:lstStyle/>
+          <a:p>
+            <a:pPr marL="0" indent="0">
+              <a:buNone/>
+            </a:pPr>
+            <a:r>
+              <a:rPr lang="en-US" sz="1450" b="1" dirty="0">
+                <a:solidFill>
+                  <a:srgbClr val="111418"/>
+                </a:solidFill>
+                <a:latin typeface="Calibri" pitchFamily="34" charset="0"/>
+                <a:ea typeface="Calibri" pitchFamily="34" charset="-122"/>
+                <a:cs typeface="Calibri" pitchFamily="34" charset="-120"/>
+              </a:rPr>
+              <a:t>Авто-тесты интеграции</a:t>
+            </a:r>
+            <a:endParaRPr lang="en-US" sz="1450" dirty="0"/>
+          </a:p>
+        </p:txBody>
+      </p:sp>
+      <p:sp>
+        <p:nvSpPr>
+          <p:cNvPr id="21" name="Text 16"/>
+          <p:cNvSpPr/>
+          <p:nvPr/>
+        </p:nvSpPr>
+        <p:spPr>
+          <a:xfrm>
+            <a:off x="1664208" y="4873752"/>
+            <a:ext cx="4023360" cy="502920"/>
+          </a:xfrm>
+          <a:prstGeom prst="rect">
+            <a:avLst/>
+          </a:prstGeom>
+          <a:noFill/>
+          <a:ln/>
+        </p:spPr>
+        <p:txBody>
+          <a:bodyPr wrap="square" lIns="0" tIns="0" rIns="0" bIns="0" rtlCol="0" anchor="t"/>
+          <a:lstStyle/>
+          <a:p>
+            <a:pPr marL="0" indent="0">
+              <a:lnSpc>
+                <a:spcPct val="100000"/>
+              </a:lnSpc>
+              <a:buNone/>
+            </a:pPr>
+            <a:r>
+              <a:rPr lang="en-US" sz="1150" dirty="0">
+                <a:solidFill>
+                  <a:srgbClr val="33383F"/>
+                </a:solidFill>
+                <a:latin typeface="Calibri" pitchFamily="34" charset="0"/>
+                <a:ea typeface="Calibri" pitchFamily="34" charset="-122"/>
+                <a:cs typeface="Calibri" pitchFamily="34" charset="-120"/>
+              </a:rPr>
+              <a:t>Сквозной чек-лист test_integration.gd как регрессионная проверка</a:t>
+            </a:r>
+            <a:endParaRPr lang="en-US" sz="1150" dirty="0"/>
+          </a:p>
+        </p:txBody>
+      </p:sp>
+      <p:sp>
+        <p:nvSpPr>
+          <p:cNvPr id="22" name="Shape 17"/>
+          <p:cNvSpPr/>
+          <p:nvPr/>
+        </p:nvSpPr>
+        <p:spPr>
+          <a:xfrm>
+            <a:off x="6766560" y="1783080"/>
+            <a:ext cx="4785055" cy="4160520"/>
+          </a:xfrm>
+          <a:prstGeom prst="roundRect">
+            <a:avLst>
+              <a:gd name="adj" fmla="val 2198"/>
+            </a:avLst>
+          </a:prstGeom>
+          <a:solidFill>
+            <a:srgbClr val="0B5E88"/>
+          </a:solidFill>
+          <a:ln/>
+          <a:effectLst>
+            <a:outerShdw blurRad="114300" dist="38100" dir="5400000" algn="bl" rotWithShape="0">
+              <a:srgbClr val="9FB6C4">
+                <a:alpha val="28000"/>
+              </a:srgbClr>
+            </a:outerShdw>
+          </a:effectLst>
+        </p:spPr>
+      </p:sp>
+      <p:sp>
+        <p:nvSpPr>
+          <p:cNvPr id="23" name="Text 18"/>
+          <p:cNvSpPr/>
+          <p:nvPr/>
+        </p:nvSpPr>
+        <p:spPr>
+          <a:xfrm>
+            <a:off x="6766560" y="2057400"/>
+            <a:ext cx="4785055" cy="274320"/>
+          </a:xfrm>
+          <a:prstGeom prst="rect">
+            <a:avLst/>
+          </a:prstGeom>
+          <a:noFill/>
+          <a:ln/>
+        </p:spPr>
+        <p:txBody>
+          <a:bodyPr wrap="square" lIns="0" tIns="0" rIns="0" bIns="0" rtlCol="0" anchor="ctr"/>
+          <a:lstStyle/>
+          <a:p>
+            <a:pPr marL="0" indent="0" algn="ctr">
+              <a:buNone/>
+            </a:pPr>
+            <a:r>
+              <a:rPr lang="en-US" sz="1200" b="1" kern="0" spc="200" dirty="0">
+                <a:solidFill>
+                  <a:srgbClr val="8FD0EE"/>
+                </a:solidFill>
+                <a:latin typeface="Calibri" pitchFamily="34" charset="0"/>
+                <a:ea typeface="Calibri" pitchFamily="34" charset="-122"/>
+                <a:cs typeface="Calibri" pitchFamily="34" charset="-120"/>
+              </a:rPr>
+              <a:t>РЕПОЗИТОРИЙ ПРОЕКТА</a:t>
+            </a:r>
+            <a:endParaRPr lang="en-US" sz="1200" dirty="0"/>
+          </a:p>
+        </p:txBody>
+      </p:sp>
+      <p:sp>
+        <p:nvSpPr>
+          <p:cNvPr id="24" name="Shape 19"/>
+          <p:cNvSpPr/>
+          <p:nvPr/>
+        </p:nvSpPr>
+        <p:spPr>
+          <a:xfrm>
+            <a:off x="7924648" y="2468880"/>
+            <a:ext cx="2468880" cy="2468880"/>
+          </a:xfrm>
+          <a:prstGeom prst="roundRect">
+            <a:avLst>
+              <a:gd name="adj" fmla="val 2963"/>
+            </a:avLst>
+          </a:prstGeom>
+          <a:solidFill>
+            <a:srgbClr val="FFFFFF"/>
+          </a:solidFill>
+          <a:ln/>
+        </p:spPr>
+      </p:sp>
+      <p:pic>
+        <p:nvPicPr>
+          <p:cNvPr id="25" name="Image 3" descr="qr_git.png"/>
+          <p:cNvPicPr>
+            <a:picLocks noChangeAspect="1"/>
+          </p:cNvPicPr>
+          <p:nvPr/>
+        </p:nvPicPr>
+        <p:blipFill>
+          <a:blip r:embed="rId6"/>
+          <a:stretch>
+            <a:fillRect/>
+          </a:stretch>
+        </p:blipFill>
+        <p:spPr>
+          <a:xfrm>
             <a:off x="8070952" y="2615184"/>
             <a:ext cx="2176272" cy="2176272"/>
           </a:xfrm>
@@ -12167,7 +11165,7 @@
           <a:bodyPr wrap="square" lIns="0" tIns="0" rIns="0" bIns="0" rtlCol="0" anchor="ctr"/>
           <a:lstStyle/>
           <a:p>
-            <a:pPr algn="ctr" indent="0" marL="0">
+            <a:pPr marL="0" indent="0" algn="ctr">
               <a:buNone/>
             </a:pPr>
             <a:r>
@@ -12206,7 +11204,7 @@
           <a:bodyPr wrap="square" lIns="0" tIns="0" rIns="0" bIns="0" rtlCol="0" anchor="ctr"/>
           <a:lstStyle/>
           <a:p>
-            <a:pPr algn="ctr" indent="0" marL="0">
+            <a:pPr marL="0" indent="0" algn="ctr">
               <a:buNone/>
             </a:pPr>
             <a:r>
@@ -12525,4 +11523,299 @@
     </a:ext>
   </a:extLst>
 </a:theme>
+</file>
+
+<file path=ppt/theme/theme2.xml><?xml version="1.0" encoding="utf-8"?>
+<a:theme xmlns:a="http://schemas.openxmlformats.org/drawingml/2006/main" name="Тема Office">
+  <a:themeElements>
+    <a:clrScheme name="Стандартная">
+      <a:dk1>
+        <a:sysClr val="windowText" lastClr="000000"/>
+      </a:dk1>
+      <a:lt1>
+        <a:sysClr val="window" lastClr="FFFFFF"/>
+      </a:lt1>
+      <a:dk2>
+        <a:srgbClr val="44546A"/>
+      </a:dk2>
+      <a:lt2>
+        <a:srgbClr val="E7E6E6"/>
+      </a:lt2>
+      <a:accent1>
+        <a:srgbClr val="4472C4"/>
+      </a:accent1>
+      <a:accent2>
+        <a:srgbClr val="ED7D31"/>
+      </a:accent2>
+      <a:accent3>
+        <a:srgbClr val="A5A5A5"/>
+      </a:accent3>
+      <a:accent4>
+        <a:srgbClr val="FFC000"/>
+      </a:accent4>
+      <a:accent5>
+        <a:srgbClr val="5B9BD5"/>
+      </a:accent5>
+      <a:accent6>
+        <a:srgbClr val="70AD47"/>
+      </a:accent6>
+      <a:hlink>
+        <a:srgbClr val="0563C1"/>
+      </a:hlink>
+      <a:folHlink>
+        <a:srgbClr val="954F72"/>
+      </a:folHlink>
+    </a:clrScheme>
+    <a:fontScheme name="Стандартная">
+      <a:majorFont>
+        <a:latin typeface="Calibri Light" panose="020F0302020204030204"/>
+        <a:ea typeface=""/>
+        <a:cs typeface=""/>
+        <a:font script="Jpan" typeface="游ゴシック Light"/>
+        <a:font script="Hang" typeface="맑은 고딕"/>
+        <a:font script="Hans" typeface="等线 Light"/>
+        <a:font script="Hant" typeface="新細明體"/>
+        <a:font script="Arab" typeface="Times New Roman"/>
+        <a:font script="Hebr" typeface="Times New Roman"/>
+        <a:font script="Thai" typeface="Angsana New"/>
+        <a:font script="Ethi" typeface="Nyala"/>
+        <a:font script="Beng" typeface="Vrinda"/>
+        <a:font script="Gujr" typeface="Shruti"/>
+        <a:font script="Khmr" typeface="MoolBoran"/>
+        <a:font script="Knda" typeface="Tunga"/>
+        <a:font script="Guru" typeface="Raavi"/>
+        <a:font script="Cans" typeface="Euphemia"/>
+        <a:font script="Cher" typeface="Plantagenet Cherokee"/>
+        <a:font script="Yiii" typeface="Microsoft Yi Baiti"/>
+        <a:font script="Tibt" typeface="Microsoft Himalaya"/>
+        <a:font script="Thaa" typeface="MV Boli"/>
+        <a:font script="Deva" typeface="Mangal"/>
+        <a:font script="Telu" typeface="Gautami"/>
+        <a:font script="Taml" typeface="Latha"/>
+        <a:font script="Syrc" typeface="Estrangelo Edessa"/>
+        <a:font script="Orya" typeface="Kalinga"/>
+        <a:font script="Mlym" typeface="Kartika"/>
+        <a:font script="Laoo" typeface="DokChampa"/>
+        <a:font script="Sinh" typeface="Iskoola Pota"/>
+        <a:font script="Mong" typeface="Mongolian Baiti"/>
+        <a:font script="Viet" typeface="Times New Roman"/>
+        <a:font script="Uigh" typeface="Microsoft Uighur"/>
+        <a:font script="Geor" typeface="Sylfaen"/>
+        <a:font script="Armn" typeface="Arial"/>
+        <a:font script="Bugi" typeface="Leelawadee UI"/>
+        <a:font script="Bopo" typeface="Microsoft JhengHei"/>
+        <a:font script="Java" typeface="Javanese Text"/>
+        <a:font script="Lisu" typeface="Segoe UI"/>
+        <a:font script="Mymr" typeface="Myanmar Text"/>
+        <a:font script="Nkoo" typeface="Ebrima"/>
+        <a:font script="Olck" typeface="Nirmala UI"/>
+        <a:font script="Osma" typeface="Ebrima"/>
+        <a:font script="Phag" typeface="Phagspa"/>
+        <a:font script="Syrn" typeface="Estrangelo Edessa"/>
+        <a:font script="Syrj" typeface="Estrangelo Edessa"/>
+        <a:font script="Syre" typeface="Estrangelo Edessa"/>
+        <a:font script="Sora" typeface="Nirmala UI"/>
+        <a:font script="Tale" typeface="Microsoft Tai Le"/>
+        <a:font script="Talu" typeface="Microsoft New Tai Lue"/>
+        <a:font script="Tfng" typeface="Ebrima"/>
+      </a:majorFont>
+      <a:minorFont>
+        <a:latin typeface="Calibri" panose="020F0502020204030204"/>
+        <a:ea typeface=""/>
+        <a:cs typeface=""/>
+        <a:font script="Jpan" typeface="游ゴシック"/>
+        <a:font script="Hang" typeface="맑은 고딕"/>
+        <a:font script="Hans" typeface="等线"/>
+        <a:font script="Hant" typeface="新細明體"/>
+        <a:font script="Arab" typeface="Arial"/>
+        <a:font script="Hebr" typeface="Arial"/>
+        <a:font script="Thai" typeface="Cordia New"/>
+        <a:font script="Ethi" typeface="Nyala"/>
+        <a:font script="Beng" typeface="Vrinda"/>
+        <a:font script="Gujr" typeface="Shruti"/>
+        <a:font script="Khmr" typeface="DaunPenh"/>
+        <a:font script="Knda" typeface="Tunga"/>
+        <a:font script="Guru" typeface="Raavi"/>
+        <a:font script="Cans" typeface="Euphemia"/>
+        <a:font script="Cher" typeface="Plantagenet Cherokee"/>
+        <a:font script="Yiii" typeface="Microsoft Yi Baiti"/>
+        <a:font script="Tibt" typeface="Microsoft Himalaya"/>
+        <a:font script="Thaa" typeface="MV Boli"/>
+        <a:font script="Deva" typeface="Mangal"/>
+        <a:font script="Telu" typeface="Gautami"/>
+        <a:font script="Taml" typeface="Latha"/>
+        <a:font script="Syrc" typeface="Estrangelo Edessa"/>
+        <a:font script="Orya" typeface="Kalinga"/>
+        <a:font script="Mlym" typeface="Kartika"/>
+        <a:font script="Laoo" typeface="DokChampa"/>
+        <a:font script="Sinh" typeface="Iskoola Pota"/>
+        <a:font script="Mong" typeface="Mongolian Baiti"/>
+        <a:font script="Viet" typeface="Arial"/>
+        <a:font script="Uigh" typeface="Microsoft Uighur"/>
+        <a:font script="Geor" typeface="Sylfaen"/>
+        <a:font script="Armn" typeface="Arial"/>
+        <a:font script="Bugi" typeface="Leelawadee UI"/>
+        <a:font script="Bopo" typeface="Microsoft JhengHei"/>
+        <a:font script="Java" typeface="Javanese Text"/>
+        <a:font script="Lisu" typeface="Segoe UI"/>
+        <a:font script="Mymr" typeface="Myanmar Text"/>
+        <a:font script="Nkoo" typeface="Ebrima"/>
+        <a:font script="Olck" typeface="Nirmala UI"/>
+        <a:font script="Osma" typeface="Ebrima"/>
+        <a:font script="Phag" typeface="Phagspa"/>
+        <a:font script="Syrn" typeface="Estrangelo Edessa"/>
+        <a:font script="Syrj" typeface="Estrangelo Edessa"/>
+        <a:font script="Syre" typeface="Estrangelo Edessa"/>
+        <a:font script="Sora" typeface="Nirmala UI"/>
+        <a:font script="Tale" typeface="Microsoft Tai Le"/>
+        <a:font script="Talu" typeface="Microsoft New Tai Lue"/>
+        <a:font script="Tfng" typeface="Ebrima"/>
+      </a:minorFont>
+    </a:fontScheme>
+    <a:fmtScheme name="Стандартная">
+      <a:fillStyleLst>
+        <a:solidFill>
+          <a:schemeClr val="phClr"/>
+        </a:solidFill>
+        <a:gradFill rotWithShape="1">
+          <a:gsLst>
+            <a:gs pos="0">
+              <a:schemeClr val="phClr">
+                <a:lumMod val="110000"/>
+                <a:satMod val="105000"/>
+                <a:tint val="67000"/>
+              </a:schemeClr>
+            </a:gs>
+            <a:gs pos="50000">
+              <a:schemeClr val="phClr">
+                <a:lumMod val="105000"/>
+                <a:satMod val="103000"/>
+                <a:tint val="73000"/>
+              </a:schemeClr>
+            </a:gs>
+            <a:gs pos="100000">
+              <a:schemeClr val="phClr">
+                <a:lumMod val="105000"/>
+                <a:satMod val="109000"/>
+                <a:tint val="81000"/>
+              </a:schemeClr>
+            </a:gs>
+          </a:gsLst>
+          <a:lin ang="5400000" scaled="0"/>
+        </a:gradFill>
+        <a:gradFill rotWithShape="1">
+          <a:gsLst>
+            <a:gs pos="0">
+              <a:schemeClr val="phClr">
+                <a:satMod val="103000"/>
+                <a:lumMod val="102000"/>
+                <a:tint val="94000"/>
+              </a:schemeClr>
+            </a:gs>
+            <a:gs pos="50000">
+              <a:schemeClr val="phClr">
+                <a:satMod val="110000"/>
+                <a:lumMod val="100000"/>
+                <a:shade val="100000"/>
+              </a:schemeClr>
+            </a:gs>
+            <a:gs pos="100000">
+              <a:schemeClr val="phClr">
+                <a:lumMod val="99000"/>
+                <a:satMod val="120000"/>
+                <a:shade val="78000"/>
+              </a:schemeClr>
+            </a:gs>
+          </a:gsLst>
+          <a:lin ang="5400000" scaled="0"/>
+        </a:gradFill>
+      </a:fillStyleLst>
+      <a:lnStyleLst>
+        <a:ln w="6350" cap="flat" cmpd="sng" algn="ctr">
+          <a:solidFill>
+            <a:schemeClr val="phClr"/>
+          </a:solidFill>
+          <a:prstDash val="solid"/>
+          <a:miter lim="800000"/>
+        </a:ln>
+        <a:ln w="12700" cap="flat" cmpd="sng" algn="ctr">
+          <a:solidFill>
+            <a:schemeClr val="phClr"/>
+          </a:solidFill>
+          <a:prstDash val="solid"/>
+          <a:miter lim="800000"/>
+        </a:ln>
+        <a:ln w="19050" cap="flat" cmpd="sng" algn="ctr">
+          <a:solidFill>
+            <a:schemeClr val="phClr"/>
+          </a:solidFill>
+          <a:prstDash val="solid"/>
+          <a:miter lim="800000"/>
+        </a:ln>
+      </a:lnStyleLst>
+      <a:effectStyleLst>
+        <a:effectStyle>
+          <a:effectLst/>
+        </a:effectStyle>
+        <a:effectStyle>
+          <a:effectLst/>
+        </a:effectStyle>
+        <a:effectStyle>
+          <a:effectLst>
+            <a:outerShdw blurRad="57150" dist="19050" dir="5400000" algn="ctr" rotWithShape="0">
+              <a:srgbClr val="000000">
+                <a:alpha val="63000"/>
+              </a:srgbClr>
+            </a:outerShdw>
+          </a:effectLst>
+        </a:effectStyle>
+      </a:effectStyleLst>
+      <a:bgFillStyleLst>
+        <a:solidFill>
+          <a:schemeClr val="phClr"/>
+        </a:solidFill>
+        <a:solidFill>
+          <a:schemeClr val="phClr">
+            <a:tint val="95000"/>
+            <a:satMod val="170000"/>
+          </a:schemeClr>
+        </a:solidFill>
+        <a:gradFill rotWithShape="1">
+          <a:gsLst>
+            <a:gs pos="0">
+              <a:schemeClr val="phClr">
+                <a:tint val="93000"/>
+                <a:satMod val="150000"/>
+                <a:shade val="98000"/>
+                <a:lumMod val="102000"/>
+              </a:schemeClr>
+            </a:gs>
+            <a:gs pos="50000">
+              <a:schemeClr val="phClr">
+                <a:tint val="98000"/>
+                <a:satMod val="130000"/>
+                <a:shade val="90000"/>
+                <a:lumMod val="103000"/>
+              </a:schemeClr>
+            </a:gs>
+            <a:gs pos="100000">
+              <a:schemeClr val="phClr">
+                <a:shade val="63000"/>
+                <a:satMod val="120000"/>
+              </a:schemeClr>
+            </a:gs>
+          </a:gsLst>
+          <a:lin ang="5400000" scaled="0"/>
+        </a:gradFill>
+      </a:bgFillStyleLst>
+    </a:fmtScheme>
+  </a:themeElements>
+  <a:objectDefaults/>
+  <a:extraClrSchemeLst/>
+  <a:extLst>
+    <a:ext uri="{05A4C25C-085E-4340-85A3-A5531E510DB2}">
+      <thm15:themeFamily xmlns:thm15="http://schemas.microsoft.com/office/thememl/2012/main" name="Office Theme" id="{62F939B6-93AF-4DB8-9C6B-D6C7DFDC589F}" vid="{4A3C46E8-61CC-4603-A589-7422A47A8E4A}"/>
+    </a:ext>
+  </a:extLst>
+</a:theme>
 </file>
--- a/presentations/Артамонов_ВКР_телеметрия.pptx
+++ b/presentations/Артамонов_ВКР_телеметрия.pptx
@@ -3250,7 +3250,7 @@
               <a:buNone/>
             </a:pPr>
             <a:r>
-              <a:rPr lang="ru-RU" sz="1250" b="1" spc="250" kern="0" dirty="0">
+              <a:rPr lang="ru-RU" sz="1500" b="1" spc="250" kern="0" dirty="0">
                 <a:solidFill>
                   <a:srgbClr val="1F9BD8"/>
                 </a:solidFill>
@@ -4547,7 +4547,7 @@
               <a:buNone/>
             </a:pPr>
             <a:r>
-              <a:rPr lang="en-US" sz="1250" b="1" spc="250" kern="0" dirty="0">
+              <a:rPr lang="en-US" sz="1500" b="1" spc="250" kern="0" dirty="0">
                 <a:solidFill>
                   <a:srgbClr val="1F9BD8"/>
                 </a:solidFill>
@@ -4557,7 +4557,7 @@
               </a:rPr>
               <a:t>АКТУАЛЬНОСТЬ</a:t>
             </a:r>
-            <a:endParaRPr lang="en-US" sz="1250" dirty="0"/>
+            <a:endParaRPr lang="en-US" sz="1500" dirty="0"/>
           </a:p>
         </p:txBody>
       </p:sp>
@@ -5194,7 +5194,7 @@
               <a:buNone/>
             </a:pPr>
             <a:r>
-              <a:rPr lang="en-US" sz="1250" b="1" spc="250" kern="0" dirty="0">
+              <a:rPr lang="en-US" sz="1500" b="1" spc="250" kern="0" dirty="0">
                 <a:solidFill>
                   <a:srgbClr val="1F9BD8"/>
                 </a:solidFill>
@@ -5204,7 +5204,7 @@
               </a:rPr>
               <a:t>ВЫБОР ДВИЖКА</a:t>
             </a:r>
-            <a:endParaRPr lang="en-US" sz="1250" dirty="0"/>
+            <a:endParaRPr lang="en-US" sz="1500" dirty="0"/>
           </a:p>
         </p:txBody>
       </p:sp>
@@ -6037,7 +6037,7 @@
               <a:buNone/>
             </a:pPr>
             <a:r>
-              <a:rPr lang="ru-RU" sz="1250" b="1" kern="0" dirty="0">
+              <a:rPr lang="ru-RU" sz="1500" b="1" kern="0" dirty="0">
                 <a:solidFill>
                   <a:srgbClr val="1F9BD8"/>
                 </a:solidFill>
@@ -7447,7 +7447,7 @@
               <a:buNone/>
             </a:pPr>
             <a:r>
-              <a:rPr lang="en-US" sz="1250" b="1" spc="250" kern="0" dirty="0">
+              <a:rPr lang="en-US" sz="1500" b="1" spc="250" kern="0" dirty="0">
                 <a:solidFill>
                   <a:srgbClr val="1F9BD8"/>
                 </a:solidFill>
@@ -7457,7 +7457,7 @@
               </a:rPr>
               <a:t>ИНТЕРФЕЙС</a:t>
             </a:r>
-            <a:endParaRPr lang="en-US" sz="1250" dirty="0"/>
+            <a:endParaRPr lang="en-US" sz="1500" dirty="0"/>
           </a:p>
         </p:txBody>
       </p:sp>
@@ -8302,7 +8302,7 @@
               <a:buNone/>
             </a:pPr>
             <a:r>
-              <a:rPr lang="en-US" sz="1250" b="1" spc="250" kern="0" dirty="0">
+              <a:rPr lang="en-US" sz="1500" b="1" spc="250" kern="0" dirty="0">
                 <a:solidFill>
                   <a:srgbClr val="1F9BD8"/>
                 </a:solidFill>
@@ -8312,7 +8312,7 @@
               </a:rPr>
               <a:t>ИНТЕРФЕЙС</a:t>
             </a:r>
-            <a:endParaRPr lang="en-US" sz="1250" dirty="0"/>
+            <a:endParaRPr lang="en-US" sz="1500" dirty="0"/>
           </a:p>
         </p:txBody>
       </p:sp>
@@ -9923,7 +9923,7 @@
               <a:buNone/>
             </a:pPr>
             <a:r>
-              <a:rPr lang="en-US" sz="1250" b="1" spc="250" kern="0" dirty="0">
+              <a:rPr lang="en-US" sz="1500" b="1" spc="250" kern="0" dirty="0">
                 <a:solidFill>
                   <a:srgbClr val="1F9BD8"/>
                 </a:solidFill>
@@ -9933,7 +9933,7 @@
               </a:rPr>
               <a:t>КОНТРАКТ</a:t>
             </a:r>
-            <a:endParaRPr lang="en-US" sz="1250" dirty="0"/>
+            <a:endParaRPr lang="en-US" sz="1500" dirty="0"/>
           </a:p>
         </p:txBody>
       </p:sp>
@@ -10960,7 +10960,7 @@
               <a:buNone/>
             </a:pPr>
             <a:r>
-              <a:rPr lang="en-US" sz="1250" b="1" spc="250" kern="0" dirty="0">
+              <a:rPr lang="en-US" sz="1500" b="1" spc="250" kern="0" dirty="0">
                 <a:solidFill>
                   <a:srgbClr val="1F9BD8"/>
                 </a:solidFill>
@@ -10970,7 +10970,7 @@
               </a:rPr>
               <a:t>МАСШТАБИРОВАНИЕ</a:t>
             </a:r>
-            <a:endParaRPr lang="en-US" sz="1250" dirty="0"/>
+            <a:endParaRPr lang="en-US" sz="1500" dirty="0"/>
           </a:p>
         </p:txBody>
       </p:sp>
@@ -11866,7 +11866,7 @@
               <a:buNone/>
             </a:pPr>
             <a:r>
-              <a:rPr lang="en-US" sz="1250" b="1" spc="250" kern="0" dirty="0">
+              <a:rPr lang="en-US" sz="1500" b="1" spc="250" kern="0" dirty="0">
                 <a:solidFill>
                   <a:srgbClr val="1F9BD8"/>
                 </a:solidFill>
@@ -11876,7 +11876,7 @@
               </a:rPr>
               <a:t>ЗАДЕЛЫ НА БУДУЩЕЕ</a:t>
             </a:r>
-            <a:endParaRPr lang="en-US" sz="1250" dirty="0"/>
+            <a:endParaRPr lang="en-US" sz="1500" dirty="0"/>
           </a:p>
         </p:txBody>
       </p:sp>
